--- a/slides/docker-session3-mysql-compose.pptx
+++ b/slides/docker-session3-mysql-compose.pptx
@@ -2,42 +2,39 @@
 <file path=ppt/presentation.xml><?xml version="1.0" encoding="utf-8"?>
 <p:presentation xmlns:p="http://schemas.openxmlformats.org/presentationml/2006/main">
   <p:sldMasterIdLst>
-    <p:sldMasterId xmlns:r="http://schemas.openxmlformats.org/officeDocument/2006/relationships" id="2147483648" r:id="Rbee393ee884e43b3"/>
+    <p:sldMasterId xmlns:r="http://schemas.openxmlformats.org/officeDocument/2006/relationships" id="2147483648" r:id="R0723807342234ed7"/>
   </p:sldMasterIdLst>
-  <p:notesMasterIdLst>
-    <p:notesMasterId xmlns:r="http://schemas.openxmlformats.org/officeDocument/2006/relationships" r:id="Rb70dc6f867524df4"/>
-  </p:notesMasterIdLst>
   <p:sldIdLst>
-    <p:sldId xmlns:r="http://schemas.openxmlformats.org/officeDocument/2006/relationships" id="256" r:id="Rf04ee7754d734923"/>
-    <p:sldId xmlns:r="http://schemas.openxmlformats.org/officeDocument/2006/relationships" id="257" r:id="R7ab30e64da214909"/>
-    <p:sldId xmlns:r="http://schemas.openxmlformats.org/officeDocument/2006/relationships" id="258" r:id="R80155b9b8b554868"/>
-    <p:sldId xmlns:r="http://schemas.openxmlformats.org/officeDocument/2006/relationships" id="259" r:id="Rbd76220bd9f8498d"/>
-    <p:sldId xmlns:r="http://schemas.openxmlformats.org/officeDocument/2006/relationships" id="260" r:id="R1c909ad2b4424762"/>
-    <p:sldId xmlns:r="http://schemas.openxmlformats.org/officeDocument/2006/relationships" id="261" r:id="R7eff7344e84449ad"/>
-    <p:sldId xmlns:r="http://schemas.openxmlformats.org/officeDocument/2006/relationships" id="262" r:id="R70e27275e0d34f7a"/>
-    <p:sldId xmlns:r="http://schemas.openxmlformats.org/officeDocument/2006/relationships" id="263" r:id="Rf1a3785c13674d7d"/>
-    <p:sldId xmlns:r="http://schemas.openxmlformats.org/officeDocument/2006/relationships" id="264" r:id="R149affd6fda34b02"/>
-    <p:sldId xmlns:r="http://schemas.openxmlformats.org/officeDocument/2006/relationships" id="265" r:id="Re5f6a75d12364270"/>
-    <p:sldId xmlns:r="http://schemas.openxmlformats.org/officeDocument/2006/relationships" id="266" r:id="Ra0474b530e344b93"/>
-    <p:sldId xmlns:r="http://schemas.openxmlformats.org/officeDocument/2006/relationships" id="267" r:id="Re00af84625db4024"/>
-    <p:sldId xmlns:r="http://schemas.openxmlformats.org/officeDocument/2006/relationships" id="268" r:id="R9cfe12a771984654"/>
-    <p:sldId xmlns:r="http://schemas.openxmlformats.org/officeDocument/2006/relationships" id="269" r:id="Rfc9ccc09db0b49a0"/>
-    <p:sldId xmlns:r="http://schemas.openxmlformats.org/officeDocument/2006/relationships" id="270" r:id="R6fa5ed3497d64318"/>
-    <p:sldId xmlns:r="http://schemas.openxmlformats.org/officeDocument/2006/relationships" id="271" r:id="R78304e299d60461c"/>
-    <p:sldId xmlns:r="http://schemas.openxmlformats.org/officeDocument/2006/relationships" id="272" r:id="Ra633d1c3c29b43dc"/>
-    <p:sldId xmlns:r="http://schemas.openxmlformats.org/officeDocument/2006/relationships" id="273" r:id="Rb4688e8ace764e18"/>
-    <p:sldId xmlns:r="http://schemas.openxmlformats.org/officeDocument/2006/relationships" id="274" r:id="Rc20a8e8a621342e4"/>
-    <p:sldId xmlns:r="http://schemas.openxmlformats.org/officeDocument/2006/relationships" id="275" r:id="Re506e123bdcc470a"/>
-    <p:sldId xmlns:r="http://schemas.openxmlformats.org/officeDocument/2006/relationships" id="276" r:id="Rc933efec2fd740d0"/>
-    <p:sldId xmlns:r="http://schemas.openxmlformats.org/officeDocument/2006/relationships" id="277" r:id="R71a4b17eb8d047cb"/>
-    <p:sldId xmlns:r="http://schemas.openxmlformats.org/officeDocument/2006/relationships" id="278" r:id="R6c5d722c35f1487c"/>
-    <p:sldId xmlns:r="http://schemas.openxmlformats.org/officeDocument/2006/relationships" id="279" r:id="Rc96406ca2ce743df"/>
-    <p:sldId xmlns:r="http://schemas.openxmlformats.org/officeDocument/2006/relationships" id="280" r:id="Ra6e6152a3f404b1a"/>
-    <p:sldId xmlns:r="http://schemas.openxmlformats.org/officeDocument/2006/relationships" id="281" r:id="Ra8f8cf06b3e74a0a"/>
-    <p:sldId xmlns:r="http://schemas.openxmlformats.org/officeDocument/2006/relationships" id="282" r:id="Rdc1419b2abcc4421"/>
-    <p:sldId xmlns:r="http://schemas.openxmlformats.org/officeDocument/2006/relationships" id="283" r:id="R42122124421f462c"/>
-    <p:sldId xmlns:r="http://schemas.openxmlformats.org/officeDocument/2006/relationships" id="284" r:id="R4ea827eddf6b4159"/>
-    <p:sldId xmlns:r="http://schemas.openxmlformats.org/officeDocument/2006/relationships" id="285" r:id="Rf50797feb9fc4252"/>
+    <p:sldId xmlns:r="http://schemas.openxmlformats.org/officeDocument/2006/relationships" id="256" r:id="R3bb9ed9246724c7f"/>
+    <p:sldId xmlns:r="http://schemas.openxmlformats.org/officeDocument/2006/relationships" id="257" r:id="R9d8c0d038f1347bb"/>
+    <p:sldId xmlns:r="http://schemas.openxmlformats.org/officeDocument/2006/relationships" id="258" r:id="R4d06066d07d640f1"/>
+    <p:sldId xmlns:r="http://schemas.openxmlformats.org/officeDocument/2006/relationships" id="259" r:id="R5db12356fad84f33"/>
+    <p:sldId xmlns:r="http://schemas.openxmlformats.org/officeDocument/2006/relationships" id="260" r:id="Ra37fad4c4c6c4a8d"/>
+    <p:sldId xmlns:r="http://schemas.openxmlformats.org/officeDocument/2006/relationships" id="261" r:id="R3c069a58dc974fb2"/>
+    <p:sldId xmlns:r="http://schemas.openxmlformats.org/officeDocument/2006/relationships" id="262" r:id="Rbf41462062bc44aa"/>
+    <p:sldId xmlns:r="http://schemas.openxmlformats.org/officeDocument/2006/relationships" id="263" r:id="Rb7fe58702fa94ddf"/>
+    <p:sldId xmlns:r="http://schemas.openxmlformats.org/officeDocument/2006/relationships" id="264" r:id="R6b580d0fb54c4500"/>
+    <p:sldId xmlns:r="http://schemas.openxmlformats.org/officeDocument/2006/relationships" id="265" r:id="R374a33a5772f4baf"/>
+    <p:sldId xmlns:r="http://schemas.openxmlformats.org/officeDocument/2006/relationships" id="266" r:id="Rbe91b6361ebd4547"/>
+    <p:sldId xmlns:r="http://schemas.openxmlformats.org/officeDocument/2006/relationships" id="267" r:id="Rbb116402c2304750"/>
+    <p:sldId xmlns:r="http://schemas.openxmlformats.org/officeDocument/2006/relationships" id="268" r:id="R5d962329b29e470e"/>
+    <p:sldId xmlns:r="http://schemas.openxmlformats.org/officeDocument/2006/relationships" id="269" r:id="R524228ef67314c5a"/>
+    <p:sldId xmlns:r="http://schemas.openxmlformats.org/officeDocument/2006/relationships" id="270" r:id="Re7a68d2696234a37"/>
+    <p:sldId xmlns:r="http://schemas.openxmlformats.org/officeDocument/2006/relationships" id="271" r:id="R02c6b63a90f24ef6"/>
+    <p:sldId xmlns:r="http://schemas.openxmlformats.org/officeDocument/2006/relationships" id="272" r:id="Re1288fe984a44e8d"/>
+    <p:sldId xmlns:r="http://schemas.openxmlformats.org/officeDocument/2006/relationships" id="273" r:id="R583bc90f82f244ad"/>
+    <p:sldId xmlns:r="http://schemas.openxmlformats.org/officeDocument/2006/relationships" id="274" r:id="R24070ba0cbe24522"/>
+    <p:sldId xmlns:r="http://schemas.openxmlformats.org/officeDocument/2006/relationships" id="275" r:id="Rda47fcacbc8d4b3d"/>
+    <p:sldId xmlns:r="http://schemas.openxmlformats.org/officeDocument/2006/relationships" id="276" r:id="Rceeebe22d6444bf5"/>
+    <p:sldId xmlns:r="http://schemas.openxmlformats.org/officeDocument/2006/relationships" id="277" r:id="Ra84af5a49278411f"/>
+    <p:sldId xmlns:r="http://schemas.openxmlformats.org/officeDocument/2006/relationships" id="278" r:id="R78bed099d3124ee8"/>
+    <p:sldId xmlns:r="http://schemas.openxmlformats.org/officeDocument/2006/relationships" id="279" r:id="R48380da907be4173"/>
+    <p:sldId xmlns:r="http://schemas.openxmlformats.org/officeDocument/2006/relationships" id="280" r:id="Rff72ae626e744568"/>
+    <p:sldId xmlns:r="http://schemas.openxmlformats.org/officeDocument/2006/relationships" id="281" r:id="R9e0c904148e04b18"/>
+    <p:sldId xmlns:r="http://schemas.openxmlformats.org/officeDocument/2006/relationships" id="282" r:id="Rdf2355019ff041de"/>
+    <p:sldId xmlns:r="http://schemas.openxmlformats.org/officeDocument/2006/relationships" id="283" r:id="R41fc3d396b3544b5"/>
+    <p:sldId xmlns:r="http://schemas.openxmlformats.org/officeDocument/2006/relationships" id="284" r:id="Rd7627dfebde64855"/>
+    <p:sldId xmlns:r="http://schemas.openxmlformats.org/officeDocument/2006/relationships" id="285" r:id="R09b6550b11a34661"/>
   </p:sldIdLst>
   <p:sldSz cx="12192000" cy="6858000"/>
   <p:notesSz cx="6858000" cy="9144000"/>
@@ -139,2493 +136,6 @@
 </p:presentation>
 </file>
 
-<file path=ppt/notesMasters/notesMaster1.xml><?xml version="1.0" encoding="utf-8"?>
-<p:notesMaster xmlns:p="http://schemas.openxmlformats.org/presentationml/2006/main">
-  <p:cSld>
-    <p:bg>
-      <p:bgRef idx="1001">
-        <a:schemeClr xmlns:a="http://schemas.openxmlformats.org/drawingml/2006/main" val="bg1"/>
-      </p:bgRef>
-    </p:bg>
-    <p:spTree>
-      <p:nvGrpSpPr>
-        <p:cNvPr id="1" name=""/>
-        <p:cNvGrpSpPr/>
-        <p:nvPr/>
-      </p:nvGrpSpPr>
-      <p:grpSpPr>
-        <a:xfrm xmlns:a="http://schemas.openxmlformats.org/drawingml/2006/main"/>
-      </p:grpSpPr>
-      <p:sp>
-        <p:nvSpPr>
-          <p:cNvPr id="2" name="Header Placeholder"/>
-          <p:cNvSpPr/>
-          <p:nvPr>
-            <p:ph type="hdr" sz="quarter"/>
-          </p:nvPr>
-        </p:nvSpPr>
-        <p:spPr>
-          <a:prstGeom xmlns:a="http://schemas.openxmlformats.org/drawingml/2006/main" prst="rect">
-            <a:avLst/>
-          </a:prstGeom>
-        </p:spPr>
-        <p:txBody>
-          <a:bodyPr xmlns:a="http://schemas.openxmlformats.org/drawingml/2006/main"/>
-          <a:lstStyle xmlns:a="http://schemas.openxmlformats.org/drawingml/2006/main"/>
-          <a:p xmlns:a="http://schemas.openxmlformats.org/drawingml/2006/main"/>
-        </p:txBody>
-      </p:sp>
-      <p:sp>
-        <p:nvSpPr>
-          <p:cNvPr id="3" name="Date Placeholder"/>
-          <p:cNvSpPr/>
-          <p:nvPr>
-            <p:ph type="dt" sz="quarter" idx="1"/>
-          </p:nvPr>
-        </p:nvSpPr>
-        <p:spPr>
-          <a:prstGeom xmlns:a="http://schemas.openxmlformats.org/drawingml/2006/main" prst="rect">
-            <a:avLst/>
-          </a:prstGeom>
-        </p:spPr>
-        <p:txBody>
-          <a:bodyPr xmlns:a="http://schemas.openxmlformats.org/drawingml/2006/main"/>
-          <a:lstStyle xmlns:a="http://schemas.openxmlformats.org/drawingml/2006/main"/>
-          <a:p xmlns:a="http://schemas.openxmlformats.org/drawingml/2006/main"/>
-        </p:txBody>
-      </p:sp>
-      <p:sp>
-        <p:nvSpPr>
-          <p:cNvPr id="4" name="Slide Image Placeholder"/>
-          <p:cNvSpPr/>
-          <p:nvPr>
-            <p:ph type="sldImg" idx="2"/>
-          </p:nvPr>
-        </p:nvSpPr>
-        <p:spPr>
-          <a:prstGeom xmlns:a="http://schemas.openxmlformats.org/drawingml/2006/main" prst="rect">
-            <a:avLst/>
-          </a:prstGeom>
-        </p:spPr>
-        <p:txBody>
-          <a:bodyPr xmlns:a="http://schemas.openxmlformats.org/drawingml/2006/main"/>
-          <a:lstStyle xmlns:a="http://schemas.openxmlformats.org/drawingml/2006/main"/>
-          <a:p xmlns:a="http://schemas.openxmlformats.org/drawingml/2006/main"/>
-        </p:txBody>
-      </p:sp>
-      <p:sp>
-        <p:nvSpPr>
-          <p:cNvPr id="5" name="Notes Placeholder"/>
-          <p:cNvSpPr/>
-          <p:nvPr>
-            <p:ph type="body" sz="quarter" idx="3"/>
-          </p:nvPr>
-        </p:nvSpPr>
-        <p:spPr>
-          <a:prstGeom xmlns:a="http://schemas.openxmlformats.org/drawingml/2006/main" prst="rect">
-            <a:avLst/>
-          </a:prstGeom>
-        </p:spPr>
-        <p:txBody>
-          <a:bodyPr xmlns:a="http://schemas.openxmlformats.org/drawingml/2006/main"/>
-          <a:lstStyle xmlns:a="http://schemas.openxmlformats.org/drawingml/2006/main"/>
-          <a:p xmlns:a="http://schemas.openxmlformats.org/drawingml/2006/main"/>
-        </p:txBody>
-      </p:sp>
-      <p:sp>
-        <p:nvSpPr>
-          <p:cNvPr id="6" name="Footer Placeholder"/>
-          <p:cNvSpPr/>
-          <p:nvPr>
-            <p:ph type="ftr" sz="quarter" idx="4"/>
-          </p:nvPr>
-        </p:nvSpPr>
-        <p:spPr>
-          <a:prstGeom xmlns:a="http://schemas.openxmlformats.org/drawingml/2006/main" prst="rect">
-            <a:avLst/>
-          </a:prstGeom>
-        </p:spPr>
-        <p:txBody>
-          <a:bodyPr xmlns:a="http://schemas.openxmlformats.org/drawingml/2006/main"/>
-          <a:lstStyle xmlns:a="http://schemas.openxmlformats.org/drawingml/2006/main"/>
-          <a:p xmlns:a="http://schemas.openxmlformats.org/drawingml/2006/main"/>
-        </p:txBody>
-      </p:sp>
-      <p:sp>
-        <p:nvSpPr>
-          <p:cNvPr id="7" name="Slide Number Placeholder"/>
-          <p:cNvSpPr/>
-          <p:nvPr>
-            <p:ph type="sldNum" sz="quarter" idx="5"/>
-          </p:nvPr>
-        </p:nvSpPr>
-        <p:spPr>
-          <a:prstGeom xmlns:a="http://schemas.openxmlformats.org/drawingml/2006/main" prst="rect">
-            <a:avLst/>
-          </a:prstGeom>
-        </p:spPr>
-        <p:txBody>
-          <a:bodyPr xmlns:a="http://schemas.openxmlformats.org/drawingml/2006/main"/>
-          <a:lstStyle xmlns:a="http://schemas.openxmlformats.org/drawingml/2006/main"/>
-          <a:p xmlns:a="http://schemas.openxmlformats.org/drawingml/2006/main"/>
-        </p:txBody>
-      </p:sp>
-    </p:spTree>
-  </p:cSld>
-  <p:clrMap bg1="lt1" tx1="dk1" bg2="lt2" tx2="dk2" accent1="accent1" accent2="accent2" accent3="accent3" accent4="accent4" accent5="accent5" accent6="accent6" hlink="hlink" folHlink="folHlink"/>
-  <p:notesStyle>
-    <a:lvl1pPr xmlns:a="http://schemas.openxmlformats.org/drawingml/2006/main" marL="0" algn="l" defTabSz="914400" rtl="0" eaLnBrk="1" latinLnBrk="0" hangingPunct="1">
-      <a:defRPr sz="1200" kern="1200"/>
-    </a:lvl1pPr>
-  </p:notesStyle>
-</p:notesMaster>
-</file>
-
-<file path=ppt/notesMasters/theme/theme3.xml><?xml version="1.0" encoding="utf-8"?>
-<a:theme xmlns:a="http://schemas.openxmlformats.org/drawingml/2006/main" name="ChatGPT">
-  <a:themeElements>
-    <a:clrScheme name="ChatGPT">
-      <a:dk1>
-        <a:srgbClr val="000000"/>
-      </a:dk1>
-      <a:lt1>
-        <a:srgbClr val="FFFFFF"/>
-      </a:lt1>
-      <a:dk2>
-        <a:srgbClr val="0E2841"/>
-      </a:dk2>
-      <a:lt2>
-        <a:srgbClr val="E8E8E8"/>
-      </a:lt2>
-      <a:accent1>
-        <a:srgbClr val="156082"/>
-      </a:accent1>
-      <a:accent2>
-        <a:srgbClr val="E97132"/>
-      </a:accent2>
-      <a:accent3>
-        <a:srgbClr val="196B24"/>
-      </a:accent3>
-      <a:accent4>
-        <a:srgbClr val="0F9ED5"/>
-      </a:accent4>
-      <a:accent5>
-        <a:srgbClr val="A02B93"/>
-      </a:accent5>
-      <a:accent6>
-        <a:srgbClr val="4EA72E"/>
-      </a:accent6>
-      <a:hlink>
-        <a:srgbClr val="467886"/>
-      </a:hlink>
-      <a:folHlink>
-        <a:srgbClr val="96607D"/>
-      </a:folHlink>
-    </a:clrScheme>
-    <a:fontScheme name="Office">
-      <a:majorFont>
-        <a:latin typeface="Calibri Light"/>
-        <a:ea typeface="Calibri Light"/>
-        <a:cs typeface="Calibri Light"/>
-      </a:majorFont>
-      <a:minorFont>
-        <a:latin typeface="Calibri"/>
-        <a:ea typeface="Calibri"/>
-        <a:cs typeface="Calibri"/>
-      </a:minorFont>
-    </a:fontScheme>
-    <a:fmtScheme name="ChatGPT">
-      <a:fillStyleLst>
-        <a:solidFill>
-          <a:schemeClr val="phClr"/>
-        </a:solidFill>
-        <a:gradFill>
-          <a:gsLst>
-            <a:gs pos="0">
-              <a:schemeClr val="phClr">
-                <a:tint val="67000"/>
-                <a:lumMod val="110000"/>
-                <a:satMod val="105000"/>
-              </a:schemeClr>
-            </a:gs>
-            <a:gs pos="50000">
-              <a:schemeClr val="phClr">
-                <a:tint val="73000"/>
-                <a:lumMod val="105000"/>
-                <a:satMod val="103000"/>
-              </a:schemeClr>
-            </a:gs>
-            <a:gs pos="100000">
-              <a:schemeClr val="phClr">
-                <a:tint val="81000"/>
-                <a:lumMod val="105000"/>
-                <a:satMod val="109000"/>
-              </a:schemeClr>
-            </a:gs>
-          </a:gsLst>
-          <a:lin ang="5400000" scaled="0"/>
-        </a:gradFill>
-        <a:gradFill>
-          <a:gsLst>
-            <a:gs pos="0">
-              <a:schemeClr val="phClr">
-                <a:tint val="94000"/>
-                <a:lumMod val="102000"/>
-                <a:satMod val="103000"/>
-              </a:schemeClr>
-            </a:gs>
-            <a:gs pos="50000">
-              <a:schemeClr val="phClr">
-                <a:shade val="100000"/>
-                <a:lumMod val="100000"/>
-                <a:satMod val="110000"/>
-              </a:schemeClr>
-            </a:gs>
-            <a:gs pos="100000">
-              <a:schemeClr val="phClr">
-                <a:shade val="78000"/>
-                <a:lumMod val="99000"/>
-                <a:satMod val="120000"/>
-              </a:schemeClr>
-            </a:gs>
-          </a:gsLst>
-          <a:lin ang="5400000" scaled="0"/>
-        </a:gradFill>
-      </a:fillStyleLst>
-      <a:lnStyleLst>
-        <a:ln w="12700">
-          <a:solidFill>
-            <a:schemeClr val="phClr"/>
-          </a:solidFill>
-          <a:prstDash val="solid"/>
-        </a:ln>
-        <a:ln w="19050">
-          <a:solidFill>
-            <a:schemeClr val="phClr"/>
-          </a:solidFill>
-          <a:prstDash val="solid"/>
-        </a:ln>
-        <a:ln w="25400">
-          <a:solidFill>
-            <a:schemeClr val="phClr"/>
-          </a:solidFill>
-          <a:prstDash val="solid"/>
-        </a:ln>
-      </a:lnStyleLst>
-      <a:effectStyleLst>
-        <a:effectStyle>
-          <a:effectLst/>
-        </a:effectStyle>
-        <a:effectStyle>
-          <a:effectLst/>
-        </a:effectStyle>
-        <a:effectStyle>
-          <a:effectLst>
-            <a:outerShdw blurRad="57150" dist="19050" dir="5400000">
-              <a:srgbClr val="000000">
-                <a:alpha val="16000"/>
-              </a:srgbClr>
-            </a:outerShdw>
-          </a:effectLst>
-        </a:effectStyle>
-        <a:effectStyle>
-          <a:effectLst>
-            <a:outerShdw blurRad="19050" dist="9525" dir="5400000">
-              <a:srgbClr val="000000">
-                <a:alpha val="6000"/>
-              </a:srgbClr>
-            </a:outerShdw>
-          </a:effectLst>
-        </a:effectStyle>
-        <a:effectStyle>
-          <a:effectLst>
-            <a:outerShdw blurRad="28575" dist="9525" dir="5400000">
-              <a:srgbClr val="000000">
-                <a:alpha val="8000"/>
-              </a:srgbClr>
-            </a:outerShdw>
-          </a:effectLst>
-        </a:effectStyle>
-        <a:effectStyle>
-          <a:effectLst>
-            <a:outerShdw blurRad="57150" dist="19050" dir="5400000">
-              <a:srgbClr val="000000">
-                <a:alpha val="10000"/>
-              </a:srgbClr>
-            </a:outerShdw>
-          </a:effectLst>
-        </a:effectStyle>
-        <a:effectStyle>
-          <a:effectLst>
-            <a:outerShdw blurRad="114300" dist="38100" dir="5400000">
-              <a:srgbClr val="000000">
-                <a:alpha val="12000"/>
-              </a:srgbClr>
-            </a:outerShdw>
-          </a:effectLst>
-        </a:effectStyle>
-        <a:effectStyle>
-          <a:effectLst>
-            <a:outerShdw blurRad="171450" dist="57150" dir="5400000">
-              <a:srgbClr val="000000">
-                <a:alpha val="16000"/>
-              </a:srgbClr>
-            </a:outerShdw>
-          </a:effectLst>
-        </a:effectStyle>
-        <a:effectStyle>
-          <a:effectLst>
-            <a:outerShdw blurRad="266700" dist="95250" dir="5400000">
-              <a:srgbClr val="000000">
-                <a:alpha val="24000"/>
-              </a:srgbClr>
-            </a:outerShdw>
-          </a:effectLst>
-        </a:effectStyle>
-      </a:effectStyleLst>
-      <a:bgFillStyleLst>
-        <a:solidFill>
-          <a:schemeClr val="phClr"/>
-        </a:solidFill>
-        <a:solidFill>
-          <a:schemeClr val="phClr">
-            <a:tint val="95000"/>
-            <a:satMod val="170000"/>
-          </a:schemeClr>
-        </a:solidFill>
-        <a:gradFill>
-          <a:gsLst>
-            <a:gs pos="0">
-              <a:schemeClr val="phClr">
-                <a:tint val="93000"/>
-                <a:shade val="98000"/>
-                <a:lumMod val="102000"/>
-                <a:satMod val="150000"/>
-              </a:schemeClr>
-            </a:gs>
-            <a:gs pos="50000">
-              <a:schemeClr val="phClr">
-                <a:tint val="98000"/>
-                <a:shade val="90000"/>
-                <a:lumMod val="103000"/>
-                <a:satMod val="130000"/>
-              </a:schemeClr>
-            </a:gs>
-            <a:gs pos="100000">
-              <a:schemeClr val="phClr">
-                <a:shade val="63000"/>
-                <a:satMod val="120000"/>
-              </a:schemeClr>
-            </a:gs>
-          </a:gsLst>
-          <a:lin ang="5400000" scaled="0"/>
-        </a:gradFill>
-      </a:bgFillStyleLst>
-    </a:fmtScheme>
-  </a:themeElements>
-</a:theme>
-</file>
-
-<file path=ppt/notesSlides/notesSlide1.xml><?xml version="1.0" encoding="utf-8"?>
-<p:notes xmlns:p="http://schemas.openxmlformats.org/presentationml/2006/main">
-  <p:cSld>
-    <p:spTree>
-      <p:nvGrpSpPr>
-        <p:cNvPr id="1" name=""/>
-        <p:cNvGrpSpPr/>
-        <p:nvPr/>
-      </p:nvGrpSpPr>
-      <p:grpSpPr>
-        <a:xfrm xmlns:a="http://schemas.openxmlformats.org/drawingml/2006/main"/>
-      </p:grpSpPr>
-      <p:sp>
-        <p:nvSpPr>
-          <p:cNvPr id="2" name="Slide Image Placeholder 1"/>
-          <p:cNvSpPr>
-            <a:spLocks xmlns:a="http://schemas.openxmlformats.org/drawingml/2006/main" noGrp="1"/>
-          </p:cNvSpPr>
-          <p:nvPr>
-            <p:ph type="sldImg" idx="0"/>
-          </p:nvPr>
-        </p:nvSpPr>
-        <p:spPr/>
-      </p:sp>
-      <p:sp>
-        <p:nvSpPr>
-          <p:cNvPr id="3" name="Notes Placeholder 2"/>
-          <p:cNvSpPr>
-            <a:spLocks xmlns:a="http://schemas.openxmlformats.org/drawingml/2006/main" noGrp="1"/>
-          </p:cNvSpPr>
-          <p:nvPr>
-            <p:ph type="body" idx="1"/>
-          </p:nvPr>
-        </p:nvSpPr>
-        <p:spPr/>
-        <p:txBody>
-          <a:bodyPr xmlns:a="http://schemas.openxmlformats.org/drawingml/2006/main"/>
-          <a:lstStyle xmlns:a="http://schemas.openxmlformats.org/drawingml/2006/main"/>
-          <a:p xmlns:a="http://schemas.openxmlformats.org/drawingml/2006/main">
-            <a:r>
-              <a:t>第 3 堂是從單容器操作進入多服務環境的轉折點：資料庫、Compose、服務間連線。</a:t>
-            </a:r>
-          </a:p>
-        </p:txBody>
-      </p:sp>
-      <p:sp>
-        <p:nvSpPr>
-          <p:cNvPr id="4" name="Slide Number Placeholder 3"/>
-          <p:cNvSpPr>
-            <a:spLocks xmlns:a="http://schemas.openxmlformats.org/drawingml/2006/main" noGrp="1"/>
-          </p:cNvSpPr>
-          <p:nvPr>
-            <p:ph type="sldNum" idx="5"/>
-          </p:nvPr>
-        </p:nvSpPr>
-        <p:spPr/>
-        <p:txBody>
-          <a:bodyPr xmlns:a="http://schemas.openxmlformats.org/drawingml/2006/main"/>
-          <a:lstStyle xmlns:a="http://schemas.openxmlformats.org/drawingml/2006/main"/>
-          <a:p xmlns:a="http://schemas.openxmlformats.org/drawingml/2006/main"/>
-        </p:txBody>
-      </p:sp>
-    </p:spTree>
-  </p:cSld>
-  <p:clrMapOvr>
-    <a:masterClrMapping xmlns:a="http://schemas.openxmlformats.org/drawingml/2006/main"/>
-  </p:clrMapOvr>
-</p:notes>
-</file>
-
-<file path=ppt/notesSlides/notesSlide10.xml><?xml version="1.0" encoding="utf-8"?>
-<p:notes xmlns:p="http://schemas.openxmlformats.org/presentationml/2006/main">
-  <p:cSld>
-    <p:spTree>
-      <p:nvGrpSpPr>
-        <p:cNvPr id="1" name=""/>
-        <p:cNvGrpSpPr/>
-        <p:nvPr/>
-      </p:nvGrpSpPr>
-      <p:grpSpPr>
-        <a:xfrm xmlns:a="http://schemas.openxmlformats.org/drawingml/2006/main"/>
-      </p:grpSpPr>
-      <p:sp>
-        <p:nvSpPr>
-          <p:cNvPr id="2" name="Slide Image Placeholder 1"/>
-          <p:cNvSpPr>
-            <a:spLocks xmlns:a="http://schemas.openxmlformats.org/drawingml/2006/main" noGrp="1"/>
-          </p:cNvSpPr>
-          <p:nvPr>
-            <p:ph type="sldImg" idx="0"/>
-          </p:nvPr>
-        </p:nvSpPr>
-        <p:spPr/>
-      </p:sp>
-      <p:sp>
-        <p:nvSpPr>
-          <p:cNvPr id="3" name="Notes Placeholder 2"/>
-          <p:cNvSpPr>
-            <a:spLocks xmlns:a="http://schemas.openxmlformats.org/drawingml/2006/main" noGrp="1"/>
-          </p:cNvSpPr>
-          <p:nvPr>
-            <p:ph type="body" idx="1"/>
-          </p:nvPr>
-        </p:nvSpPr>
-        <p:spPr/>
-        <p:txBody>
-          <a:bodyPr xmlns:a="http://schemas.openxmlformats.org/drawingml/2006/main"/>
-          <a:lstStyle xmlns:a="http://schemas.openxmlformats.org/drawingml/2006/main"/>
-          <a:p xmlns:a="http://schemas.openxmlformats.org/drawingml/2006/main">
-            <a:r>
-              <a:t>用這頁銜接第二堂 Volume。資料庫沒有 Volume 等於把資料放在一次性容器裡。</a:t>
-            </a:r>
-          </a:p>
-        </p:txBody>
-      </p:sp>
-      <p:sp>
-        <p:nvSpPr>
-          <p:cNvPr id="4" name="Slide Number Placeholder 3"/>
-          <p:cNvSpPr>
-            <a:spLocks xmlns:a="http://schemas.openxmlformats.org/drawingml/2006/main" noGrp="1"/>
-          </p:cNvSpPr>
-          <p:nvPr>
-            <p:ph type="sldNum" idx="5"/>
-          </p:nvPr>
-        </p:nvSpPr>
-        <p:spPr/>
-        <p:txBody>
-          <a:bodyPr xmlns:a="http://schemas.openxmlformats.org/drawingml/2006/main"/>
-          <a:lstStyle xmlns:a="http://schemas.openxmlformats.org/drawingml/2006/main"/>
-          <a:p xmlns:a="http://schemas.openxmlformats.org/drawingml/2006/main"/>
-        </p:txBody>
-      </p:sp>
-    </p:spTree>
-  </p:cSld>
-  <p:clrMapOvr>
-    <a:masterClrMapping xmlns:a="http://schemas.openxmlformats.org/drawingml/2006/main"/>
-  </p:clrMapOvr>
-</p:notes>
-</file>
-
-<file path=ppt/notesSlides/notesSlide11.xml><?xml version="1.0" encoding="utf-8"?>
-<p:notes xmlns:p="http://schemas.openxmlformats.org/presentationml/2006/main">
-  <p:cSld>
-    <p:spTree>
-      <p:nvGrpSpPr>
-        <p:cNvPr id="1" name=""/>
-        <p:cNvGrpSpPr/>
-        <p:nvPr/>
-      </p:nvGrpSpPr>
-      <p:grpSpPr>
-        <a:xfrm xmlns:a="http://schemas.openxmlformats.org/drawingml/2006/main"/>
-      </p:grpSpPr>
-      <p:sp>
-        <p:nvSpPr>
-          <p:cNvPr id="2" name="Slide Image Placeholder 1"/>
-          <p:cNvSpPr>
-            <a:spLocks xmlns:a="http://schemas.openxmlformats.org/drawingml/2006/main" noGrp="1"/>
-          </p:cNvSpPr>
-          <p:nvPr>
-            <p:ph type="sldImg" idx="0"/>
-          </p:nvPr>
-        </p:nvSpPr>
-        <p:spPr/>
-      </p:sp>
-      <p:sp>
-        <p:nvSpPr>
-          <p:cNvPr id="3" name="Notes Placeholder 2"/>
-          <p:cNvSpPr>
-            <a:spLocks xmlns:a="http://schemas.openxmlformats.org/drawingml/2006/main" noGrp="1"/>
-          </p:cNvSpPr>
-          <p:nvPr>
-            <p:ph type="body" idx="1"/>
-          </p:nvPr>
-        </p:nvSpPr>
-        <p:spPr/>
-        <p:txBody>
-          <a:bodyPr xmlns:a="http://schemas.openxmlformats.org/drawingml/2006/main"/>
-          <a:lstStyle xmlns:a="http://schemas.openxmlformats.org/drawingml/2006/main"/>
-          <a:p xmlns:a="http://schemas.openxmlformats.org/drawingml/2006/main">
-            <a:r>
-              <a:t>Volume 名稱在冒號左邊，容器路徑在右邊。這裡不是 Windows 路徑。</a:t>
-            </a:r>
-          </a:p>
-        </p:txBody>
-      </p:sp>
-      <p:sp>
-        <p:nvSpPr>
-          <p:cNvPr id="4" name="Slide Number Placeholder 3"/>
-          <p:cNvSpPr>
-            <a:spLocks xmlns:a="http://schemas.openxmlformats.org/drawingml/2006/main" noGrp="1"/>
-          </p:cNvSpPr>
-          <p:nvPr>
-            <p:ph type="sldNum" idx="5"/>
-          </p:nvPr>
-        </p:nvSpPr>
-        <p:spPr/>
-        <p:txBody>
-          <a:bodyPr xmlns:a="http://schemas.openxmlformats.org/drawingml/2006/main"/>
-          <a:lstStyle xmlns:a="http://schemas.openxmlformats.org/drawingml/2006/main"/>
-          <a:p xmlns:a="http://schemas.openxmlformats.org/drawingml/2006/main"/>
-        </p:txBody>
-      </p:sp>
-    </p:spTree>
-  </p:cSld>
-  <p:clrMapOvr>
-    <a:masterClrMapping xmlns:a="http://schemas.openxmlformats.org/drawingml/2006/main"/>
-  </p:clrMapOvr>
-</p:notes>
-</file>
-
-<file path=ppt/notesSlides/notesSlide12.xml><?xml version="1.0" encoding="utf-8"?>
-<p:notes xmlns:p="http://schemas.openxmlformats.org/presentationml/2006/main">
-  <p:cSld>
-    <p:spTree>
-      <p:nvGrpSpPr>
-        <p:cNvPr id="1" name=""/>
-        <p:cNvGrpSpPr/>
-        <p:nvPr/>
-      </p:nvGrpSpPr>
-      <p:grpSpPr>
-        <a:xfrm xmlns:a="http://schemas.openxmlformats.org/drawingml/2006/main"/>
-      </p:grpSpPr>
-      <p:sp>
-        <p:nvSpPr>
-          <p:cNvPr id="2" name="Slide Image Placeholder 1"/>
-          <p:cNvSpPr>
-            <a:spLocks xmlns:a="http://schemas.openxmlformats.org/drawingml/2006/main" noGrp="1"/>
-          </p:cNvSpPr>
-          <p:nvPr>
-            <p:ph type="sldImg" idx="0"/>
-          </p:nvPr>
-        </p:nvSpPr>
-        <p:spPr/>
-      </p:sp>
-      <p:sp>
-        <p:nvSpPr>
-          <p:cNvPr id="3" name="Notes Placeholder 2"/>
-          <p:cNvSpPr>
-            <a:spLocks xmlns:a="http://schemas.openxmlformats.org/drawingml/2006/main" noGrp="1"/>
-          </p:cNvSpPr>
-          <p:nvPr>
-            <p:ph type="body" idx="1"/>
-          </p:nvPr>
-        </p:nvSpPr>
-        <p:spPr/>
-        <p:txBody>
-          <a:bodyPr xmlns:a="http://schemas.openxmlformats.org/drawingml/2006/main"/>
-          <a:lstStyle xmlns:a="http://schemas.openxmlformats.org/drawingml/2006/main"/>
-          <a:p xmlns:a="http://schemas.openxmlformats.org/drawingml/2006/main">
-            <a:r>
-              <a:t>練習題來自 exercises.md 第 3 堂實作題 P1。</a:t>
-            </a:r>
-          </a:p>
-        </p:txBody>
-      </p:sp>
-      <p:sp>
-        <p:nvSpPr>
-          <p:cNvPr id="4" name="Slide Number Placeholder 3"/>
-          <p:cNvSpPr>
-            <a:spLocks xmlns:a="http://schemas.openxmlformats.org/drawingml/2006/main" noGrp="1"/>
-          </p:cNvSpPr>
-          <p:nvPr>
-            <p:ph type="sldNum" idx="5"/>
-          </p:nvPr>
-        </p:nvSpPr>
-        <p:spPr/>
-        <p:txBody>
-          <a:bodyPr xmlns:a="http://schemas.openxmlformats.org/drawingml/2006/main"/>
-          <a:lstStyle xmlns:a="http://schemas.openxmlformats.org/drawingml/2006/main"/>
-          <a:p xmlns:a="http://schemas.openxmlformats.org/drawingml/2006/main"/>
-        </p:txBody>
-      </p:sp>
-    </p:spTree>
-  </p:cSld>
-  <p:clrMapOvr>
-    <a:masterClrMapping xmlns:a="http://schemas.openxmlformats.org/drawingml/2006/main"/>
-  </p:clrMapOvr>
-</p:notes>
-</file>
-
-<file path=ppt/notesSlides/notesSlide13.xml><?xml version="1.0" encoding="utf-8"?>
-<p:notes xmlns:p="http://schemas.openxmlformats.org/presentationml/2006/main">
-  <p:cSld>
-    <p:spTree>
-      <p:nvGrpSpPr>
-        <p:cNvPr id="1" name=""/>
-        <p:cNvGrpSpPr/>
-        <p:nvPr/>
-      </p:nvGrpSpPr>
-      <p:grpSpPr>
-        <a:xfrm xmlns:a="http://schemas.openxmlformats.org/drawingml/2006/main"/>
-      </p:grpSpPr>
-      <p:sp>
-        <p:nvSpPr>
-          <p:cNvPr id="2" name="Slide Image Placeholder 1"/>
-          <p:cNvSpPr>
-            <a:spLocks xmlns:a="http://schemas.openxmlformats.org/drawingml/2006/main" noGrp="1"/>
-          </p:cNvSpPr>
-          <p:nvPr>
-            <p:ph type="sldImg" idx="0"/>
-          </p:nvPr>
-        </p:nvSpPr>
-        <p:spPr/>
-      </p:sp>
-      <p:sp>
-        <p:nvSpPr>
-          <p:cNvPr id="3" name="Notes Placeholder 2"/>
-          <p:cNvSpPr>
-            <a:spLocks xmlns:a="http://schemas.openxmlformats.org/drawingml/2006/main" noGrp="1"/>
-          </p:cNvSpPr>
-          <p:nvPr>
-            <p:ph type="body" idx="1"/>
-          </p:nvPr>
-        </p:nvSpPr>
-        <p:spPr/>
-        <p:txBody>
-          <a:bodyPr xmlns:a="http://schemas.openxmlformats.org/drawingml/2006/main"/>
-          <a:lstStyle xmlns:a="http://schemas.openxmlformats.org/drawingml/2006/main"/>
-          <a:p xmlns:a="http://schemas.openxmlformats.org/drawingml/2006/main">
-            <a:r>
-              <a:t>這頁把痛點說清楚：長指令、易打錯、多服務需要網路與啟動順序。</a:t>
-            </a:r>
-          </a:p>
-        </p:txBody>
-      </p:sp>
-      <p:sp>
-        <p:nvSpPr>
-          <p:cNvPr id="4" name="Slide Number Placeholder 3"/>
-          <p:cNvSpPr>
-            <a:spLocks xmlns:a="http://schemas.openxmlformats.org/drawingml/2006/main" noGrp="1"/>
-          </p:cNvSpPr>
-          <p:nvPr>
-            <p:ph type="sldNum" idx="5"/>
-          </p:nvPr>
-        </p:nvSpPr>
-        <p:spPr/>
-        <p:txBody>
-          <a:bodyPr xmlns:a="http://schemas.openxmlformats.org/drawingml/2006/main"/>
-          <a:lstStyle xmlns:a="http://schemas.openxmlformats.org/drawingml/2006/main"/>
-          <a:p xmlns:a="http://schemas.openxmlformats.org/drawingml/2006/main"/>
-        </p:txBody>
-      </p:sp>
-    </p:spTree>
-  </p:cSld>
-  <p:clrMapOvr>
-    <a:masterClrMapping xmlns:a="http://schemas.openxmlformats.org/drawingml/2006/main"/>
-  </p:clrMapOvr>
-</p:notes>
-</file>
-
-<file path=ppt/notesSlides/notesSlide14.xml><?xml version="1.0" encoding="utf-8"?>
-<p:notes xmlns:p="http://schemas.openxmlformats.org/presentationml/2006/main">
-  <p:cSld>
-    <p:spTree>
-      <p:nvGrpSpPr>
-        <p:cNvPr id="1" name=""/>
-        <p:cNvGrpSpPr/>
-        <p:nvPr/>
-      </p:nvGrpSpPr>
-      <p:grpSpPr>
-        <a:xfrm xmlns:a="http://schemas.openxmlformats.org/drawingml/2006/main"/>
-      </p:grpSpPr>
-      <p:sp>
-        <p:nvSpPr>
-          <p:cNvPr id="2" name="Slide Image Placeholder 1"/>
-          <p:cNvSpPr>
-            <a:spLocks xmlns:a="http://schemas.openxmlformats.org/drawingml/2006/main" noGrp="1"/>
-          </p:cNvSpPr>
-          <p:nvPr>
-            <p:ph type="sldImg" idx="0"/>
-          </p:nvPr>
-        </p:nvSpPr>
-        <p:spPr/>
-      </p:sp>
-      <p:sp>
-        <p:nvSpPr>
-          <p:cNvPr id="3" name="Notes Placeholder 2"/>
-          <p:cNvSpPr>
-            <a:spLocks xmlns:a="http://schemas.openxmlformats.org/drawingml/2006/main" noGrp="1"/>
-          </p:cNvSpPr>
-          <p:nvPr>
-            <p:ph type="body" idx="1"/>
-          </p:nvPr>
-        </p:nvSpPr>
-        <p:spPr/>
-        <p:txBody>
-          <a:bodyPr xmlns:a="http://schemas.openxmlformats.org/drawingml/2006/main"/>
-          <a:lstStyle xmlns:a="http://schemas.openxmlformats.org/drawingml/2006/main"/>
-          <a:p xmlns:a="http://schemas.openxmlformats.org/drawingml/2006/main">
-            <a:r>
-              <a:t>新手常見錯誤是縮排。強調不要用 Tab。</a:t>
-            </a:r>
-          </a:p>
-        </p:txBody>
-      </p:sp>
-      <p:sp>
-        <p:nvSpPr>
-          <p:cNvPr id="4" name="Slide Number Placeholder 3"/>
-          <p:cNvSpPr>
-            <a:spLocks xmlns:a="http://schemas.openxmlformats.org/drawingml/2006/main" noGrp="1"/>
-          </p:cNvSpPr>
-          <p:nvPr>
-            <p:ph type="sldNum" idx="5"/>
-          </p:nvPr>
-        </p:nvSpPr>
-        <p:spPr/>
-        <p:txBody>
-          <a:bodyPr xmlns:a="http://schemas.openxmlformats.org/drawingml/2006/main"/>
-          <a:lstStyle xmlns:a="http://schemas.openxmlformats.org/drawingml/2006/main"/>
-          <a:p xmlns:a="http://schemas.openxmlformats.org/drawingml/2006/main"/>
-        </p:txBody>
-      </p:sp>
-    </p:spTree>
-  </p:cSld>
-  <p:clrMapOvr>
-    <a:masterClrMapping xmlns:a="http://schemas.openxmlformats.org/drawingml/2006/main"/>
-  </p:clrMapOvr>
-</p:notes>
-</file>
-
-<file path=ppt/notesSlides/notesSlide15.xml><?xml version="1.0" encoding="utf-8"?>
-<p:notes xmlns:p="http://schemas.openxmlformats.org/presentationml/2006/main">
-  <p:cSld>
-    <p:spTree>
-      <p:nvGrpSpPr>
-        <p:cNvPr id="1" name=""/>
-        <p:cNvGrpSpPr/>
-        <p:nvPr/>
-      </p:nvGrpSpPr>
-      <p:grpSpPr>
-        <a:xfrm xmlns:a="http://schemas.openxmlformats.org/drawingml/2006/main"/>
-      </p:grpSpPr>
-      <p:sp>
-        <p:nvSpPr>
-          <p:cNvPr id="2" name="Slide Image Placeholder 1"/>
-          <p:cNvSpPr>
-            <a:spLocks xmlns:a="http://schemas.openxmlformats.org/drawingml/2006/main" noGrp="1"/>
-          </p:cNvSpPr>
-          <p:nvPr>
-            <p:ph type="sldImg" idx="0"/>
-          </p:nvPr>
-        </p:nvSpPr>
-        <p:spPr/>
-      </p:sp>
-      <p:sp>
-        <p:nvSpPr>
-          <p:cNvPr id="3" name="Notes Placeholder 2"/>
-          <p:cNvSpPr>
-            <a:spLocks xmlns:a="http://schemas.openxmlformats.org/drawingml/2006/main" noGrp="1"/>
-          </p:cNvSpPr>
-          <p:nvPr>
-            <p:ph type="body" idx="1"/>
-          </p:nvPr>
-        </p:nvSpPr>
-        <p:spPr/>
-        <p:txBody>
-          <a:bodyPr xmlns:a="http://schemas.openxmlformats.org/drawingml/2006/main"/>
-          <a:lstStyle xmlns:a="http://schemas.openxmlformats.org/drawingml/2006/main"/>
-          <a:p xmlns:a="http://schemas.openxmlformats.org/drawingml/2006/main">
-            <a:r>
-              <a:t>先用概念圖講 services 與 volumes，再看完整 YAML 比較不會被縮排淹沒。</a:t>
-            </a:r>
-          </a:p>
-        </p:txBody>
-      </p:sp>
-      <p:sp>
-        <p:nvSpPr>
-          <p:cNvPr id="4" name="Slide Number Placeholder 3"/>
-          <p:cNvSpPr>
-            <a:spLocks xmlns:a="http://schemas.openxmlformats.org/drawingml/2006/main" noGrp="1"/>
-          </p:cNvSpPr>
-          <p:nvPr>
-            <p:ph type="sldNum" idx="5"/>
-          </p:nvPr>
-        </p:nvSpPr>
-        <p:spPr/>
-        <p:txBody>
-          <a:bodyPr xmlns:a="http://schemas.openxmlformats.org/drawingml/2006/main"/>
-          <a:lstStyle xmlns:a="http://schemas.openxmlformats.org/drawingml/2006/main"/>
-          <a:p xmlns:a="http://schemas.openxmlformats.org/drawingml/2006/main"/>
-        </p:txBody>
-      </p:sp>
-    </p:spTree>
-  </p:cSld>
-  <p:clrMapOvr>
-    <a:masterClrMapping xmlns:a="http://schemas.openxmlformats.org/drawingml/2006/main"/>
-  </p:clrMapOvr>
-</p:notes>
-</file>
-
-<file path=ppt/notesSlides/notesSlide16.xml><?xml version="1.0" encoding="utf-8"?>
-<p:notes xmlns:p="http://schemas.openxmlformats.org/presentationml/2006/main">
-  <p:cSld>
-    <p:spTree>
-      <p:nvGrpSpPr>
-        <p:cNvPr id="1" name=""/>
-        <p:cNvGrpSpPr/>
-        <p:nvPr/>
-      </p:nvGrpSpPr>
-      <p:grpSpPr>
-        <a:xfrm xmlns:a="http://schemas.openxmlformats.org/drawingml/2006/main"/>
-      </p:grpSpPr>
-      <p:sp>
-        <p:nvSpPr>
-          <p:cNvPr id="2" name="Slide Image Placeholder 1"/>
-          <p:cNvSpPr>
-            <a:spLocks xmlns:a="http://schemas.openxmlformats.org/drawingml/2006/main" noGrp="1"/>
-          </p:cNvSpPr>
-          <p:nvPr>
-            <p:ph type="sldImg" idx="0"/>
-          </p:nvPr>
-        </p:nvSpPr>
-        <p:spPr/>
-      </p:sp>
-      <p:sp>
-        <p:nvSpPr>
-          <p:cNvPr id="3" name="Notes Placeholder 2"/>
-          <p:cNvSpPr>
-            <a:spLocks xmlns:a="http://schemas.openxmlformats.org/drawingml/2006/main" noGrp="1"/>
-          </p:cNvSpPr>
-          <p:nvPr>
-            <p:ph type="body" idx="1"/>
-          </p:nvPr>
-        </p:nvSpPr>
-        <p:spPr/>
-        <p:txBody>
-          <a:bodyPr xmlns:a="http://schemas.openxmlformats.org/drawingml/2006/main"/>
-          <a:lstStyle xmlns:a="http://schemas.openxmlformats.org/drawingml/2006/main"/>
-          <a:p xmlns:a="http://schemas.openxmlformats.org/drawingml/2006/main">
-            <a:r>
-              <a:t>這頁是從 docker run 過渡到 Compose 的翻譯表。</a:t>
-            </a:r>
-          </a:p>
-        </p:txBody>
-      </p:sp>
-      <p:sp>
-        <p:nvSpPr>
-          <p:cNvPr id="4" name="Slide Number Placeholder 3"/>
-          <p:cNvSpPr>
-            <a:spLocks xmlns:a="http://schemas.openxmlformats.org/drawingml/2006/main" noGrp="1"/>
-          </p:cNvSpPr>
-          <p:nvPr>
-            <p:ph type="sldNum" idx="5"/>
-          </p:nvPr>
-        </p:nvSpPr>
-        <p:spPr/>
-        <p:txBody>
-          <a:bodyPr xmlns:a="http://schemas.openxmlformats.org/drawingml/2006/main"/>
-          <a:lstStyle xmlns:a="http://schemas.openxmlformats.org/drawingml/2006/main"/>
-          <a:p xmlns:a="http://schemas.openxmlformats.org/drawingml/2006/main"/>
-        </p:txBody>
-      </p:sp>
-    </p:spTree>
-  </p:cSld>
-  <p:clrMapOvr>
-    <a:masterClrMapping xmlns:a="http://schemas.openxmlformats.org/drawingml/2006/main"/>
-  </p:clrMapOvr>
-</p:notes>
-</file>
-
-<file path=ppt/notesSlides/notesSlide17.xml><?xml version="1.0" encoding="utf-8"?>
-<p:notes xmlns:p="http://schemas.openxmlformats.org/presentationml/2006/main">
-  <p:cSld>
-    <p:spTree>
-      <p:nvGrpSpPr>
-        <p:cNvPr id="1" name=""/>
-        <p:cNvGrpSpPr/>
-        <p:nvPr/>
-      </p:nvGrpSpPr>
-      <p:grpSpPr>
-        <a:xfrm xmlns:a="http://schemas.openxmlformats.org/drawingml/2006/main"/>
-      </p:grpSpPr>
-      <p:sp>
-        <p:nvSpPr>
-          <p:cNvPr id="2" name="Slide Image Placeholder 1"/>
-          <p:cNvSpPr>
-            <a:spLocks xmlns:a="http://schemas.openxmlformats.org/drawingml/2006/main" noGrp="1"/>
-          </p:cNvSpPr>
-          <p:nvPr>
-            <p:ph type="sldImg" idx="0"/>
-          </p:nvPr>
-        </p:nvSpPr>
-        <p:spPr/>
-      </p:sp>
-      <p:sp>
-        <p:nvSpPr>
-          <p:cNvPr id="3" name="Notes Placeholder 2"/>
-          <p:cNvSpPr>
-            <a:spLocks xmlns:a="http://schemas.openxmlformats.org/drawingml/2006/main" noGrp="1"/>
-          </p:cNvSpPr>
-          <p:nvPr>
-            <p:ph type="body" idx="1"/>
-          </p:nvPr>
-        </p:nvSpPr>
-        <p:spPr/>
-        <p:txBody>
-          <a:bodyPr xmlns:a="http://schemas.openxmlformats.org/drawingml/2006/main"/>
-          <a:lstStyle xmlns:a="http://schemas.openxmlformats.org/drawingml/2006/main"/>
-          <a:p xmlns:a="http://schemas.openxmlformats.org/drawingml/2006/main">
-            <a:r>
-              <a:t>這頁對應 exercises 的概念題 Q2。</a:t>
-            </a:r>
-          </a:p>
-        </p:txBody>
-      </p:sp>
-      <p:sp>
-        <p:nvSpPr>
-          <p:cNvPr id="4" name="Slide Number Placeholder 3"/>
-          <p:cNvSpPr>
-            <a:spLocks xmlns:a="http://schemas.openxmlformats.org/drawingml/2006/main" noGrp="1"/>
-          </p:cNvSpPr>
-          <p:nvPr>
-            <p:ph type="sldNum" idx="5"/>
-          </p:nvPr>
-        </p:nvSpPr>
-        <p:spPr/>
-        <p:txBody>
-          <a:bodyPr xmlns:a="http://schemas.openxmlformats.org/drawingml/2006/main"/>
-          <a:lstStyle xmlns:a="http://schemas.openxmlformats.org/drawingml/2006/main"/>
-          <a:p xmlns:a="http://schemas.openxmlformats.org/drawingml/2006/main"/>
-        </p:txBody>
-      </p:sp>
-    </p:spTree>
-  </p:cSld>
-  <p:clrMapOvr>
-    <a:masterClrMapping xmlns:a="http://schemas.openxmlformats.org/drawingml/2006/main"/>
-  </p:clrMapOvr>
-</p:notes>
-</file>
-
-<file path=ppt/notesSlides/notesSlide18.xml><?xml version="1.0" encoding="utf-8"?>
-<p:notes xmlns:p="http://schemas.openxmlformats.org/presentationml/2006/main">
-  <p:cSld>
-    <p:spTree>
-      <p:nvGrpSpPr>
-        <p:cNvPr id="1" name=""/>
-        <p:cNvGrpSpPr/>
-        <p:nvPr/>
-      </p:nvGrpSpPr>
-      <p:grpSpPr>
-        <a:xfrm xmlns:a="http://schemas.openxmlformats.org/drawingml/2006/main"/>
-      </p:grpSpPr>
-      <p:sp>
-        <p:nvSpPr>
-          <p:cNvPr id="2" name="Slide Image Placeholder 1"/>
-          <p:cNvSpPr>
-            <a:spLocks xmlns:a="http://schemas.openxmlformats.org/drawingml/2006/main" noGrp="1"/>
-          </p:cNvSpPr>
-          <p:nvPr>
-            <p:ph type="sldImg" idx="0"/>
-          </p:nvPr>
-        </p:nvSpPr>
-        <p:spPr/>
-      </p:sp>
-      <p:sp>
-        <p:nvSpPr>
-          <p:cNvPr id="3" name="Notes Placeholder 2"/>
-          <p:cNvSpPr>
-            <a:spLocks xmlns:a="http://schemas.openxmlformats.org/drawingml/2006/main" noGrp="1"/>
-          </p:cNvSpPr>
-          <p:nvPr>
-            <p:ph type="body" idx="1"/>
-          </p:nvPr>
-        </p:nvSpPr>
-        <p:spPr/>
-        <p:txBody>
-          <a:bodyPr xmlns:a="http://schemas.openxmlformats.org/drawingml/2006/main"/>
-          <a:lstStyle xmlns:a="http://schemas.openxmlformats.org/drawingml/2006/main"/>
-          <a:p xmlns:a="http://schemas.openxmlformats.org/drawingml/2006/main">
-            <a:r>
-              <a:t>練習題來自 exercises.md 第 3 堂概念題 Q2-Q3。</a:t>
-            </a:r>
-          </a:p>
-        </p:txBody>
-      </p:sp>
-      <p:sp>
-        <p:nvSpPr>
-          <p:cNvPr id="4" name="Slide Number Placeholder 3"/>
-          <p:cNvSpPr>
-            <a:spLocks xmlns:a="http://schemas.openxmlformats.org/drawingml/2006/main" noGrp="1"/>
-          </p:cNvSpPr>
-          <p:nvPr>
-            <p:ph type="sldNum" idx="5"/>
-          </p:nvPr>
-        </p:nvSpPr>
-        <p:spPr/>
-        <p:txBody>
-          <a:bodyPr xmlns:a="http://schemas.openxmlformats.org/drawingml/2006/main"/>
-          <a:lstStyle xmlns:a="http://schemas.openxmlformats.org/drawingml/2006/main"/>
-          <a:p xmlns:a="http://schemas.openxmlformats.org/drawingml/2006/main"/>
-        </p:txBody>
-      </p:sp>
-    </p:spTree>
-  </p:cSld>
-  <p:clrMapOvr>
-    <a:masterClrMapping xmlns:a="http://schemas.openxmlformats.org/drawingml/2006/main"/>
-  </p:clrMapOvr>
-</p:notes>
-</file>
-
-<file path=ppt/notesSlides/notesSlide19.xml><?xml version="1.0" encoding="utf-8"?>
-<p:notes xmlns:p="http://schemas.openxmlformats.org/presentationml/2006/main">
-  <p:cSld>
-    <p:spTree>
-      <p:nvGrpSpPr>
-        <p:cNvPr id="1" name=""/>
-        <p:cNvGrpSpPr/>
-        <p:nvPr/>
-      </p:nvGrpSpPr>
-      <p:grpSpPr>
-        <a:xfrm xmlns:a="http://schemas.openxmlformats.org/drawingml/2006/main"/>
-      </p:grpSpPr>
-      <p:sp>
-        <p:nvSpPr>
-          <p:cNvPr id="2" name="Slide Image Placeholder 1"/>
-          <p:cNvSpPr>
-            <a:spLocks xmlns:a="http://schemas.openxmlformats.org/drawingml/2006/main" noGrp="1"/>
-          </p:cNvSpPr>
-          <p:nvPr>
-            <p:ph type="sldImg" idx="0"/>
-          </p:nvPr>
-        </p:nvSpPr>
-        <p:spPr/>
-      </p:sp>
-      <p:sp>
-        <p:nvSpPr>
-          <p:cNvPr id="3" name="Notes Placeholder 2"/>
-          <p:cNvSpPr>
-            <a:spLocks xmlns:a="http://schemas.openxmlformats.org/drawingml/2006/main" noGrp="1"/>
-          </p:cNvSpPr>
-          <p:nvPr>
-            <p:ph type="body" idx="1"/>
-          </p:nvPr>
-        </p:nvSpPr>
-        <p:spPr/>
-        <p:txBody>
-          <a:bodyPr xmlns:a="http://schemas.openxmlformats.org/drawingml/2006/main"/>
-          <a:lstStyle xmlns:a="http://schemas.openxmlformats.org/drawingml/2006/main"/>
-          <a:p xmlns:a="http://schemas.openxmlformats.org/drawingml/2006/main">
-            <a:r>
-              <a:t>用生成圖支撐『一個設定檔協調多服務』的概念，但核心文字與流程仍可編輯。</a:t>
-            </a:r>
-          </a:p>
-        </p:txBody>
-      </p:sp>
-      <p:sp>
-        <p:nvSpPr>
-          <p:cNvPr id="4" name="Slide Number Placeholder 3"/>
-          <p:cNvSpPr>
-            <a:spLocks xmlns:a="http://schemas.openxmlformats.org/drawingml/2006/main" noGrp="1"/>
-          </p:cNvSpPr>
-          <p:nvPr>
-            <p:ph type="sldNum" idx="5"/>
-          </p:nvPr>
-        </p:nvSpPr>
-        <p:spPr/>
-        <p:txBody>
-          <a:bodyPr xmlns:a="http://schemas.openxmlformats.org/drawingml/2006/main"/>
-          <a:lstStyle xmlns:a="http://schemas.openxmlformats.org/drawingml/2006/main"/>
-          <a:p xmlns:a="http://schemas.openxmlformats.org/drawingml/2006/main"/>
-        </p:txBody>
-      </p:sp>
-    </p:spTree>
-  </p:cSld>
-  <p:clrMapOvr>
-    <a:masterClrMapping xmlns:a="http://schemas.openxmlformats.org/drawingml/2006/main"/>
-  </p:clrMapOvr>
-</p:notes>
-</file>
-
-<file path=ppt/notesSlides/notesSlide2.xml><?xml version="1.0" encoding="utf-8"?>
-<p:notes xmlns:p="http://schemas.openxmlformats.org/presentationml/2006/main">
-  <p:cSld>
-    <p:spTree>
-      <p:nvGrpSpPr>
-        <p:cNvPr id="1" name=""/>
-        <p:cNvGrpSpPr/>
-        <p:nvPr/>
-      </p:nvGrpSpPr>
-      <p:grpSpPr>
-        <a:xfrm xmlns:a="http://schemas.openxmlformats.org/drawingml/2006/main"/>
-      </p:grpSpPr>
-      <p:sp>
-        <p:nvSpPr>
-          <p:cNvPr id="2" name="Slide Image Placeholder 1"/>
-          <p:cNvSpPr>
-            <a:spLocks xmlns:a="http://schemas.openxmlformats.org/drawingml/2006/main" noGrp="1"/>
-          </p:cNvSpPr>
-          <p:nvPr>
-            <p:ph type="sldImg" idx="0"/>
-          </p:nvPr>
-        </p:nvSpPr>
-        <p:spPr/>
-      </p:sp>
-      <p:sp>
-        <p:nvSpPr>
-          <p:cNvPr id="3" name="Notes Placeholder 2"/>
-          <p:cNvSpPr>
-            <a:spLocks xmlns:a="http://schemas.openxmlformats.org/drawingml/2006/main" noGrp="1"/>
-          </p:cNvSpPr>
-          <p:nvPr>
-            <p:ph type="body" idx="1"/>
-          </p:nvPr>
-        </p:nvSpPr>
-        <p:spPr/>
-        <p:txBody>
-          <a:bodyPr xmlns:a="http://schemas.openxmlformats.org/drawingml/2006/main"/>
-          <a:lstStyle xmlns:a="http://schemas.openxmlformats.org/drawingml/2006/main"/>
-          <a:p xmlns:a="http://schemas.openxmlformats.org/drawingml/2006/main">
-            <a:r>
-              <a:t>提醒學生：第三堂會開始更接近真實開發環境。</a:t>
-            </a:r>
-          </a:p>
-        </p:txBody>
-      </p:sp>
-      <p:sp>
-        <p:nvSpPr>
-          <p:cNvPr id="4" name="Slide Number Placeholder 3"/>
-          <p:cNvSpPr>
-            <a:spLocks xmlns:a="http://schemas.openxmlformats.org/drawingml/2006/main" noGrp="1"/>
-          </p:cNvSpPr>
-          <p:nvPr>
-            <p:ph type="sldNum" idx="5"/>
-          </p:nvPr>
-        </p:nvSpPr>
-        <p:spPr/>
-        <p:txBody>
-          <a:bodyPr xmlns:a="http://schemas.openxmlformats.org/drawingml/2006/main"/>
-          <a:lstStyle xmlns:a="http://schemas.openxmlformats.org/drawingml/2006/main"/>
-          <a:p xmlns:a="http://schemas.openxmlformats.org/drawingml/2006/main"/>
-        </p:txBody>
-      </p:sp>
-    </p:spTree>
-  </p:cSld>
-  <p:clrMapOvr>
-    <a:masterClrMapping xmlns:a="http://schemas.openxmlformats.org/drawingml/2006/main"/>
-  </p:clrMapOvr>
-</p:notes>
-</file>
-
-<file path=ppt/notesSlides/notesSlide20.xml><?xml version="1.0" encoding="utf-8"?>
-<p:notes xmlns:p="http://schemas.openxmlformats.org/presentationml/2006/main">
-  <p:cSld>
-    <p:spTree>
-      <p:nvGrpSpPr>
-        <p:cNvPr id="1" name=""/>
-        <p:cNvGrpSpPr/>
-        <p:nvPr/>
-      </p:nvGrpSpPr>
-      <p:grpSpPr>
-        <a:xfrm xmlns:a="http://schemas.openxmlformats.org/drawingml/2006/main"/>
-      </p:grpSpPr>
-      <p:sp>
-        <p:nvSpPr>
-          <p:cNvPr id="2" name="Slide Image Placeholder 1"/>
-          <p:cNvSpPr>
-            <a:spLocks xmlns:a="http://schemas.openxmlformats.org/drawingml/2006/main" noGrp="1"/>
-          </p:cNvSpPr>
-          <p:nvPr>
-            <p:ph type="sldImg" idx="0"/>
-          </p:nvPr>
-        </p:nvSpPr>
-        <p:spPr/>
-      </p:sp>
-      <p:sp>
-        <p:nvSpPr>
-          <p:cNvPr id="3" name="Notes Placeholder 2"/>
-          <p:cNvSpPr>
-            <a:spLocks xmlns:a="http://schemas.openxmlformats.org/drawingml/2006/main" noGrp="1"/>
-          </p:cNvSpPr>
-          <p:nvPr>
-            <p:ph type="body" idx="1"/>
-          </p:nvPr>
-        </p:nvSpPr>
-        <p:spPr/>
-        <p:txBody>
-          <a:bodyPr xmlns:a="http://schemas.openxmlformats.org/drawingml/2006/main"/>
-          <a:lstStyle xmlns:a="http://schemas.openxmlformats.org/drawingml/2006/main"/>
-          <a:p xmlns:a="http://schemas.openxmlformats.org/drawingml/2006/main">
-            <a:r>
-              <a:t>提醒新版是 docker compose（空格），舊版才是 docker-compose（連字號）。</a:t>
-            </a:r>
-          </a:p>
-        </p:txBody>
-      </p:sp>
-      <p:sp>
-        <p:nvSpPr>
-          <p:cNvPr id="4" name="Slide Number Placeholder 3"/>
-          <p:cNvSpPr>
-            <a:spLocks xmlns:a="http://schemas.openxmlformats.org/drawingml/2006/main" noGrp="1"/>
-          </p:cNvSpPr>
-          <p:nvPr>
-            <p:ph type="sldNum" idx="5"/>
-          </p:nvPr>
-        </p:nvSpPr>
-        <p:spPr/>
-        <p:txBody>
-          <a:bodyPr xmlns:a="http://schemas.openxmlformats.org/drawingml/2006/main"/>
-          <a:lstStyle xmlns:a="http://schemas.openxmlformats.org/drawingml/2006/main"/>
-          <a:p xmlns:a="http://schemas.openxmlformats.org/drawingml/2006/main"/>
-        </p:txBody>
-      </p:sp>
-    </p:spTree>
-  </p:cSld>
-  <p:clrMapOvr>
-    <a:masterClrMapping xmlns:a="http://schemas.openxmlformats.org/drawingml/2006/main"/>
-  </p:clrMapOvr>
-</p:notes>
-</file>
-
-<file path=ppt/notesSlides/notesSlide21.xml><?xml version="1.0" encoding="utf-8"?>
-<p:notes xmlns:p="http://schemas.openxmlformats.org/presentationml/2006/main">
-  <p:cSld>
-    <p:spTree>
-      <p:nvGrpSpPr>
-        <p:cNvPr id="1" name=""/>
-        <p:cNvGrpSpPr/>
-        <p:nvPr/>
-      </p:nvGrpSpPr>
-      <p:grpSpPr>
-        <a:xfrm xmlns:a="http://schemas.openxmlformats.org/drawingml/2006/main"/>
-      </p:grpSpPr>
-      <p:sp>
-        <p:nvSpPr>
-          <p:cNvPr id="2" name="Slide Image Placeholder 1"/>
-          <p:cNvSpPr>
-            <a:spLocks xmlns:a="http://schemas.openxmlformats.org/drawingml/2006/main" noGrp="1"/>
-          </p:cNvSpPr>
-          <p:nvPr>
-            <p:ph type="sldImg" idx="0"/>
-          </p:nvPr>
-        </p:nvSpPr>
-        <p:spPr/>
-      </p:sp>
-      <p:sp>
-        <p:nvSpPr>
-          <p:cNvPr id="3" name="Notes Placeholder 2"/>
-          <p:cNvSpPr>
-            <a:spLocks xmlns:a="http://schemas.openxmlformats.org/drawingml/2006/main" noGrp="1"/>
-          </p:cNvSpPr>
-          <p:nvPr>
-            <p:ph type="body" idx="1"/>
-          </p:nvPr>
-        </p:nvSpPr>
-        <p:spPr/>
-        <p:txBody>
-          <a:bodyPr xmlns:a="http://schemas.openxmlformats.org/drawingml/2006/main"/>
-          <a:lstStyle xmlns:a="http://schemas.openxmlformats.org/drawingml/2006/main"/>
-          <a:p xmlns:a="http://schemas.openxmlformats.org/drawingml/2006/main">
-            <a:r>
-              <a:t>這頁讓學生知道為什麼 compose 檔案值得寫進專案。</a:t>
-            </a:r>
-          </a:p>
-        </p:txBody>
-      </p:sp>
-      <p:sp>
-        <p:nvSpPr>
-          <p:cNvPr id="4" name="Slide Number Placeholder 3"/>
-          <p:cNvSpPr>
-            <a:spLocks xmlns:a="http://schemas.openxmlformats.org/drawingml/2006/main" noGrp="1"/>
-          </p:cNvSpPr>
-          <p:nvPr>
-            <p:ph type="sldNum" idx="5"/>
-          </p:nvPr>
-        </p:nvSpPr>
-        <p:spPr/>
-        <p:txBody>
-          <a:bodyPr xmlns:a="http://schemas.openxmlformats.org/drawingml/2006/main"/>
-          <a:lstStyle xmlns:a="http://schemas.openxmlformats.org/drawingml/2006/main"/>
-          <a:p xmlns:a="http://schemas.openxmlformats.org/drawingml/2006/main"/>
-        </p:txBody>
-      </p:sp>
-    </p:spTree>
-  </p:cSld>
-  <p:clrMapOvr>
-    <a:masterClrMapping xmlns:a="http://schemas.openxmlformats.org/drawingml/2006/main"/>
-  </p:clrMapOvr>
-</p:notes>
-</file>
-
-<file path=ppt/notesSlides/notesSlide22.xml><?xml version="1.0" encoding="utf-8"?>
-<p:notes xmlns:p="http://schemas.openxmlformats.org/presentationml/2006/main">
-  <p:cSld>
-    <p:spTree>
-      <p:nvGrpSpPr>
-        <p:cNvPr id="1" name=""/>
-        <p:cNvGrpSpPr/>
-        <p:nvPr/>
-      </p:nvGrpSpPr>
-      <p:grpSpPr>
-        <a:xfrm xmlns:a="http://schemas.openxmlformats.org/drawingml/2006/main"/>
-      </p:grpSpPr>
-      <p:sp>
-        <p:nvSpPr>
-          <p:cNvPr id="2" name="Slide Image Placeholder 1"/>
-          <p:cNvSpPr>
-            <a:spLocks xmlns:a="http://schemas.openxmlformats.org/drawingml/2006/main" noGrp="1"/>
-          </p:cNvSpPr>
-          <p:nvPr>
-            <p:ph type="sldImg" idx="0"/>
-          </p:nvPr>
-        </p:nvSpPr>
-        <p:spPr/>
-      </p:sp>
-      <p:sp>
-        <p:nvSpPr>
-          <p:cNvPr id="3" name="Notes Placeholder 2"/>
-          <p:cNvSpPr>
-            <a:spLocks xmlns:a="http://schemas.openxmlformats.org/drawingml/2006/main" noGrp="1"/>
-          </p:cNvSpPr>
-          <p:nvPr>
-            <p:ph type="body" idx="1"/>
-          </p:nvPr>
-        </p:nvSpPr>
-        <p:spPr/>
-        <p:txBody>
-          <a:bodyPr xmlns:a="http://schemas.openxmlformats.org/drawingml/2006/main"/>
-          <a:lstStyle xmlns:a="http://schemas.openxmlformats.org/drawingml/2006/main"/>
-          <a:p xmlns:a="http://schemas.openxmlformats.org/drawingml/2006/main">
-            <a:r>
-              <a:t>練習題來自 exercises.md 第 3 堂實作題 P2。要求：Nginx、Redis、restart: unless-stopped、up/ps/down。</a:t>
-            </a:r>
-          </a:p>
-        </p:txBody>
-      </p:sp>
-      <p:sp>
-        <p:nvSpPr>
-          <p:cNvPr id="4" name="Slide Number Placeholder 3"/>
-          <p:cNvSpPr>
-            <a:spLocks xmlns:a="http://schemas.openxmlformats.org/drawingml/2006/main" noGrp="1"/>
-          </p:cNvSpPr>
-          <p:nvPr>
-            <p:ph type="sldNum" idx="5"/>
-          </p:nvPr>
-        </p:nvSpPr>
-        <p:spPr/>
-        <p:txBody>
-          <a:bodyPr xmlns:a="http://schemas.openxmlformats.org/drawingml/2006/main"/>
-          <a:lstStyle xmlns:a="http://schemas.openxmlformats.org/drawingml/2006/main"/>
-          <a:p xmlns:a="http://schemas.openxmlformats.org/drawingml/2006/main"/>
-        </p:txBody>
-      </p:sp>
-    </p:spTree>
-  </p:cSld>
-  <p:clrMapOvr>
-    <a:masterClrMapping xmlns:a="http://schemas.openxmlformats.org/drawingml/2006/main"/>
-  </p:clrMapOvr>
-</p:notes>
-</file>
-
-<file path=ppt/notesSlides/notesSlide23.xml><?xml version="1.0" encoding="utf-8"?>
-<p:notes xmlns:p="http://schemas.openxmlformats.org/presentationml/2006/main">
-  <p:cSld>
-    <p:spTree>
-      <p:nvGrpSpPr>
-        <p:cNvPr id="1" name=""/>
-        <p:cNvGrpSpPr/>
-        <p:nvPr/>
-      </p:nvGrpSpPr>
-      <p:grpSpPr>
-        <a:xfrm xmlns:a="http://schemas.openxmlformats.org/drawingml/2006/main"/>
-      </p:grpSpPr>
-      <p:sp>
-        <p:nvSpPr>
-          <p:cNvPr id="2" name="Slide Image Placeholder 1"/>
-          <p:cNvSpPr>
-            <a:spLocks xmlns:a="http://schemas.openxmlformats.org/drawingml/2006/main" noGrp="1"/>
-          </p:cNvSpPr>
-          <p:nvPr>
-            <p:ph type="sldImg" idx="0"/>
-          </p:nvPr>
-        </p:nvSpPr>
-        <p:spPr/>
-      </p:sp>
-      <p:sp>
-        <p:nvSpPr>
-          <p:cNvPr id="3" name="Notes Placeholder 2"/>
-          <p:cNvSpPr>
-            <a:spLocks xmlns:a="http://schemas.openxmlformats.org/drawingml/2006/main" noGrp="1"/>
-          </p:cNvSpPr>
-          <p:nvPr>
-            <p:ph type="body" idx="1"/>
-          </p:nvPr>
-        </p:nvSpPr>
-        <p:spPr/>
-        <p:txBody>
-          <a:bodyPr xmlns:a="http://schemas.openxmlformats.org/drawingml/2006/main"/>
-          <a:lstStyle xmlns:a="http://schemas.openxmlformats.org/drawingml/2006/main"/>
-          <a:p xmlns:a="http://schemas.openxmlformats.org/drawingml/2006/main">
-            <a:r>
-              <a:t>這是第三堂的主要 Compose 實作：web 與 db 同時啟動。</a:t>
-            </a:r>
-          </a:p>
-        </p:txBody>
-      </p:sp>
-      <p:sp>
-        <p:nvSpPr>
-          <p:cNvPr id="4" name="Slide Number Placeholder 3"/>
-          <p:cNvSpPr>
-            <a:spLocks xmlns:a="http://schemas.openxmlformats.org/drawingml/2006/main" noGrp="1"/>
-          </p:cNvSpPr>
-          <p:nvPr>
-            <p:ph type="sldNum" idx="5"/>
-          </p:nvPr>
-        </p:nvSpPr>
-        <p:spPr/>
-        <p:txBody>
-          <a:bodyPr xmlns:a="http://schemas.openxmlformats.org/drawingml/2006/main"/>
-          <a:lstStyle xmlns:a="http://schemas.openxmlformats.org/drawingml/2006/main"/>
-          <a:p xmlns:a="http://schemas.openxmlformats.org/drawingml/2006/main"/>
-        </p:txBody>
-      </p:sp>
-    </p:spTree>
-  </p:cSld>
-  <p:clrMapOvr>
-    <a:masterClrMapping xmlns:a="http://schemas.openxmlformats.org/drawingml/2006/main"/>
-  </p:clrMapOvr>
-</p:notes>
-</file>
-
-<file path=ppt/notesSlides/notesSlide24.xml><?xml version="1.0" encoding="utf-8"?>
-<p:notes xmlns:p="http://schemas.openxmlformats.org/presentationml/2006/main">
-  <p:cSld>
-    <p:spTree>
-      <p:nvGrpSpPr>
-        <p:cNvPr id="1" name=""/>
-        <p:cNvGrpSpPr/>
-        <p:nvPr/>
-      </p:nvGrpSpPr>
-      <p:grpSpPr>
-        <a:xfrm xmlns:a="http://schemas.openxmlformats.org/drawingml/2006/main"/>
-      </p:grpSpPr>
-      <p:sp>
-        <p:nvSpPr>
-          <p:cNvPr id="2" name="Slide Image Placeholder 1"/>
-          <p:cNvSpPr>
-            <a:spLocks xmlns:a="http://schemas.openxmlformats.org/drawingml/2006/main" noGrp="1"/>
-          </p:cNvSpPr>
-          <p:nvPr>
-            <p:ph type="sldImg" idx="0"/>
-          </p:nvPr>
-        </p:nvSpPr>
-        <p:spPr/>
-      </p:sp>
-      <p:sp>
-        <p:nvSpPr>
-          <p:cNvPr id="3" name="Notes Placeholder 2"/>
-          <p:cNvSpPr>
-            <a:spLocks xmlns:a="http://schemas.openxmlformats.org/drawingml/2006/main" noGrp="1"/>
-          </p:cNvSpPr>
-          <p:nvPr>
-            <p:ph type="body" idx="1"/>
-          </p:nvPr>
-        </p:nvSpPr>
-        <p:spPr/>
-        <p:txBody>
-          <a:bodyPr xmlns:a="http://schemas.openxmlformats.org/drawingml/2006/main"/>
-          <a:lstStyle xmlns:a="http://schemas.openxmlformats.org/drawingml/2006/main"/>
-          <a:p xmlns:a="http://schemas.openxmlformats.org/drawingml/2006/main">
-            <a:r>
-              <a:t>投影片只放關鍵片段；完整 html 和 compose 設定在講義。</a:t>
-            </a:r>
-          </a:p>
-        </p:txBody>
-      </p:sp>
-      <p:sp>
-        <p:nvSpPr>
-          <p:cNvPr id="4" name="Slide Number Placeholder 3"/>
-          <p:cNvSpPr>
-            <a:spLocks xmlns:a="http://schemas.openxmlformats.org/drawingml/2006/main" noGrp="1"/>
-          </p:cNvSpPr>
-          <p:nvPr>
-            <p:ph type="sldNum" idx="5"/>
-          </p:nvPr>
-        </p:nvSpPr>
-        <p:spPr/>
-        <p:txBody>
-          <a:bodyPr xmlns:a="http://schemas.openxmlformats.org/drawingml/2006/main"/>
-          <a:lstStyle xmlns:a="http://schemas.openxmlformats.org/drawingml/2006/main"/>
-          <a:p xmlns:a="http://schemas.openxmlformats.org/drawingml/2006/main"/>
-        </p:txBody>
-      </p:sp>
-    </p:spTree>
-  </p:cSld>
-  <p:clrMapOvr>
-    <a:masterClrMapping xmlns:a="http://schemas.openxmlformats.org/drawingml/2006/main"/>
-  </p:clrMapOvr>
-</p:notes>
-</file>
-
-<file path=ppt/notesSlides/notesSlide25.xml><?xml version="1.0" encoding="utf-8"?>
-<p:notes xmlns:p="http://schemas.openxmlformats.org/presentationml/2006/main">
-  <p:cSld>
-    <p:spTree>
-      <p:nvGrpSpPr>
-        <p:cNvPr id="1" name=""/>
-        <p:cNvGrpSpPr/>
-        <p:nvPr/>
-      </p:nvGrpSpPr>
-      <p:grpSpPr>
-        <a:xfrm xmlns:a="http://schemas.openxmlformats.org/drawingml/2006/main"/>
-      </p:grpSpPr>
-      <p:sp>
-        <p:nvSpPr>
-          <p:cNvPr id="2" name="Slide Image Placeholder 1"/>
-          <p:cNvSpPr>
-            <a:spLocks xmlns:a="http://schemas.openxmlformats.org/drawingml/2006/main" noGrp="1"/>
-          </p:cNvSpPr>
-          <p:nvPr>
-            <p:ph type="sldImg" idx="0"/>
-          </p:nvPr>
-        </p:nvSpPr>
-        <p:spPr/>
-      </p:sp>
-      <p:sp>
-        <p:nvSpPr>
-          <p:cNvPr id="3" name="Notes Placeholder 2"/>
-          <p:cNvSpPr>
-            <a:spLocks xmlns:a="http://schemas.openxmlformats.org/drawingml/2006/main" noGrp="1"/>
-          </p:cNvSpPr>
-          <p:nvPr>
-            <p:ph type="body" idx="1"/>
-          </p:nvPr>
-        </p:nvSpPr>
-        <p:spPr/>
-        <p:txBody>
-          <a:bodyPr xmlns:a="http://schemas.openxmlformats.org/drawingml/2006/main"/>
-          <a:lstStyle xmlns:a="http://schemas.openxmlformats.org/drawingml/2006/main"/>
-          <a:p xmlns:a="http://schemas.openxmlformats.org/drawingml/2006/main">
-            <a:r>
-              <a:t>學生常只看網頁，提醒也要看 logs。</a:t>
-            </a:r>
-          </a:p>
-        </p:txBody>
-      </p:sp>
-      <p:sp>
-        <p:nvSpPr>
-          <p:cNvPr id="4" name="Slide Number Placeholder 3"/>
-          <p:cNvSpPr>
-            <a:spLocks xmlns:a="http://schemas.openxmlformats.org/drawingml/2006/main" noGrp="1"/>
-          </p:cNvSpPr>
-          <p:nvPr>
-            <p:ph type="sldNum" idx="5"/>
-          </p:nvPr>
-        </p:nvSpPr>
-        <p:spPr/>
-        <p:txBody>
-          <a:bodyPr xmlns:a="http://schemas.openxmlformats.org/drawingml/2006/main"/>
-          <a:lstStyle xmlns:a="http://schemas.openxmlformats.org/drawingml/2006/main"/>
-          <a:p xmlns:a="http://schemas.openxmlformats.org/drawingml/2006/main"/>
-        </p:txBody>
-      </p:sp>
-    </p:spTree>
-  </p:cSld>
-  <p:clrMapOvr>
-    <a:masterClrMapping xmlns:a="http://schemas.openxmlformats.org/drawingml/2006/main"/>
-  </p:clrMapOvr>
-</p:notes>
-</file>
-
-<file path=ppt/notesSlides/notesSlide26.xml><?xml version="1.0" encoding="utf-8"?>
-<p:notes xmlns:p="http://schemas.openxmlformats.org/presentationml/2006/main">
-  <p:cSld>
-    <p:spTree>
-      <p:nvGrpSpPr>
-        <p:cNvPr id="1" name=""/>
-        <p:cNvGrpSpPr/>
-        <p:nvPr/>
-      </p:nvGrpSpPr>
-      <p:grpSpPr>
-        <a:xfrm xmlns:a="http://schemas.openxmlformats.org/drawingml/2006/main"/>
-      </p:grpSpPr>
-      <p:sp>
-        <p:nvSpPr>
-          <p:cNvPr id="2" name="Slide Image Placeholder 1"/>
-          <p:cNvSpPr>
-            <a:spLocks xmlns:a="http://schemas.openxmlformats.org/drawingml/2006/main" noGrp="1"/>
-          </p:cNvSpPr>
-          <p:nvPr>
-            <p:ph type="sldImg" idx="0"/>
-          </p:nvPr>
-        </p:nvSpPr>
-        <p:spPr/>
-      </p:sp>
-      <p:sp>
-        <p:nvSpPr>
-          <p:cNvPr id="3" name="Notes Placeholder 2"/>
-          <p:cNvSpPr>
-            <a:spLocks xmlns:a="http://schemas.openxmlformats.org/drawingml/2006/main" noGrp="1"/>
-          </p:cNvSpPr>
-          <p:nvPr>
-            <p:ph type="body" idx="1"/>
-          </p:nvPr>
-        </p:nvSpPr>
-        <p:spPr/>
-        <p:txBody>
-          <a:bodyPr xmlns:a="http://schemas.openxmlformats.org/drawingml/2006/main"/>
-          <a:lstStyle xmlns:a="http://schemas.openxmlformats.org/drawingml/2006/main"/>
-          <a:p xmlns:a="http://schemas.openxmlformats.org/drawingml/2006/main">
-            <a:r>
-              <a:t>這頁避免服務只啟動但沒有真正驗證功能。</a:t>
-            </a:r>
-          </a:p>
-        </p:txBody>
-      </p:sp>
-      <p:sp>
-        <p:nvSpPr>
-          <p:cNvPr id="4" name="Slide Number Placeholder 3"/>
-          <p:cNvSpPr>
-            <a:spLocks xmlns:a="http://schemas.openxmlformats.org/drawingml/2006/main" noGrp="1"/>
-          </p:cNvSpPr>
-          <p:nvPr>
-            <p:ph type="sldNum" idx="5"/>
-          </p:nvPr>
-        </p:nvSpPr>
-        <p:spPr/>
-        <p:txBody>
-          <a:bodyPr xmlns:a="http://schemas.openxmlformats.org/drawingml/2006/main"/>
-          <a:lstStyle xmlns:a="http://schemas.openxmlformats.org/drawingml/2006/main"/>
-          <a:p xmlns:a="http://schemas.openxmlformats.org/drawingml/2006/main"/>
-        </p:txBody>
-      </p:sp>
-    </p:spTree>
-  </p:cSld>
-  <p:clrMapOvr>
-    <a:masterClrMapping xmlns:a="http://schemas.openxmlformats.org/drawingml/2006/main"/>
-  </p:clrMapOvr>
-</p:notes>
-</file>
-
-<file path=ppt/notesSlides/notesSlide27.xml><?xml version="1.0" encoding="utf-8"?>
-<p:notes xmlns:p="http://schemas.openxmlformats.org/presentationml/2006/main">
-  <p:cSld>
-    <p:spTree>
-      <p:nvGrpSpPr>
-        <p:cNvPr id="1" name=""/>
-        <p:cNvGrpSpPr/>
-        <p:nvPr/>
-      </p:nvGrpSpPr>
-      <p:grpSpPr>
-        <a:xfrm xmlns:a="http://schemas.openxmlformats.org/drawingml/2006/main"/>
-      </p:grpSpPr>
-      <p:sp>
-        <p:nvSpPr>
-          <p:cNvPr id="2" name="Slide Image Placeholder 1"/>
-          <p:cNvSpPr>
-            <a:spLocks xmlns:a="http://schemas.openxmlformats.org/drawingml/2006/main" noGrp="1"/>
-          </p:cNvSpPr>
-          <p:nvPr>
-            <p:ph type="sldImg" idx="0"/>
-          </p:nvPr>
-        </p:nvSpPr>
-        <p:spPr/>
-      </p:sp>
-      <p:sp>
-        <p:nvSpPr>
-          <p:cNvPr id="3" name="Notes Placeholder 2"/>
-          <p:cNvSpPr>
-            <a:spLocks xmlns:a="http://schemas.openxmlformats.org/drawingml/2006/main" noGrp="1"/>
-          </p:cNvSpPr>
-          <p:nvPr>
-            <p:ph type="body" idx="1"/>
-          </p:nvPr>
-        </p:nvSpPr>
-        <p:spPr/>
-        <p:txBody>
-          <a:bodyPr xmlns:a="http://schemas.openxmlformats.org/drawingml/2006/main"/>
-          <a:lstStyle xmlns:a="http://schemas.openxmlformats.org/drawingml/2006/main"/>
-          <a:p xmlns:a="http://schemas.openxmlformats.org/drawingml/2006/main">
-            <a:r>
-              <a:t>這是資料安全的重點。</a:t>
-            </a:r>
-          </a:p>
-        </p:txBody>
-      </p:sp>
-      <p:sp>
-        <p:nvSpPr>
-          <p:cNvPr id="4" name="Slide Number Placeholder 3"/>
-          <p:cNvSpPr>
-            <a:spLocks xmlns:a="http://schemas.openxmlformats.org/drawingml/2006/main" noGrp="1"/>
-          </p:cNvSpPr>
-          <p:nvPr>
-            <p:ph type="sldNum" idx="5"/>
-          </p:nvPr>
-        </p:nvSpPr>
-        <p:spPr/>
-        <p:txBody>
-          <a:bodyPr xmlns:a="http://schemas.openxmlformats.org/drawingml/2006/main"/>
-          <a:lstStyle xmlns:a="http://schemas.openxmlformats.org/drawingml/2006/main"/>
-          <a:p xmlns:a="http://schemas.openxmlformats.org/drawingml/2006/main"/>
-        </p:txBody>
-      </p:sp>
-    </p:spTree>
-  </p:cSld>
-  <p:clrMapOvr>
-    <a:masterClrMapping xmlns:a="http://schemas.openxmlformats.org/drawingml/2006/main"/>
-  </p:clrMapOvr>
-</p:notes>
-</file>
-
-<file path=ppt/notesSlides/notesSlide28.xml><?xml version="1.0" encoding="utf-8"?>
-<p:notes xmlns:p="http://schemas.openxmlformats.org/presentationml/2006/main">
-  <p:cSld>
-    <p:spTree>
-      <p:nvGrpSpPr>
-        <p:cNvPr id="1" name=""/>
-        <p:cNvGrpSpPr/>
-        <p:nvPr/>
-      </p:nvGrpSpPr>
-      <p:grpSpPr>
-        <a:xfrm xmlns:a="http://schemas.openxmlformats.org/drawingml/2006/main"/>
-      </p:grpSpPr>
-      <p:sp>
-        <p:nvSpPr>
-          <p:cNvPr id="2" name="Slide Image Placeholder 1"/>
-          <p:cNvSpPr>
-            <a:spLocks xmlns:a="http://schemas.openxmlformats.org/drawingml/2006/main" noGrp="1"/>
-          </p:cNvSpPr>
-          <p:nvPr>
-            <p:ph type="sldImg" idx="0"/>
-          </p:nvPr>
-        </p:nvSpPr>
-        <p:spPr/>
-      </p:sp>
-      <p:sp>
-        <p:nvSpPr>
-          <p:cNvPr id="3" name="Notes Placeholder 2"/>
-          <p:cNvSpPr>
-            <a:spLocks xmlns:a="http://schemas.openxmlformats.org/drawingml/2006/main" noGrp="1"/>
-          </p:cNvSpPr>
-          <p:nvPr>
-            <p:ph type="body" idx="1"/>
-          </p:nvPr>
-        </p:nvSpPr>
-        <p:spPr/>
-        <p:txBody>
-          <a:bodyPr xmlns:a="http://schemas.openxmlformats.org/drawingml/2006/main"/>
-          <a:lstStyle xmlns:a="http://schemas.openxmlformats.org/drawingml/2006/main"/>
-          <a:p xmlns:a="http://schemas.openxmlformats.org/drawingml/2006/main">
-            <a:r>
-              <a:t>這頁收斂第三堂最後一小時：多版本並存與清理。</a:t>
-            </a:r>
-          </a:p>
-        </p:txBody>
-      </p:sp>
-      <p:sp>
-        <p:nvSpPr>
-          <p:cNvPr id="4" name="Slide Number Placeholder 3"/>
-          <p:cNvSpPr>
-            <a:spLocks xmlns:a="http://schemas.openxmlformats.org/drawingml/2006/main" noGrp="1"/>
-          </p:cNvSpPr>
-          <p:nvPr>
-            <p:ph type="sldNum" idx="5"/>
-          </p:nvPr>
-        </p:nvSpPr>
-        <p:spPr/>
-        <p:txBody>
-          <a:bodyPr xmlns:a="http://schemas.openxmlformats.org/drawingml/2006/main"/>
-          <a:lstStyle xmlns:a="http://schemas.openxmlformats.org/drawingml/2006/main"/>
-          <a:p xmlns:a="http://schemas.openxmlformats.org/drawingml/2006/main"/>
-        </p:txBody>
-      </p:sp>
-    </p:spTree>
-  </p:cSld>
-  <p:clrMapOvr>
-    <a:masterClrMapping xmlns:a="http://schemas.openxmlformats.org/drawingml/2006/main"/>
-  </p:clrMapOvr>
-</p:notes>
-</file>
-
-<file path=ppt/notesSlides/notesSlide29.xml><?xml version="1.0" encoding="utf-8"?>
-<p:notes xmlns:p="http://schemas.openxmlformats.org/presentationml/2006/main">
-  <p:cSld>
-    <p:spTree>
-      <p:nvGrpSpPr>
-        <p:cNvPr id="1" name=""/>
-        <p:cNvGrpSpPr/>
-        <p:nvPr/>
-      </p:nvGrpSpPr>
-      <p:grpSpPr>
-        <a:xfrm xmlns:a="http://schemas.openxmlformats.org/drawingml/2006/main"/>
-      </p:grpSpPr>
-      <p:sp>
-        <p:nvSpPr>
-          <p:cNvPr id="2" name="Slide Image Placeholder 1"/>
-          <p:cNvSpPr>
-            <a:spLocks xmlns:a="http://schemas.openxmlformats.org/drawingml/2006/main" noGrp="1"/>
-          </p:cNvSpPr>
-          <p:nvPr>
-            <p:ph type="sldImg" idx="0"/>
-          </p:nvPr>
-        </p:nvSpPr>
-        <p:spPr/>
-      </p:sp>
-      <p:sp>
-        <p:nvSpPr>
-          <p:cNvPr id="3" name="Notes Placeholder 2"/>
-          <p:cNvSpPr>
-            <a:spLocks xmlns:a="http://schemas.openxmlformats.org/drawingml/2006/main" noGrp="1"/>
-          </p:cNvSpPr>
-          <p:nvPr>
-            <p:ph type="body" idx="1"/>
-          </p:nvPr>
-        </p:nvSpPr>
-        <p:spPr/>
-        <p:txBody>
-          <a:bodyPr xmlns:a="http://schemas.openxmlformats.org/drawingml/2006/main"/>
-          <a:lstStyle xmlns:a="http://schemas.openxmlformats.org/drawingml/2006/main"/>
-          <a:p xmlns:a="http://schemas.openxmlformats.org/drawingml/2006/main">
-            <a:r>
-              <a:t>練習題來自 exercises.md 第 3 堂實作題 P3。</a:t>
-            </a:r>
-          </a:p>
-        </p:txBody>
-      </p:sp>
-      <p:sp>
-        <p:nvSpPr>
-          <p:cNvPr id="4" name="Slide Number Placeholder 3"/>
-          <p:cNvSpPr>
-            <a:spLocks xmlns:a="http://schemas.openxmlformats.org/drawingml/2006/main" noGrp="1"/>
-          </p:cNvSpPr>
-          <p:nvPr>
-            <p:ph type="sldNum" idx="5"/>
-          </p:nvPr>
-        </p:nvSpPr>
-        <p:spPr/>
-        <p:txBody>
-          <a:bodyPr xmlns:a="http://schemas.openxmlformats.org/drawingml/2006/main"/>
-          <a:lstStyle xmlns:a="http://schemas.openxmlformats.org/drawingml/2006/main"/>
-          <a:p xmlns:a="http://schemas.openxmlformats.org/drawingml/2006/main"/>
-        </p:txBody>
-      </p:sp>
-    </p:spTree>
-  </p:cSld>
-  <p:clrMapOvr>
-    <a:masterClrMapping xmlns:a="http://schemas.openxmlformats.org/drawingml/2006/main"/>
-  </p:clrMapOvr>
-</p:notes>
-</file>
-
-<file path=ppt/notesSlides/notesSlide3.xml><?xml version="1.0" encoding="utf-8"?>
-<p:notes xmlns:p="http://schemas.openxmlformats.org/presentationml/2006/main">
-  <p:cSld>
-    <p:spTree>
-      <p:nvGrpSpPr>
-        <p:cNvPr id="1" name=""/>
-        <p:cNvGrpSpPr/>
-        <p:nvPr/>
-      </p:nvGrpSpPr>
-      <p:grpSpPr>
-        <a:xfrm xmlns:a="http://schemas.openxmlformats.org/drawingml/2006/main"/>
-      </p:grpSpPr>
-      <p:sp>
-        <p:nvSpPr>
-          <p:cNvPr id="2" name="Slide Image Placeholder 1"/>
-          <p:cNvSpPr>
-            <a:spLocks xmlns:a="http://schemas.openxmlformats.org/drawingml/2006/main" noGrp="1"/>
-          </p:cNvSpPr>
-          <p:nvPr>
-            <p:ph type="sldImg" idx="0"/>
-          </p:nvPr>
-        </p:nvSpPr>
-        <p:spPr/>
-      </p:sp>
-      <p:sp>
-        <p:nvSpPr>
-          <p:cNvPr id="3" name="Notes Placeholder 2"/>
-          <p:cNvSpPr>
-            <a:spLocks xmlns:a="http://schemas.openxmlformats.org/drawingml/2006/main" noGrp="1"/>
-          </p:cNvSpPr>
-          <p:nvPr>
-            <p:ph type="body" idx="1"/>
-          </p:nvPr>
-        </p:nvSpPr>
-        <p:spPr/>
-        <p:txBody>
-          <a:bodyPr xmlns:a="http://schemas.openxmlformats.org/drawingml/2006/main"/>
-          <a:lstStyle xmlns:a="http://schemas.openxmlformats.org/drawingml/2006/main"/>
-          <a:p xmlns:a="http://schemas.openxmlformats.org/drawingml/2006/main">
-            <a:r>
-              <a:t>區分開發和生產。避免學生誤以為正式資料庫直接用本機 Docker 跑就好。</a:t>
-            </a:r>
-          </a:p>
-        </p:txBody>
-      </p:sp>
-      <p:sp>
-        <p:nvSpPr>
-          <p:cNvPr id="4" name="Slide Number Placeholder 3"/>
-          <p:cNvSpPr>
-            <a:spLocks xmlns:a="http://schemas.openxmlformats.org/drawingml/2006/main" noGrp="1"/>
-          </p:cNvSpPr>
-          <p:nvPr>
-            <p:ph type="sldNum" idx="5"/>
-          </p:nvPr>
-        </p:nvSpPr>
-        <p:spPr/>
-        <p:txBody>
-          <a:bodyPr xmlns:a="http://schemas.openxmlformats.org/drawingml/2006/main"/>
-          <a:lstStyle xmlns:a="http://schemas.openxmlformats.org/drawingml/2006/main"/>
-          <a:p xmlns:a="http://schemas.openxmlformats.org/drawingml/2006/main"/>
-        </p:txBody>
-      </p:sp>
-    </p:spTree>
-  </p:cSld>
-  <p:clrMapOvr>
-    <a:masterClrMapping xmlns:a="http://schemas.openxmlformats.org/drawingml/2006/main"/>
-  </p:clrMapOvr>
-</p:notes>
-</file>
-
-<file path=ppt/notesSlides/notesSlide30.xml><?xml version="1.0" encoding="utf-8"?>
-<p:notes xmlns:p="http://schemas.openxmlformats.org/presentationml/2006/main">
-  <p:cSld>
-    <p:spTree>
-      <p:nvGrpSpPr>
-        <p:cNvPr id="1" name=""/>
-        <p:cNvGrpSpPr/>
-        <p:nvPr/>
-      </p:nvGrpSpPr>
-      <p:grpSpPr>
-        <a:xfrm xmlns:a="http://schemas.openxmlformats.org/drawingml/2006/main"/>
-      </p:grpSpPr>
-      <p:sp>
-        <p:nvSpPr>
-          <p:cNvPr id="2" name="Slide Image Placeholder 1"/>
-          <p:cNvSpPr>
-            <a:spLocks xmlns:a="http://schemas.openxmlformats.org/drawingml/2006/main" noGrp="1"/>
-          </p:cNvSpPr>
-          <p:nvPr>
-            <p:ph type="sldImg" idx="0"/>
-          </p:nvPr>
-        </p:nvSpPr>
-        <p:spPr/>
-      </p:sp>
-      <p:sp>
-        <p:nvSpPr>
-          <p:cNvPr id="3" name="Notes Placeholder 2"/>
-          <p:cNvSpPr>
-            <a:spLocks xmlns:a="http://schemas.openxmlformats.org/drawingml/2006/main" noGrp="1"/>
-          </p:cNvSpPr>
-          <p:nvPr>
-            <p:ph type="body" idx="1"/>
-          </p:nvPr>
-        </p:nvSpPr>
-        <p:spPr/>
-        <p:txBody>
-          <a:bodyPr xmlns:a="http://schemas.openxmlformats.org/drawingml/2006/main"/>
-          <a:lstStyle xmlns:a="http://schemas.openxmlformats.org/drawingml/2006/main"/>
-          <a:p xmlns:a="http://schemas.openxmlformats.org/drawingml/2006/main">
-            <a:r>
-              <a:t>練習題來自 exercises.md 第 3 堂挑戰題 C1-C2。</a:t>
-            </a:r>
-          </a:p>
-        </p:txBody>
-      </p:sp>
-      <p:sp>
-        <p:nvSpPr>
-          <p:cNvPr id="4" name="Slide Number Placeholder 3"/>
-          <p:cNvSpPr>
-            <a:spLocks xmlns:a="http://schemas.openxmlformats.org/drawingml/2006/main" noGrp="1"/>
-          </p:cNvSpPr>
-          <p:nvPr>
-            <p:ph type="sldNum" idx="5"/>
-          </p:nvPr>
-        </p:nvSpPr>
-        <p:spPr/>
-        <p:txBody>
-          <a:bodyPr xmlns:a="http://schemas.openxmlformats.org/drawingml/2006/main"/>
-          <a:lstStyle xmlns:a="http://schemas.openxmlformats.org/drawingml/2006/main"/>
-          <a:p xmlns:a="http://schemas.openxmlformats.org/drawingml/2006/main"/>
-        </p:txBody>
-      </p:sp>
-    </p:spTree>
-  </p:cSld>
-  <p:clrMapOvr>
-    <a:masterClrMapping xmlns:a="http://schemas.openxmlformats.org/drawingml/2006/main"/>
-  </p:clrMapOvr>
-</p:notes>
-</file>
-
-<file path=ppt/notesSlides/notesSlide4.xml><?xml version="1.0" encoding="utf-8"?>
-<p:notes xmlns:p="http://schemas.openxmlformats.org/presentationml/2006/main">
-  <p:cSld>
-    <p:spTree>
-      <p:nvGrpSpPr>
-        <p:cNvPr id="1" name=""/>
-        <p:cNvGrpSpPr/>
-        <p:nvPr/>
-      </p:nvGrpSpPr>
-      <p:grpSpPr>
-        <a:xfrm xmlns:a="http://schemas.openxmlformats.org/drawingml/2006/main"/>
-      </p:grpSpPr>
-      <p:sp>
-        <p:nvSpPr>
-          <p:cNvPr id="2" name="Slide Image Placeholder 1"/>
-          <p:cNvSpPr>
-            <a:spLocks xmlns:a="http://schemas.openxmlformats.org/drawingml/2006/main" noGrp="1"/>
-          </p:cNvSpPr>
-          <p:nvPr>
-            <p:ph type="sldImg" idx="0"/>
-          </p:nvPr>
-        </p:nvSpPr>
-        <p:spPr/>
-      </p:sp>
-      <p:sp>
-        <p:nvSpPr>
-          <p:cNvPr id="3" name="Notes Placeholder 2"/>
-          <p:cNvSpPr>
-            <a:spLocks xmlns:a="http://schemas.openxmlformats.org/drawingml/2006/main" noGrp="1"/>
-          </p:cNvSpPr>
-          <p:nvPr>
-            <p:ph type="body" idx="1"/>
-          </p:nvPr>
-        </p:nvSpPr>
-        <p:spPr/>
-        <p:txBody>
-          <a:bodyPr xmlns:a="http://schemas.openxmlformats.org/drawingml/2006/main"/>
-          <a:lstStyle xmlns:a="http://schemas.openxmlformats.org/drawingml/2006/main"/>
-          <a:p xmlns:a="http://schemas.openxmlformats.org/drawingml/2006/main">
-            <a:r>
-              <a:t>練習題來自 exercises.md 第 3 堂概念題 Q1。參考答案重點：開發資料可重建，生產資料需要 I/O、備份與複製，正式環境多用雲端託管資料庫。</a:t>
-            </a:r>
-          </a:p>
-        </p:txBody>
-      </p:sp>
-      <p:sp>
-        <p:nvSpPr>
-          <p:cNvPr id="4" name="Slide Number Placeholder 3"/>
-          <p:cNvSpPr>
-            <a:spLocks xmlns:a="http://schemas.openxmlformats.org/drawingml/2006/main" noGrp="1"/>
-          </p:cNvSpPr>
-          <p:nvPr>
-            <p:ph type="sldNum" idx="5"/>
-          </p:nvPr>
-        </p:nvSpPr>
-        <p:spPr/>
-        <p:txBody>
-          <a:bodyPr xmlns:a="http://schemas.openxmlformats.org/drawingml/2006/main"/>
-          <a:lstStyle xmlns:a="http://schemas.openxmlformats.org/drawingml/2006/main"/>
-          <a:p xmlns:a="http://schemas.openxmlformats.org/drawingml/2006/main"/>
-        </p:txBody>
-      </p:sp>
-    </p:spTree>
-  </p:cSld>
-  <p:clrMapOvr>
-    <a:masterClrMapping xmlns:a="http://schemas.openxmlformats.org/drawingml/2006/main"/>
-  </p:clrMapOvr>
-</p:notes>
-</file>
-
-<file path=ppt/notesSlides/notesSlide5.xml><?xml version="1.0" encoding="utf-8"?>
-<p:notes xmlns:p="http://schemas.openxmlformats.org/presentationml/2006/main">
-  <p:cSld>
-    <p:spTree>
-      <p:nvGrpSpPr>
-        <p:cNvPr id="1" name=""/>
-        <p:cNvGrpSpPr/>
-        <p:nvPr/>
-      </p:nvGrpSpPr>
-      <p:grpSpPr>
-        <a:xfrm xmlns:a="http://schemas.openxmlformats.org/drawingml/2006/main"/>
-      </p:grpSpPr>
-      <p:sp>
-        <p:nvSpPr>
-          <p:cNvPr id="2" name="Slide Image Placeholder 1"/>
-          <p:cNvSpPr>
-            <a:spLocks xmlns:a="http://schemas.openxmlformats.org/drawingml/2006/main" noGrp="1"/>
-          </p:cNvSpPr>
-          <p:nvPr>
-            <p:ph type="sldImg" idx="0"/>
-          </p:nvPr>
-        </p:nvSpPr>
-        <p:spPr/>
-      </p:sp>
-      <p:sp>
-        <p:nvSpPr>
-          <p:cNvPr id="3" name="Notes Placeholder 2"/>
-          <p:cNvSpPr>
-            <a:spLocks xmlns:a="http://schemas.openxmlformats.org/drawingml/2006/main" noGrp="1"/>
-          </p:cNvSpPr>
-          <p:nvPr>
-            <p:ph type="body" idx="1"/>
-          </p:nvPr>
-        </p:nvSpPr>
-        <p:spPr/>
-        <p:txBody>
-          <a:bodyPr xmlns:a="http://schemas.openxmlformats.org/drawingml/2006/main"/>
-          <a:lstStyle xmlns:a="http://schemas.openxmlformats.org/drawingml/2006/main"/>
-          <a:p xmlns:a="http://schemas.openxmlformats.org/drawingml/2006/main">
-            <a:r>
-              <a:t>強調不要背每個 Image 的參數，養成讀官方 Docker Hub 說明的習慣。</a:t>
-            </a:r>
-          </a:p>
-        </p:txBody>
-      </p:sp>
-      <p:sp>
-        <p:nvSpPr>
-          <p:cNvPr id="4" name="Slide Number Placeholder 3"/>
-          <p:cNvSpPr>
-            <a:spLocks xmlns:a="http://schemas.openxmlformats.org/drawingml/2006/main" noGrp="1"/>
-          </p:cNvSpPr>
-          <p:nvPr>
-            <p:ph type="sldNum" idx="5"/>
-          </p:nvPr>
-        </p:nvSpPr>
-        <p:spPr/>
-        <p:txBody>
-          <a:bodyPr xmlns:a="http://schemas.openxmlformats.org/drawingml/2006/main"/>
-          <a:lstStyle xmlns:a="http://schemas.openxmlformats.org/drawingml/2006/main"/>
-          <a:p xmlns:a="http://schemas.openxmlformats.org/drawingml/2006/main"/>
-        </p:txBody>
-      </p:sp>
-    </p:spTree>
-  </p:cSld>
-  <p:clrMapOvr>
-    <a:masterClrMapping xmlns:a="http://schemas.openxmlformats.org/drawingml/2006/main"/>
-  </p:clrMapOvr>
-</p:notes>
-</file>
-
-<file path=ppt/notesSlides/notesSlide6.xml><?xml version="1.0" encoding="utf-8"?>
-<p:notes xmlns:p="http://schemas.openxmlformats.org/presentationml/2006/main">
-  <p:cSld>
-    <p:spTree>
-      <p:nvGrpSpPr>
-        <p:cNvPr id="1" name=""/>
-        <p:cNvGrpSpPr/>
-        <p:nvPr/>
-      </p:nvGrpSpPr>
-      <p:grpSpPr>
-        <a:xfrm xmlns:a="http://schemas.openxmlformats.org/drawingml/2006/main"/>
-      </p:grpSpPr>
-      <p:sp>
-        <p:nvSpPr>
-          <p:cNvPr id="2" name="Slide Image Placeholder 1"/>
-          <p:cNvSpPr>
-            <a:spLocks xmlns:a="http://schemas.openxmlformats.org/drawingml/2006/main" noGrp="1"/>
-          </p:cNvSpPr>
-          <p:nvPr>
-            <p:ph type="sldImg" idx="0"/>
-          </p:nvPr>
-        </p:nvSpPr>
-        <p:spPr/>
-      </p:sp>
-      <p:sp>
-        <p:nvSpPr>
-          <p:cNvPr id="3" name="Notes Placeholder 2"/>
-          <p:cNvSpPr>
-            <a:spLocks xmlns:a="http://schemas.openxmlformats.org/drawingml/2006/main" noGrp="1"/>
-          </p:cNvSpPr>
-          <p:nvPr>
-            <p:ph type="body" idx="1"/>
-          </p:nvPr>
-        </p:nvSpPr>
-        <p:spPr/>
-        <p:txBody>
-          <a:bodyPr xmlns:a="http://schemas.openxmlformats.org/drawingml/2006/main"/>
-          <a:lstStyle xmlns:a="http://schemas.openxmlformats.org/drawingml/2006/main"/>
-          <a:p xmlns:a="http://schemas.openxmlformats.org/drawingml/2006/main">
-            <a:r>
-              <a:t>MYSQL_ROOT_PASSWORD 是啟動官方 MySQL Image 時最重要的必填項。</a:t>
-            </a:r>
-          </a:p>
-        </p:txBody>
-      </p:sp>
-      <p:sp>
-        <p:nvSpPr>
-          <p:cNvPr id="4" name="Slide Number Placeholder 3"/>
-          <p:cNvSpPr>
-            <a:spLocks xmlns:a="http://schemas.openxmlformats.org/drawingml/2006/main" noGrp="1"/>
-          </p:cNvSpPr>
-          <p:nvPr>
-            <p:ph type="sldNum" idx="5"/>
-          </p:nvPr>
-        </p:nvSpPr>
-        <p:spPr/>
-        <p:txBody>
-          <a:bodyPr xmlns:a="http://schemas.openxmlformats.org/drawingml/2006/main"/>
-          <a:lstStyle xmlns:a="http://schemas.openxmlformats.org/drawingml/2006/main"/>
-          <a:p xmlns:a="http://schemas.openxmlformats.org/drawingml/2006/main"/>
-        </p:txBody>
-      </p:sp>
-    </p:spTree>
-  </p:cSld>
-  <p:clrMapOvr>
-    <a:masterClrMapping xmlns:a="http://schemas.openxmlformats.org/drawingml/2006/main"/>
-  </p:clrMapOvr>
-</p:notes>
-</file>
-
-<file path=ppt/notesSlides/notesSlide7.xml><?xml version="1.0" encoding="utf-8"?>
-<p:notes xmlns:p="http://schemas.openxmlformats.org/presentationml/2006/main">
-  <p:cSld>
-    <p:spTree>
-      <p:nvGrpSpPr>
-        <p:cNvPr id="1" name=""/>
-        <p:cNvGrpSpPr/>
-        <p:nvPr/>
-      </p:nvGrpSpPr>
-      <p:grpSpPr>
-        <a:xfrm xmlns:a="http://schemas.openxmlformats.org/drawingml/2006/main"/>
-      </p:grpSpPr>
-      <p:sp>
-        <p:nvSpPr>
-          <p:cNvPr id="2" name="Slide Image Placeholder 1"/>
-          <p:cNvSpPr>
-            <a:spLocks xmlns:a="http://schemas.openxmlformats.org/drawingml/2006/main" noGrp="1"/>
-          </p:cNvSpPr>
-          <p:nvPr>
-            <p:ph type="sldImg" idx="0"/>
-          </p:nvPr>
-        </p:nvSpPr>
-        <p:spPr/>
-      </p:sp>
-      <p:sp>
-        <p:nvSpPr>
-          <p:cNvPr id="3" name="Notes Placeholder 2"/>
-          <p:cNvSpPr>
-            <a:spLocks xmlns:a="http://schemas.openxmlformats.org/drawingml/2006/main" noGrp="1"/>
-          </p:cNvSpPr>
-          <p:nvPr>
-            <p:ph type="body" idx="1"/>
-          </p:nvPr>
-        </p:nvSpPr>
-        <p:spPr/>
-        <p:txBody>
-          <a:bodyPr xmlns:a="http://schemas.openxmlformats.org/drawingml/2006/main"/>
-          <a:lstStyle xmlns:a="http://schemas.openxmlformats.org/drawingml/2006/main"/>
-          <a:p xmlns:a="http://schemas.openxmlformats.org/drawingml/2006/main">
-            <a:r>
-              <a:t>PowerShell 多行使用 ^。如果學生用 Git Bash 或 Linux shell，換成反斜線。</a:t>
-            </a:r>
-          </a:p>
-        </p:txBody>
-      </p:sp>
-      <p:sp>
-        <p:nvSpPr>
-          <p:cNvPr id="4" name="Slide Number Placeholder 3"/>
-          <p:cNvSpPr>
-            <a:spLocks xmlns:a="http://schemas.openxmlformats.org/drawingml/2006/main" noGrp="1"/>
-          </p:cNvSpPr>
-          <p:nvPr>
-            <p:ph type="sldNum" idx="5"/>
-          </p:nvPr>
-        </p:nvSpPr>
-        <p:spPr/>
-        <p:txBody>
-          <a:bodyPr xmlns:a="http://schemas.openxmlformats.org/drawingml/2006/main"/>
-          <a:lstStyle xmlns:a="http://schemas.openxmlformats.org/drawingml/2006/main"/>
-          <a:p xmlns:a="http://schemas.openxmlformats.org/drawingml/2006/main"/>
-        </p:txBody>
-      </p:sp>
-    </p:spTree>
-  </p:cSld>
-  <p:clrMapOvr>
-    <a:masterClrMapping xmlns:a="http://schemas.openxmlformats.org/drawingml/2006/main"/>
-  </p:clrMapOvr>
-</p:notes>
-</file>
-
-<file path=ppt/notesSlides/notesSlide8.xml><?xml version="1.0" encoding="utf-8"?>
-<p:notes xmlns:p="http://schemas.openxmlformats.org/presentationml/2006/main">
-  <p:cSld>
-    <p:spTree>
-      <p:nvGrpSpPr>
-        <p:cNvPr id="1" name=""/>
-        <p:cNvGrpSpPr/>
-        <p:nvPr/>
-      </p:nvGrpSpPr>
-      <p:grpSpPr>
-        <a:xfrm xmlns:a="http://schemas.openxmlformats.org/drawingml/2006/main"/>
-      </p:grpSpPr>
-      <p:sp>
-        <p:nvSpPr>
-          <p:cNvPr id="2" name="Slide Image Placeholder 1"/>
-          <p:cNvSpPr>
-            <a:spLocks xmlns:a="http://schemas.openxmlformats.org/drawingml/2006/main" noGrp="1"/>
-          </p:cNvSpPr>
-          <p:nvPr>
-            <p:ph type="sldImg" idx="0"/>
-          </p:nvPr>
-        </p:nvSpPr>
-        <p:spPr/>
-      </p:sp>
-      <p:sp>
-        <p:nvSpPr>
-          <p:cNvPr id="3" name="Notes Placeholder 2"/>
-          <p:cNvSpPr>
-            <a:spLocks xmlns:a="http://schemas.openxmlformats.org/drawingml/2006/main" noGrp="1"/>
-          </p:cNvSpPr>
-          <p:nvPr>
-            <p:ph type="body" idx="1"/>
-          </p:nvPr>
-        </p:nvSpPr>
-        <p:spPr/>
-        <p:txBody>
-          <a:bodyPr xmlns:a="http://schemas.openxmlformats.org/drawingml/2006/main"/>
-          <a:lstStyle xmlns:a="http://schemas.openxmlformats.org/drawingml/2006/main"/>
-          <a:p xmlns:a="http://schemas.openxmlformats.org/drawingml/2006/main">
-            <a:r>
-              <a:t>這頁連到 exercises 的 depends_on 限制：容器啟動不代表服務 ready。</a:t>
-            </a:r>
-          </a:p>
-        </p:txBody>
-      </p:sp>
-      <p:sp>
-        <p:nvSpPr>
-          <p:cNvPr id="4" name="Slide Number Placeholder 3"/>
-          <p:cNvSpPr>
-            <a:spLocks xmlns:a="http://schemas.openxmlformats.org/drawingml/2006/main" noGrp="1"/>
-          </p:cNvSpPr>
-          <p:nvPr>
-            <p:ph type="sldNum" idx="5"/>
-          </p:nvPr>
-        </p:nvSpPr>
-        <p:spPr/>
-        <p:txBody>
-          <a:bodyPr xmlns:a="http://schemas.openxmlformats.org/drawingml/2006/main"/>
-          <a:lstStyle xmlns:a="http://schemas.openxmlformats.org/drawingml/2006/main"/>
-          <a:p xmlns:a="http://schemas.openxmlformats.org/drawingml/2006/main"/>
-        </p:txBody>
-      </p:sp>
-    </p:spTree>
-  </p:cSld>
-  <p:clrMapOvr>
-    <a:masterClrMapping xmlns:a="http://schemas.openxmlformats.org/drawingml/2006/main"/>
-  </p:clrMapOvr>
-</p:notes>
-</file>
-
-<file path=ppt/notesSlides/notesSlide9.xml><?xml version="1.0" encoding="utf-8"?>
-<p:notes xmlns:p="http://schemas.openxmlformats.org/presentationml/2006/main">
-  <p:cSld>
-    <p:spTree>
-      <p:nvGrpSpPr>
-        <p:cNvPr id="1" name=""/>
-        <p:cNvGrpSpPr/>
-        <p:nvPr/>
-      </p:nvGrpSpPr>
-      <p:grpSpPr>
-        <a:xfrm xmlns:a="http://schemas.openxmlformats.org/drawingml/2006/main"/>
-      </p:grpSpPr>
-      <p:sp>
-        <p:nvSpPr>
-          <p:cNvPr id="2" name="Slide Image Placeholder 1"/>
-          <p:cNvSpPr>
-            <a:spLocks xmlns:a="http://schemas.openxmlformats.org/drawingml/2006/main" noGrp="1"/>
-          </p:cNvSpPr>
-          <p:nvPr>
-            <p:ph type="sldImg" idx="0"/>
-          </p:nvPr>
-        </p:nvSpPr>
-        <p:spPr/>
-      </p:sp>
-      <p:sp>
-        <p:nvSpPr>
-          <p:cNvPr id="3" name="Notes Placeholder 2"/>
-          <p:cNvSpPr>
-            <a:spLocks xmlns:a="http://schemas.openxmlformats.org/drawingml/2006/main" noGrp="1"/>
-          </p:cNvSpPr>
-          <p:nvPr>
-            <p:ph type="body" idx="1"/>
-          </p:nvPr>
-        </p:nvSpPr>
-        <p:spPr/>
-        <p:txBody>
-          <a:bodyPr xmlns:a="http://schemas.openxmlformats.org/drawingml/2006/main"/>
-          <a:lstStyle xmlns:a="http://schemas.openxmlformats.org/drawingml/2006/main"/>
-          <a:p xmlns:a="http://schemas.openxmlformats.org/drawingml/2006/main">
-            <a:r>
-              <a:t>投影片只放流程；完整 SQL 可回到講義操作。</a:t>
-            </a:r>
-          </a:p>
-        </p:txBody>
-      </p:sp>
-      <p:sp>
-        <p:nvSpPr>
-          <p:cNvPr id="4" name="Slide Number Placeholder 3"/>
-          <p:cNvSpPr>
-            <a:spLocks xmlns:a="http://schemas.openxmlformats.org/drawingml/2006/main" noGrp="1"/>
-          </p:cNvSpPr>
-          <p:nvPr>
-            <p:ph type="sldNum" idx="5"/>
-          </p:nvPr>
-        </p:nvSpPr>
-        <p:spPr/>
-        <p:txBody>
-          <a:bodyPr xmlns:a="http://schemas.openxmlformats.org/drawingml/2006/main"/>
-          <a:lstStyle xmlns:a="http://schemas.openxmlformats.org/drawingml/2006/main"/>
-          <a:p xmlns:a="http://schemas.openxmlformats.org/drawingml/2006/main"/>
-        </p:txBody>
-      </p:sp>
-    </p:spTree>
-  </p:cSld>
-  <p:clrMapOvr>
-    <a:masterClrMapping xmlns:a="http://schemas.openxmlformats.org/drawingml/2006/main"/>
-  </p:clrMapOvr>
-</p:notes>
-</file>
-
 <file path=ppt/slideLayouts/slideLayout1.xml><?xml version="1.0" encoding="utf-8"?>
 <p:sldLayout xmlns:p="http://schemas.openxmlformats.org/presentationml/2006/main" type="title">
   <p:cSld name="Title Slide">
@@ -2664,7 +174,7 @@
   </p:cSld>
   <p:clrMap bg1="lt1" tx1="dk1" bg2="lt2" tx2="dk2" accent1="accent1" accent2="accent2" accent3="accent3" accent4="accent4" accent5="accent5" accent6="accent6" hlink="hlink" folHlink="folHlink"/>
   <p:sldLayoutIdLst>
-    <p:sldLayoutId xmlns:r="http://schemas.openxmlformats.org/officeDocument/2006/relationships" id="2147483649" r:id="R8d2e578e2fe142b9"/>
+    <p:sldLayoutId xmlns:r="http://schemas.openxmlformats.org/officeDocument/2006/relationships" id="2147483649" r:id="Re7bd5bbd427647a2"/>
   </p:sldLayoutIdLst>
   <p:txStyles>
     <p:titleStyle>
@@ -3254,14 +764,14 @@
       </p:sp>
       <p:pic>
         <p:nvPicPr>
-          <p:cNvPr id="12" name=""/>
+          <p:cNvPr id="13" name=""/>
           <p:cNvPicPr>
             <a:picLocks xmlns:a="http://schemas.openxmlformats.org/drawingml/2006/main" noChangeAspect="1"/>
           </p:cNvPicPr>
           <p:nvPr/>
         </p:nvPicPr>
         <p:blipFill>
-          <a:blip xmlns:r="http://schemas.openxmlformats.org/officeDocument/2006/relationships" xmlns:a="http://schemas.openxmlformats.org/drawingml/2006/main" r:embed="Rd3fd2e475a8c42e0"/>
+          <a:blip xmlns:r="http://schemas.openxmlformats.org/officeDocument/2006/relationships" xmlns:a="http://schemas.openxmlformats.org/drawingml/2006/main" r:embed="Reb40fc6fcb2a4fe0"/>
           <a:srcRect xmlns:a="http://schemas.openxmlformats.org/drawingml/2006/main" l="18968" t="0" r="18968" b="0"/>
           <a:stretch xmlns:a="http://schemas.openxmlformats.org/drawingml/2006/main">
             <a:fillRect l="0" t="0" r="0" b="0"/>
@@ -14533,14 +12043,14 @@
       </p:sp>
       <p:pic>
         <p:nvPicPr>
-          <p:cNvPr id="17" name=""/>
+          <p:cNvPr id="18" name=""/>
           <p:cNvPicPr>
             <a:picLocks xmlns:a="http://schemas.openxmlformats.org/drawingml/2006/main" noChangeAspect="1"/>
           </p:cNvPicPr>
           <p:nvPr/>
         </p:nvPicPr>
         <p:blipFill>
-          <a:blip xmlns:r="http://schemas.openxmlformats.org/officeDocument/2006/relationships" xmlns:a="http://schemas.openxmlformats.org/drawingml/2006/main" r:embed="R8dc3f662b9cc4c0b"/>
+          <a:blip xmlns:r="http://schemas.openxmlformats.org/officeDocument/2006/relationships" xmlns:a="http://schemas.openxmlformats.org/drawingml/2006/main" r:embed="R213470133bbf470c"/>
           <a:srcRect xmlns:a="http://schemas.openxmlformats.org/drawingml/2006/main" l="5014" t="0" r="5014" b="0"/>
           <a:stretch xmlns:a="http://schemas.openxmlformats.org/drawingml/2006/main">
             <a:fillRect l="0" t="0" r="0" b="0"/>
@@ -14552,9 +12062,7 @@
             <a:ext cx="4476750" cy="2800350"/>
           </a:xfrm>
           <a:prstGeom xmlns:a="http://schemas.openxmlformats.org/drawingml/2006/main" prst="roundRect">
-            <a:avLst>
-              <a:gd name="adj" fmla="val 4762"/>
-            </a:avLst>
+            <a:avLst/>
           </a:prstGeom>
         </p:spPr>
       </p:pic>

--- a/slides/docker-session3-mysql-compose.pptx
+++ b/slides/docker-session3-mysql-compose.pptx
@@ -12,14 +12,18 @@
     <p:sldId xmlns:r="http://schemas.openxmlformats.org/officeDocument/2006/relationships" id="260" r:id="Ra37fad4c4c6c4a8d"/>
     <p:sldId xmlns:r="http://schemas.openxmlformats.org/officeDocument/2006/relationships" id="261" r:id="R3c069a58dc974fb2"/>
     <p:sldId xmlns:r="http://schemas.openxmlformats.org/officeDocument/2006/relationships" id="262" r:id="Rbf41462062bc44aa"/>
+    <p:sldId id="286" r:id="rId1"/>
     <p:sldId xmlns:r="http://schemas.openxmlformats.org/officeDocument/2006/relationships" id="263" r:id="Rb7fe58702fa94ddf"/>
     <p:sldId xmlns:r="http://schemas.openxmlformats.org/officeDocument/2006/relationships" id="264" r:id="R6b580d0fb54c4500"/>
+    <p:sldId id="287" r:id="rId2"/>
+    <p:sldId id="288" r:id="rId3"/>
     <p:sldId xmlns:r="http://schemas.openxmlformats.org/officeDocument/2006/relationships" id="265" r:id="R374a33a5772f4baf"/>
     <p:sldId xmlns:r="http://schemas.openxmlformats.org/officeDocument/2006/relationships" id="266" r:id="Rbe91b6361ebd4547"/>
     <p:sldId xmlns:r="http://schemas.openxmlformats.org/officeDocument/2006/relationships" id="267" r:id="Rbb116402c2304750"/>
     <p:sldId xmlns:r="http://schemas.openxmlformats.org/officeDocument/2006/relationships" id="268" r:id="R5d962329b29e470e"/>
     <p:sldId xmlns:r="http://schemas.openxmlformats.org/officeDocument/2006/relationships" id="269" r:id="R524228ef67314c5a"/>
     <p:sldId xmlns:r="http://schemas.openxmlformats.org/officeDocument/2006/relationships" id="270" r:id="Re7a68d2696234a37"/>
+    <p:sldId id="289" r:id="rId4"/>
     <p:sldId xmlns:r="http://schemas.openxmlformats.org/officeDocument/2006/relationships" id="271" r:id="R02c6b63a90f24ef6"/>
     <p:sldId xmlns:r="http://schemas.openxmlformats.org/officeDocument/2006/relationships" id="272" r:id="Re1288fe984a44e8d"/>
     <p:sldId xmlns:r="http://schemas.openxmlformats.org/officeDocument/2006/relationships" id="273" r:id="R583bc90f82f244ad"/>
@@ -27,24 +31,20 @@
     <p:sldId xmlns:r="http://schemas.openxmlformats.org/officeDocument/2006/relationships" id="275" r:id="Rda47fcacbc8d4b3d"/>
     <p:sldId xmlns:r="http://schemas.openxmlformats.org/officeDocument/2006/relationships" id="276" r:id="Rceeebe22d6444bf5"/>
     <p:sldId xmlns:r="http://schemas.openxmlformats.org/officeDocument/2006/relationships" id="277" r:id="Ra84af5a49278411f"/>
+    <p:sldId id="290" r:id="rId5"/>
+    <p:sldId id="291" r:id="rId6"/>
     <p:sldId xmlns:r="http://schemas.openxmlformats.org/officeDocument/2006/relationships" id="278" r:id="R78bed099d3124ee8"/>
     <p:sldId xmlns:r="http://schemas.openxmlformats.org/officeDocument/2006/relationships" id="279" r:id="R48380da907be4173"/>
+    <p:sldId id="292" r:id="rId7"/>
+    <p:sldId id="293" r:id="rId8"/>
     <p:sldId xmlns:r="http://schemas.openxmlformats.org/officeDocument/2006/relationships" id="280" r:id="Rff72ae626e744568"/>
     <p:sldId xmlns:r="http://schemas.openxmlformats.org/officeDocument/2006/relationships" id="281" r:id="R9e0c904148e04b18"/>
     <p:sldId xmlns:r="http://schemas.openxmlformats.org/officeDocument/2006/relationships" id="282" r:id="Rdf2355019ff041de"/>
     <p:sldId xmlns:r="http://schemas.openxmlformats.org/officeDocument/2006/relationships" id="283" r:id="R41fc3d396b3544b5"/>
+    <p:sldId id="294" r:id="rId9"/>
+    <p:sldId id="295" r:id="rId10"/>
     <p:sldId xmlns:r="http://schemas.openxmlformats.org/officeDocument/2006/relationships" id="284" r:id="Rd7627dfebde64855"/>
     <p:sldId xmlns:r="http://schemas.openxmlformats.org/officeDocument/2006/relationships" id="285" r:id="R09b6550b11a34661"/>
-    <p:sldId id="286" r:id="rId1"/>
-    <p:sldId id="287" r:id="rId2"/>
-    <p:sldId id="288" r:id="rId3"/>
-    <p:sldId id="289" r:id="rId4"/>
-    <p:sldId id="290" r:id="rId5"/>
-    <p:sldId id="291" r:id="rId6"/>
-    <p:sldId id="292" r:id="rId7"/>
-    <p:sldId id="293" r:id="rId8"/>
-    <p:sldId id="294" r:id="rId9"/>
-    <p:sldId id="295" r:id="rId10"/>
   </p:sldIdLst>
   <p:sldSz cx="12192000" cy="6858000"/>
   <p:notesSz cx="6858000" cy="9144000"/>
@@ -26289,7 +26289,7 @@
 
 <file path=ppt/slides/slide31.xml><?xml version="1.0" encoding="utf-8"?>
 <p:sld xmlns:a="http://schemas.openxmlformats.org/drawingml/2006/main" xmlns:r="http://schemas.openxmlformats.org/officeDocument/2006/relationships" xmlns:p="http://schemas.openxmlformats.org/presentationml/2006/main">
-  <p:cSld name="程式碼附錄 1: 啟動 MySQL 8.0">
+  <p:cSld name="範例程式碼：啟動 MySQL 8.0">
     <p:bg>
       <p:bgPr>
         <a:solidFill>
@@ -26346,7 +26346,7 @@
                 <a:ea typeface="Aptos"/>
                 <a:cs typeface="Aptos"/>
               </a:rPr>
-              <a:t>CODE APPENDIX</a:t>
+              <a:t>CODE EXAMPLE</a:t>
             </a:r>
           </a:p>
         </p:txBody>
@@ -26385,7 +26385,7 @@
                 <a:ea typeface="Aptos"/>
                 <a:cs typeface="Aptos"/>
               </a:rPr>
-              <a:t>程式碼附錄 1: 啟動 MySQL 8.0</a:t>
+              <a:t>範例程式碼：啟動 MySQL 8.0</a:t>
             </a:r>
           </a:p>
         </p:txBody>
@@ -26636,7 +26636,7 @@
                 <a:ea typeface="Aptos"/>
                 <a:cs typeface="Aptos"/>
               </a:rPr>
-              <a:t>Docker 基礎教學 | 第 3 堂 | Code 1/10</a:t>
+              <a:t>Docker 基礎教學 | 第 3 堂 | 範例程式碼</a:t>
             </a:r>
           </a:p>
         </p:txBody>
@@ -26675,7 +26675,7 @@
                 <a:ea typeface="Aptos"/>
                 <a:cs typeface="Aptos"/>
               </a:rPr>
-              <a:t>A1</a:t>
+              <a:t>CODE</a:t>
             </a:r>
           </a:p>
         </p:txBody>
@@ -26690,7 +26690,7 @@
 
 <file path=ppt/slides/slide32.xml><?xml version="1.0" encoding="utf-8"?>
 <p:sld xmlns:a="http://schemas.openxmlformats.org/drawingml/2006/main" xmlns:r="http://schemas.openxmlformats.org/officeDocument/2006/relationships" xmlns:p="http://schemas.openxmlformats.org/presentationml/2006/main">
-  <p:cSld name="程式碼附錄 2: Product 資料表">
+  <p:cSld name="範例程式碼：Product 資料表">
     <p:bg>
       <p:bgPr>
         <a:solidFill>
@@ -26747,7 +26747,7 @@
                 <a:ea typeface="Aptos"/>
                 <a:cs typeface="Aptos"/>
               </a:rPr>
-              <a:t>CODE APPENDIX</a:t>
+              <a:t>CODE EXAMPLE</a:t>
             </a:r>
           </a:p>
         </p:txBody>
@@ -26786,7 +26786,7 @@
                 <a:ea typeface="Aptos"/>
                 <a:cs typeface="Aptos"/>
               </a:rPr>
-              <a:t>程式碼附錄 2: Product 資料表</a:t>
+              <a:t>範例程式碼：Product 資料表</a:t>
             </a:r>
           </a:p>
         </p:txBody>
@@ -27024,7 +27024,7 @@
                 <a:ea typeface="Aptos"/>
                 <a:cs typeface="Aptos"/>
               </a:rPr>
-              <a:t>Docker 基礎教學 | 第 3 堂 | Code 2/10</a:t>
+              <a:t>Docker 基礎教學 | 第 3 堂 | 範例程式碼</a:t>
             </a:r>
           </a:p>
         </p:txBody>
@@ -27063,7 +27063,7 @@
                 <a:ea typeface="Aptos"/>
                 <a:cs typeface="Aptos"/>
               </a:rPr>
-              <a:t>A2</a:t>
+              <a:t>CODE</a:t>
             </a:r>
           </a:p>
         </p:txBody>
@@ -27078,7 +27078,7 @@
 
 <file path=ppt/slides/slide33.xml><?xml version="1.0" encoding="utf-8"?>
 <p:sld xmlns:a="http://schemas.openxmlformats.org/drawingml/2006/main" xmlns:r="http://schemas.openxmlformats.org/officeDocument/2006/relationships" xmlns:p="http://schemas.openxmlformats.org/presentationml/2006/main">
-  <p:cSld name="程式碼附錄 3: 新增與查詢資料">
+  <p:cSld name="範例程式碼：新增與查詢資料">
     <p:bg>
       <p:bgPr>
         <a:solidFill>
@@ -27135,7 +27135,7 @@
                 <a:ea typeface="Aptos"/>
                 <a:cs typeface="Aptos"/>
               </a:rPr>
-              <a:t>CODE APPENDIX</a:t>
+              <a:t>CODE EXAMPLE</a:t>
             </a:r>
           </a:p>
         </p:txBody>
@@ -27174,7 +27174,7 @@
                 <a:ea typeface="Aptos"/>
                 <a:cs typeface="Aptos"/>
               </a:rPr>
-              <a:t>程式碼附錄 3: 新增與查詢資料</a:t>
+              <a:t>範例程式碼：新增與查詢資料</a:t>
             </a:r>
           </a:p>
         </p:txBody>
@@ -27438,7 +27438,7 @@
                 <a:ea typeface="Aptos"/>
                 <a:cs typeface="Aptos"/>
               </a:rPr>
-              <a:t>Docker 基礎教學 | 第 3 堂 | Code 3/10</a:t>
+              <a:t>Docker 基礎教學 | 第 3 堂 | 範例程式碼</a:t>
             </a:r>
           </a:p>
         </p:txBody>
@@ -27477,7 +27477,7 @@
                 <a:ea typeface="Aptos"/>
                 <a:cs typeface="Aptos"/>
               </a:rPr>
-              <a:t>A3</a:t>
+              <a:t>CODE</a:t>
             </a:r>
           </a:p>
         </p:txBody>
@@ -27492,7 +27492,7 @@
 
 <file path=ppt/slides/slide34.xml><?xml version="1.0" encoding="utf-8"?>
 <p:sld xmlns:a="http://schemas.openxmlformats.org/drawingml/2006/main" xmlns:r="http://schemas.openxmlformats.org/officeDocument/2006/relationships" xmlns:p="http://schemas.openxmlformats.org/presentationml/2006/main">
-  <p:cSld name="程式碼附錄 4: MySQL docker-compose.yml">
+  <p:cSld name="範例程式碼：MySQL docker-compose.yml">
     <p:bg>
       <p:bgPr>
         <a:solidFill>
@@ -27549,7 +27549,7 @@
                 <a:ea typeface="Aptos"/>
                 <a:cs typeface="Aptos"/>
               </a:rPr>
-              <a:t>CODE APPENDIX</a:t>
+              <a:t>CODE EXAMPLE</a:t>
             </a:r>
           </a:p>
         </p:txBody>
@@ -27588,7 +27588,7 @@
                 <a:ea typeface="Aptos"/>
                 <a:cs typeface="Aptos"/>
               </a:rPr>
-              <a:t>程式碼附錄 4: MySQL docker-compose.yml</a:t>
+              <a:t>範例程式碼：MySQL docker-compose.yml</a:t>
             </a:r>
           </a:p>
         </p:txBody>
@@ -27956,7 +27956,7 @@
                 <a:ea typeface="Aptos"/>
                 <a:cs typeface="Aptos"/>
               </a:rPr>
-              <a:t>Docker 基礎教學 | 第 3 堂 | Code 4/10</a:t>
+              <a:t>Docker 基礎教學 | 第 3 堂 | 範例程式碼</a:t>
             </a:r>
           </a:p>
         </p:txBody>
@@ -27995,7 +27995,7 @@
                 <a:ea typeface="Aptos"/>
                 <a:cs typeface="Aptos"/>
               </a:rPr>
-              <a:t>A4</a:t>
+              <a:t>CODE</a:t>
             </a:r>
           </a:p>
         </p:txBody>
@@ -28010,7 +28010,7 @@
 
 <file path=ppt/slides/slide35.xml><?xml version="1.0" encoding="utf-8"?>
 <p:sld xmlns:a="http://schemas.openxmlformats.org/drawingml/2006/main" xmlns:r="http://schemas.openxmlformats.org/officeDocument/2006/relationships" xmlns:p="http://schemas.openxmlformats.org/presentationml/2006/main">
-  <p:cSld name="程式碼附錄 5: Nginx + Redis index.html">
+  <p:cSld name="範例程式碼：Nginx + Redis index.html">
     <p:bg>
       <p:bgPr>
         <a:solidFill>
@@ -28067,7 +28067,7 @@
                 <a:ea typeface="Aptos"/>
                 <a:cs typeface="Aptos"/>
               </a:rPr>
-              <a:t>CODE APPENDIX</a:t>
+              <a:t>CODE EXAMPLE</a:t>
             </a:r>
           </a:p>
         </p:txBody>
@@ -28106,7 +28106,7 @@
                 <a:ea typeface="Aptos"/>
                 <a:cs typeface="Aptos"/>
               </a:rPr>
-              <a:t>程式碼附錄 5: Nginx + Redis index.html</a:t>
+              <a:t>範例程式碼：Nginx + Redis index.html</a:t>
             </a:r>
           </a:p>
         </p:txBody>
@@ -28474,7 +28474,7 @@
                 <a:ea typeface="Aptos"/>
                 <a:cs typeface="Aptos"/>
               </a:rPr>
-              <a:t>Docker 基礎教學 | 第 3 堂 | Code 5/10</a:t>
+              <a:t>Docker 基礎教學 | 第 3 堂 | 範例程式碼</a:t>
             </a:r>
           </a:p>
         </p:txBody>
@@ -28513,7 +28513,7 @@
                 <a:ea typeface="Aptos"/>
                 <a:cs typeface="Aptos"/>
               </a:rPr>
-              <a:t>A5</a:t>
+              <a:t>CODE</a:t>
             </a:r>
           </a:p>
         </p:txBody>
@@ -28528,7 +28528,7 @@
 
 <file path=ppt/slides/slide36.xml><?xml version="1.0" encoding="utf-8"?>
 <p:sld xmlns:a="http://schemas.openxmlformats.org/drawingml/2006/main" xmlns:r="http://schemas.openxmlformats.org/officeDocument/2006/relationships" xmlns:p="http://schemas.openxmlformats.org/presentationml/2006/main">
-  <p:cSld name="程式碼附錄 6: Nginx + Redis compose.yml">
+  <p:cSld name="範例程式碼：Nginx + Redis compose.yml">
     <p:bg>
       <p:bgPr>
         <a:solidFill>
@@ -28585,7 +28585,7 @@
                 <a:ea typeface="Aptos"/>
                 <a:cs typeface="Aptos"/>
               </a:rPr>
-              <a:t>CODE APPENDIX</a:t>
+              <a:t>CODE EXAMPLE</a:t>
             </a:r>
           </a:p>
         </p:txBody>
@@ -28624,7 +28624,7 @@
                 <a:ea typeface="Aptos"/>
                 <a:cs typeface="Aptos"/>
               </a:rPr>
-              <a:t>程式碼附錄 6: Nginx + Redis compose.yml</a:t>
+              <a:t>範例程式碼：Nginx + Redis compose.yml</a:t>
             </a:r>
           </a:p>
         </p:txBody>
@@ -28979,7 +28979,7 @@
                 <a:ea typeface="Aptos"/>
                 <a:cs typeface="Aptos"/>
               </a:rPr>
-              <a:t>Docker 基礎教學 | 第 3 堂 | Code 6/10</a:t>
+              <a:t>Docker 基礎教學 | 第 3 堂 | 範例程式碼</a:t>
             </a:r>
           </a:p>
         </p:txBody>
@@ -29018,7 +29018,7 @@
                 <a:ea typeface="Aptos"/>
                 <a:cs typeface="Aptos"/>
               </a:rPr>
-              <a:t>A6</a:t>
+              <a:t>CODE</a:t>
             </a:r>
           </a:p>
         </p:txBody>
@@ -29033,7 +29033,7 @@
 
 <file path=ppt/slides/slide37.xml><?xml version="1.0" encoding="utf-8"?>
 <p:sld xmlns:a="http://schemas.openxmlformats.org/drawingml/2006/main" xmlns:r="http://schemas.openxmlformats.org/officeDocument/2006/relationships" xmlns:p="http://schemas.openxmlformats.org/presentationml/2006/main">
-  <p:cSld name="程式碼附錄 7: Nginx + MySQL compose.yml (1/2)">
+  <p:cSld name="範例程式碼：Nginx + MySQL compose.yml (1/2)">
     <p:bg>
       <p:bgPr>
         <a:solidFill>
@@ -29090,7 +29090,7 @@
                 <a:ea typeface="Aptos"/>
                 <a:cs typeface="Aptos"/>
               </a:rPr>
-              <a:t>CODE APPENDIX</a:t>
+              <a:t>CODE EXAMPLE</a:t>
             </a:r>
           </a:p>
         </p:txBody>
@@ -29129,7 +29129,7 @@
                 <a:ea typeface="Aptos"/>
                 <a:cs typeface="Aptos"/>
               </a:rPr>
-              <a:t>程式碼附錄 7: Nginx + MySQL compose.yml (1/2)</a:t>
+              <a:t>範例程式碼：Nginx + MySQL compose.yml (1/2)</a:t>
             </a:r>
           </a:p>
         </p:txBody>
@@ -29562,7 +29562,7 @@
                 <a:ea typeface="Aptos"/>
                 <a:cs typeface="Aptos"/>
               </a:rPr>
-              <a:t>Docker 基礎教學 | 第 3 堂 | Code 7/10</a:t>
+              <a:t>Docker 基礎教學 | 第 3 堂 | 範例程式碼</a:t>
             </a:r>
           </a:p>
         </p:txBody>
@@ -29601,7 +29601,7 @@
                 <a:ea typeface="Aptos"/>
                 <a:cs typeface="Aptos"/>
               </a:rPr>
-              <a:t>A7</a:t>
+              <a:t>CODE</a:t>
             </a:r>
           </a:p>
         </p:txBody>
@@ -29616,7 +29616,7 @@
 
 <file path=ppt/slides/slide38.xml><?xml version="1.0" encoding="utf-8"?>
 <p:sld xmlns:a="http://schemas.openxmlformats.org/drawingml/2006/main" xmlns:r="http://schemas.openxmlformats.org/officeDocument/2006/relationships" xmlns:p="http://schemas.openxmlformats.org/presentationml/2006/main">
-  <p:cSld name="程式碼附錄 8: Nginx + MySQL compose.yml (2/2)">
+  <p:cSld name="範例程式碼：Nginx + MySQL compose.yml (2/2)">
     <p:bg>
       <p:bgPr>
         <a:solidFill>
@@ -29673,7 +29673,7 @@
                 <a:ea typeface="Aptos"/>
                 <a:cs typeface="Aptos"/>
               </a:rPr>
-              <a:t>CODE APPENDIX</a:t>
+              <a:t>CODE EXAMPLE</a:t>
             </a:r>
           </a:p>
         </p:txBody>
@@ -29712,7 +29712,7 @@
                 <a:ea typeface="Aptos"/>
                 <a:cs typeface="Aptos"/>
               </a:rPr>
-              <a:t>程式碼附錄 8: Nginx + MySQL compose.yml (2/2)</a:t>
+              <a:t>範例程式碼：Nginx + MySQL compose.yml (2/2)</a:t>
             </a:r>
           </a:p>
         </p:txBody>
@@ -29937,7 +29937,7 @@
                 <a:ea typeface="Aptos"/>
                 <a:cs typeface="Aptos"/>
               </a:rPr>
-              <a:t>Docker 基礎教學 | 第 3 堂 | Code 8/10</a:t>
+              <a:t>Docker 基礎教學 | 第 3 堂 | 範例程式碼</a:t>
             </a:r>
           </a:p>
         </p:txBody>
@@ -29976,7 +29976,7 @@
                 <a:ea typeface="Aptos"/>
                 <a:cs typeface="Aptos"/>
               </a:rPr>
-              <a:t>A8</a:t>
+              <a:t>CODE</a:t>
             </a:r>
           </a:p>
         </p:txBody>
@@ -29991,7 +29991,7 @@
 
 <file path=ppt/slides/slide39.xml><?xml version="1.0" encoding="utf-8"?>
 <p:sld xmlns:a="http://schemas.openxmlformats.org/drawingml/2006/main" xmlns:r="http://schemas.openxmlformats.org/officeDocument/2006/relationships" xmlns:p="http://schemas.openxmlformats.org/presentationml/2006/main">
-  <p:cSld name="程式碼附錄 9: 多版本 MySQL compose.yml (1/2)">
+  <p:cSld name="範例程式碼：多版本 MySQL compose.yml (1/2)">
     <p:bg>
       <p:bgPr>
         <a:solidFill>
@@ -30048,7 +30048,7 @@
                 <a:ea typeface="Aptos"/>
                 <a:cs typeface="Aptos"/>
               </a:rPr>
-              <a:t>CODE APPENDIX</a:t>
+              <a:t>CODE EXAMPLE</a:t>
             </a:r>
           </a:p>
         </p:txBody>
@@ -30087,7 +30087,7 @@
                 <a:ea typeface="Aptos"/>
                 <a:cs typeface="Aptos"/>
               </a:rPr>
-              <a:t>程式碼附錄 9: 多版本 MySQL compose.yml (1/2)</a:t>
+              <a:t>範例程式碼：多版本 MySQL compose.yml (1/2)</a:t>
             </a:r>
           </a:p>
         </p:txBody>
@@ -30520,7 +30520,7 @@
                 <a:ea typeface="Aptos"/>
                 <a:cs typeface="Aptos"/>
               </a:rPr>
-              <a:t>Docker 基礎教學 | 第 3 堂 | Code 9/10</a:t>
+              <a:t>Docker 基礎教學 | 第 3 堂 | 範例程式碼</a:t>
             </a:r>
           </a:p>
         </p:txBody>
@@ -30559,7 +30559,7 @@
                 <a:ea typeface="Aptos"/>
                 <a:cs typeface="Aptos"/>
               </a:rPr>
-              <a:t>A9</a:t>
+              <a:t>CODE</a:t>
             </a:r>
           </a:p>
         </p:txBody>
@@ -31479,7 +31479,7 @@
 
 <file path=ppt/slides/slide40.xml><?xml version="1.0" encoding="utf-8"?>
 <p:sld xmlns:a="http://schemas.openxmlformats.org/drawingml/2006/main" xmlns:r="http://schemas.openxmlformats.org/officeDocument/2006/relationships" xmlns:p="http://schemas.openxmlformats.org/presentationml/2006/main">
-  <p:cSld name="程式碼附錄 10: 多版本 MySQL compose.yml (2/2)">
+  <p:cSld name="範例程式碼：多版本 MySQL compose.yml (2/2)">
     <p:bg>
       <p:bgPr>
         <a:solidFill>
@@ -31536,7 +31536,7 @@
                 <a:ea typeface="Aptos"/>
                 <a:cs typeface="Aptos"/>
               </a:rPr>
-              <a:t>CODE APPENDIX</a:t>
+              <a:t>CODE EXAMPLE</a:t>
             </a:r>
           </a:p>
         </p:txBody>
@@ -31575,7 +31575,7 @@
                 <a:ea typeface="Aptos"/>
                 <a:cs typeface="Aptos"/>
               </a:rPr>
-              <a:t>程式碼附錄 10: 多版本 MySQL compose.yml (2/2)</a:t>
+              <a:t>範例程式碼：多版本 MySQL compose.yml (2/2)</a:t>
             </a:r>
           </a:p>
         </p:txBody>
@@ -31800,7 +31800,7 @@
                 <a:ea typeface="Aptos"/>
                 <a:cs typeface="Aptos"/>
               </a:rPr>
-              <a:t>Docker 基礎教學 | 第 3 堂 | Code 10/10</a:t>
+              <a:t>Docker 基礎教學 | 第 3 堂 | 範例程式碼</a:t>
             </a:r>
           </a:p>
         </p:txBody>
@@ -31839,7 +31839,7 @@
                 <a:ea typeface="Aptos"/>
                 <a:cs typeface="Aptos"/>
               </a:rPr>
-              <a:t>A10</a:t>
+              <a:t>CODE</a:t>
             </a:r>
           </a:p>
         </p:txBody>

--- a/slides/docker-session3-mysql-compose.pptx
+++ b/slides/docker-session3-mysql-compose.pptx
@@ -12245,10 +12245,7 @@
           </a:ln>
         </p:spPr>
         <p:txBody>
-          <a:bodyPr lIns="0" tIns="0" rIns="0" bIns="0" anchor="t">
-            <a:normAutofit fontScale="86478"/>
-          </a:bodyPr>
-          <a:lstStyle/>
+          <a:bodyPr/>
           <a:p>
             <a:pPr algn="l">
               <a:lnSpc>
@@ -12273,7 +12270,7 @@
                 <a:ea typeface="Aptos"/>
                 <a:cs typeface="Aptos"/>
               </a:rPr>
-              <a:t>同一份 compose 裡的服務可以用服務名稱互相連線，例如 web 連 db。</a:t>
+              <a:t xml:space="preserve">同一份 compose 裡的服務可以用服務名稱互相連線，例如 app 連 db。</a:t>
             </a:r>
           </a:p>
         </p:txBody>
@@ -13754,10 +13751,7 @@
           </a:ln>
         </p:spPr>
         <p:txBody>
-          <a:bodyPr lIns="0" tIns="0" rIns="0" bIns="0" anchor="t">
-            <a:normAutofit fontScale="100000"/>
-          </a:bodyPr>
-          <a:lstStyle/>
+          <a:bodyPr/>
           <a:p>
             <a:pPr algn="l">
               <a:lnSpc>
@@ -13782,7 +13776,7 @@
                 <a:ea typeface="Aptos"/>
                 <a:cs typeface="Aptos"/>
               </a:rPr>
-              <a:t>Nginx + MySQL、多版本 MySQL、Docker Hub 探索與清理。</a:t>
+              <a:t xml:space="preserve">Nginx + Flask + MySQL、多版本 MySQL、Docker Hub 探索與清理。</a:t>
             </a:r>
           </a:p>
         </p:txBody>
@@ -16680,10 +16674,7 @@
           </a:ln>
         </p:spPr>
         <p:txBody>
-          <a:bodyPr lIns="0" tIns="0" rIns="0" bIns="0" anchor="t">
-            <a:normAutofit fontScale="100000"/>
-          </a:bodyPr>
-          <a:lstStyle/>
+          <a:bodyPr/>
           <a:p>
             <a:pPr algn="l">
               <a:lnSpc>
@@ -16708,7 +16699,7 @@
                 <a:ea typeface="Aptos Display"/>
                 <a:cs typeface="Aptos Display"/>
               </a:rPr>
-              <a:t>練習 P2：照解答跑 Nginx + Redis</a:t>
+              <a:t xml:space="preserve">練習 P2：照解答跑 Nginx + Flask</a:t>
             </a:r>
           </a:p>
         </p:txBody>
@@ -16742,10 +16733,7 @@
           </a:ln>
         </p:spPr>
         <p:txBody>
-          <a:bodyPr lIns="0" tIns="0" rIns="0" bIns="0" anchor="t">
-            <a:normAutofit fontScale="95707"/>
-          </a:bodyPr>
-          <a:lstStyle/>
+          <a:bodyPr/>
           <a:p>
             <a:pPr algn="l">
               <a:lnSpc>
@@ -16770,7 +16758,7 @@
                 <a:ea typeface="Aptos"/>
                 <a:cs typeface="Aptos"/>
               </a:rPr>
-              <a:t>先照講義完整解答跑起來，再改一行 port。</a:t>
+              <a:t xml:space="preserve">先照講義完整解答跑起來，觀察 Nginx 如何用 service name 連到 Flask。</a:t>
             </a:r>
           </a:p>
         </p:txBody>
@@ -16907,10 +16895,7 @@
           </a:ln>
         </p:spPr>
         <p:txBody>
-          <a:bodyPr lIns="0" tIns="0" rIns="0" bIns="0" anchor="t">
-            <a:normAutofit fontScale="100000"/>
-          </a:bodyPr>
-          <a:lstStyle/>
+          <a:bodyPr/>
           <a:p>
             <a:pPr algn="ctr">
               <a:lnSpc>
@@ -16935,7 +16920,7 @@
                 <a:ea typeface="Aptos"/>
                 <a:cs typeface="Aptos"/>
               </a:rPr>
-              <a:t>image: nginx:alpine</a:t>
+              <a:t xml:space="preserve">image: nginx:alpine</a:t>
             </a:r>
           </a:p>
           <a:p>
@@ -16962,7 +16947,34 @@
                 <a:ea typeface="Aptos"/>
                 <a:cs typeface="Aptos"/>
               </a:rPr>
-              <a:t>8080:80 + 掛載 ./html</a:t>
+              <a:t xml:space="preserve">8080:80</a:t>
+            </a:r>
+          </a:p>
+          <a:p>
+            <a:pPr algn="ctr">
+              <a:lnSpc>
+                <a:spcPct val="106000"/>
+              </a:lnSpc>
+              <a:buNone/>
+              <a:defRPr sz="1425" b="0">
+                <a:solidFill>
+                  <a:srgbClr val="111827"/>
+                </a:solidFill>
+                <a:latin typeface="Aptos"/>
+                <a:ea typeface="Aptos"/>
+                <a:cs typeface="Aptos"/>
+              </a:defRPr>
+            </a:pPr>
+            <a:r>
+              <a:rPr sz="1425" b="0">
+                <a:solidFill>
+                  <a:srgbClr val="111827"/>
+                </a:solidFill>
+                <a:latin typeface="Aptos"/>
+                <a:ea typeface="Aptos"/>
+                <a:cs typeface="Aptos"/>
+              </a:rPr>
+              <a:t xml:space="preserve">proxy_pass app:5000</a:t>
             </a:r>
           </a:p>
         </p:txBody>
@@ -17037,10 +17049,7 @@
           </a:ln>
         </p:spPr>
         <p:txBody>
-          <a:bodyPr lIns="0" tIns="0" rIns="0" bIns="0" anchor="t">
-            <a:normAutofit fontScale="98998"/>
-          </a:bodyPr>
-          <a:lstStyle/>
+          <a:bodyPr/>
           <a:p>
             <a:pPr algn="ctr">
               <a:lnSpc>
@@ -17065,7 +17074,7 @@
                 <a:ea typeface="Aptos Display"/>
                 <a:cs typeface="Aptos Display"/>
               </a:rPr>
-              <a:t>Redis</a:t>
+              <a:t xml:space="preserve">Flask</a:t>
             </a:r>
           </a:p>
         </p:txBody>
@@ -17099,10 +17108,7 @@
           </a:ln>
         </p:spPr>
         <p:txBody>
-          <a:bodyPr lIns="0" tIns="0" rIns="0" bIns="0" anchor="t">
-            <a:normAutofit fontScale="100000"/>
-          </a:bodyPr>
-          <a:lstStyle/>
+          <a:bodyPr/>
           <a:p>
             <a:pPr algn="ctr">
               <a:lnSpc>
@@ -17127,7 +17133,7 @@
                 <a:ea typeface="Aptos"/>
                 <a:cs typeface="Aptos"/>
               </a:rPr>
-              <a:t>redis:7-alpine</a:t>
+              <a:t xml:space="preserve">python:3.11</a:t>
             </a:r>
           </a:p>
           <a:p>
@@ -17154,7 +17160,34 @@
                 <a:ea typeface="Aptos"/>
                 <a:cs typeface="Aptos"/>
               </a:rPr>
-              <a:t>6379:6379</a:t>
+              <a:t xml:space="preserve">expose 5000</a:t>
+            </a:r>
+          </a:p>
+          <a:p>
+            <a:pPr algn="ctr">
+              <a:lnSpc>
+                <a:spcPct val="106000"/>
+              </a:lnSpc>
+              <a:buNone/>
+              <a:defRPr sz="1425" b="0">
+                <a:solidFill>
+                  <a:srgbClr val="111827"/>
+                </a:solidFill>
+                <a:latin typeface="Aptos"/>
+                <a:ea typeface="Aptos"/>
+                <a:cs typeface="Aptos"/>
+              </a:defRPr>
+            </a:pPr>
+            <a:r>
+              <a:rPr sz="1425" b="0">
+                <a:solidFill>
+                  <a:srgbClr val="111827"/>
+                </a:solidFill>
+                <a:latin typeface="Aptos"/>
+                <a:ea typeface="Aptos"/>
+                <a:cs typeface="Aptos"/>
+              </a:rPr>
+              <a:t xml:space="preserve">不對主機開 port</a:t>
             </a:r>
           </a:p>
         </p:txBody>
@@ -17229,10 +17262,7 @@
           </a:ln>
         </p:spPr>
         <p:txBody>
-          <a:bodyPr lIns="0" tIns="0" rIns="0" bIns="0" anchor="t">
-            <a:normAutofit fontScale="98998"/>
-          </a:bodyPr>
-          <a:lstStyle/>
+          <a:bodyPr/>
           <a:p>
             <a:pPr algn="ctr">
               <a:lnSpc>
@@ -17257,7 +17287,7 @@
                 <a:ea typeface="Aptos Display"/>
                 <a:cs typeface="Aptos Display"/>
               </a:rPr>
-              <a:t>restart</a:t>
+              <a:t xml:space="preserve">network</a:t>
             </a:r>
           </a:p>
         </p:txBody>
@@ -17291,10 +17321,7 @@
           </a:ln>
         </p:spPr>
         <p:txBody>
-          <a:bodyPr lIns="0" tIns="0" rIns="0" bIns="0" anchor="t">
-            <a:normAutofit fontScale="100000"/>
-          </a:bodyPr>
-          <a:lstStyle/>
+          <a:bodyPr/>
           <a:p>
             <a:pPr algn="ctr">
               <a:lnSpc>
@@ -17319,7 +17346,7 @@
                 <a:ea typeface="Aptos"/>
                 <a:cs typeface="Aptos"/>
               </a:rPr>
-              <a:t>兩個服務都設定</a:t>
+              <a:t xml:space="preserve">web 用 app:5000</a:t>
             </a:r>
           </a:p>
           <a:p>
@@ -17346,7 +17373,7 @@
                 <a:ea typeface="Aptos"/>
                 <a:cs typeface="Aptos"/>
               </a:rPr>
-              <a:t>unless-stopped</a:t>
+              <a:t xml:space="preserve">連到 Flask</a:t>
             </a:r>
           </a:p>
         </p:txBody>
@@ -17483,10 +17510,7 @@
           </a:ln>
         </p:spPr>
         <p:txBody>
-          <a:bodyPr lIns="0" tIns="0" rIns="0" bIns="0" anchor="t">
-            <a:normAutofit fontScale="100000"/>
-          </a:bodyPr>
-          <a:lstStyle/>
+          <a:bodyPr/>
           <a:p>
             <a:pPr algn="ctr">
               <a:lnSpc>
@@ -17511,7 +17535,7 @@
                 <a:ea typeface="Aptos"/>
                 <a:cs typeface="Aptos"/>
               </a:rPr>
-              <a:t>docker compose up -d</a:t>
+              <a:t xml:space="preserve">docker compose up -d</a:t>
             </a:r>
           </a:p>
           <a:p>
@@ -17538,7 +17562,34 @@
                 <a:ea typeface="Aptos"/>
                 <a:cs typeface="Aptos"/>
               </a:rPr>
-              <a:t>ps 確認兩個都 Up</a:t>
+              <a:t xml:space="preserve">瀏覽器開 8080</a:t>
+            </a:r>
+          </a:p>
+          <a:p>
+            <a:pPr algn="ctr">
+              <a:lnSpc>
+                <a:spcPct val="106000"/>
+              </a:lnSpc>
+              <a:buNone/>
+              <a:defRPr sz="1425" b="0">
+                <a:solidFill>
+                  <a:srgbClr val="111827"/>
+                </a:solidFill>
+                <a:latin typeface="Aptos"/>
+                <a:ea typeface="Aptos"/>
+                <a:cs typeface="Aptos"/>
+              </a:defRPr>
+            </a:pPr>
+            <a:r>
+              <a:rPr sz="1425" b="0">
+                <a:solidFill>
+                  <a:srgbClr val="111827"/>
+                </a:solidFill>
+                <a:latin typeface="Aptos"/>
+                <a:ea typeface="Aptos"/>
+                <a:cs typeface="Aptos"/>
+              </a:rPr>
+              <a:t xml:space="preserve">exec web wget app:5000</a:t>
             </a:r>
           </a:p>
         </p:txBody>
@@ -17706,10 +17757,7 @@
           </a:ln>
         </p:spPr>
         <p:txBody>
-          <a:bodyPr lIns="0" tIns="0" rIns="0" bIns="0" anchor="t">
-            <a:normAutofit fontScale="80128"/>
-          </a:bodyPr>
-          <a:lstStyle/>
+          <a:bodyPr/>
           <a:p>
             <a:pPr algn="l">
               <a:lnSpc>
@@ -17734,7 +17782,7 @@
                 <a:ea typeface="Consolas"/>
                 <a:cs typeface="Consolas"/>
               </a:rPr>
-              <a:t>docker compose up -d</a:t>
+              <a:t xml:space="preserve">docker compose up -d &amp;&amp; docker compose ps</a:t>
             </a:r>
           </a:p>
           <a:p>
@@ -17761,34 +17809,7 @@
                 <a:ea typeface="Consolas"/>
                 <a:cs typeface="Consolas"/>
               </a:rPr>
-              <a:t>docker compose ps</a:t>
-            </a:r>
-          </a:p>
-          <a:p>
-            <a:pPr algn="l">
-              <a:lnSpc>
-                <a:spcPct val="104000"/>
-              </a:lnSpc>
-              <a:buNone/>
-              <a:defRPr sz="1800" b="0">
-                <a:solidFill>
-                  <a:srgbClr val="E5E7EB"/>
-                </a:solidFill>
-                <a:latin typeface="Consolas"/>
-                <a:ea typeface="Consolas"/>
-                <a:cs typeface="Consolas"/>
-              </a:defRPr>
-            </a:pPr>
-            <a:r>
-              <a:rPr sz="1800" b="0">
-                <a:solidFill>
-                  <a:srgbClr val="E5E7EB"/>
-                </a:solidFill>
-                <a:latin typeface="Consolas"/>
-                <a:ea typeface="Consolas"/>
-                <a:cs typeface="Consolas"/>
-              </a:rPr>
-              <a:t>docker exec -it compose-redis redis-cli ping</a:t>
+              <a:t xml:space="preserve">docker compose exec web wget -qO- http://app:5000</a:t>
             </a:r>
           </a:p>
         </p:txBody>
@@ -18068,10 +18089,7 @@
           </a:ln>
         </p:spPr>
         <p:txBody>
-          <a:bodyPr lIns="0" tIns="0" rIns="0" bIns="0" anchor="t">
-            <a:normAutofit fontScale="100000"/>
-          </a:bodyPr>
-          <a:lstStyle/>
+          <a:bodyPr/>
           <a:p>
             <a:pPr algn="l">
               <a:lnSpc>
@@ -18096,7 +18114,7 @@
                 <a:ea typeface="Aptos Display"/>
                 <a:cs typeface="Aptos Display"/>
               </a:rPr>
-              <a:t>下一段：Nginx + MySQL 完整實作</a:t>
+              <a:t xml:space="preserve">下一段：Nginx + Flask + MySQL 完整實作</a:t>
             </a:r>
           </a:p>
         </p:txBody>
@@ -18117,7 +18135,7 @@
         </p:nvSpPr>
         <p:spPr>
           <a:xfrm>
-            <a:off x="1619250" y="2190750"/>
+            <a:off x="762000" y="2190750"/>
             <a:ext cx="2857500" cy="1809750"/>
           </a:xfrm>
           <a:prstGeom prst="roundRect">
@@ -18158,7 +18176,7 @@
         </p:nvSpPr>
         <p:spPr>
           <a:xfrm>
-            <a:off x="1847850" y="2381250"/>
+            <a:off x="990600" y="2381250"/>
             <a:ext cx="2400300" cy="323850"/>
           </a:xfrm>
           <a:prstGeom prst="rect">
@@ -18171,10 +18189,7 @@
           </a:ln>
         </p:spPr>
         <p:txBody>
-          <a:bodyPr lIns="0" tIns="0" rIns="0" bIns="0" anchor="t">
-            <a:normAutofit fontScale="78616"/>
-          </a:bodyPr>
-          <a:lstStyle/>
+          <a:bodyPr/>
           <a:p>
             <a:pPr algn="ctr">
               <a:lnSpc>
@@ -18199,7 +18214,7 @@
                 <a:ea typeface="Aptos Display"/>
                 <a:cs typeface="Aptos Display"/>
               </a:rPr>
-              <a:t>web</a:t>
+              <a:t xml:space="preserve">web</a:t>
             </a:r>
           </a:p>
         </p:txBody>
@@ -18220,7 +18235,7 @@
         </p:nvSpPr>
         <p:spPr>
           <a:xfrm>
-            <a:off x="1847850" y="2800350"/>
+            <a:off x="990600" y="2800350"/>
             <a:ext cx="2400300" cy="1009650"/>
           </a:xfrm>
           <a:prstGeom prst="rect">
@@ -18233,10 +18248,7 @@
           </a:ln>
         </p:spPr>
         <p:txBody>
-          <a:bodyPr lIns="0" tIns="0" rIns="0" bIns="0" anchor="t">
-            <a:normAutofit fontScale="100000"/>
-          </a:bodyPr>
-          <a:lstStyle/>
+          <a:bodyPr/>
           <a:p>
             <a:pPr algn="ctr">
               <a:lnSpc>
@@ -18261,7 +18273,7 @@
                 <a:ea typeface="Aptos"/>
                 <a:cs typeface="Aptos"/>
               </a:rPr>
-              <a:t>nginx</a:t>
+              <a:t xml:space="preserve">nginx:alpine</a:t>
             </a:r>
           </a:p>
           <a:p>
@@ -18288,7 +18300,7 @@
                 <a:ea typeface="Aptos"/>
                 <a:cs typeface="Aptos"/>
               </a:rPr>
-              <a:t>8080:80</a:t>
+              <a:t xml:space="preserve">8080:80</a:t>
             </a:r>
           </a:p>
           <a:p>
@@ -18315,7 +18327,7 @@
                 <a:ea typeface="Aptos"/>
                 <a:cs typeface="Aptos"/>
               </a:rPr>
-              <a:t>./html:/usr/share/nginx/html:ro</a:t>
+              <a:t xml:space="preserve">proxy app:5000</a:t>
             </a:r>
           </a:p>
         </p:txBody>
@@ -18336,7 +18348,7 @@
         </p:nvSpPr>
         <p:spPr>
           <a:xfrm>
-            <a:off x="4800600" y="2914650"/>
+            <a:off x="3619500" y="2914650"/>
             <a:ext cx="914400" cy="361950"/>
           </a:xfrm>
           <a:prstGeom prst="rightArrow">
@@ -18355,6 +18367,252 @@
       </p:sp>
       <p:sp>
         <p:nvSpPr>
+          <p:cNvPr id="15" name="app-bg 15">
+            <a:extLst>
+              <a:ext uri="{FF2B5EF4-FFF2-40B4-BE49-F238E27FC236}">
+                <ns2:creationId id="{D7543E95-E053-4F61-BD58-361C6115308F}"/>
+              </a:ext>
+            </a:extLst>
+          </p:cNvPr>
+          <p:cNvSpPr>
+            <a:spLocks noGrp="1"/>
+          </p:cNvSpPr>
+          <p:nvPr/>
+        </p:nvSpPr>
+        <p:spPr>
+          <a:xfrm>
+            <a:off x="4670000" y="2190750"/>
+            <a:ext cx="2857500" cy="1809750"/>
+          </a:xfrm>
+          <a:prstGeom prst="roundRect">
+            <a:avLst>
+              <a:gd name="adj" fmla="val 6316"/>
+            </a:avLst>
+          </a:prstGeom>
+          <a:solidFill>
+            <a:srgbClr val="E8F3FF"/>
+          </a:solidFill>
+          <a:ln w="9525">
+            <a:solidFill>
+              <a:srgbClr val="B7DCFF"/>
+            </a:solidFill>
+            <a:prstDash val="solid"/>
+          </a:ln>
+        </p:spPr>
+        <p:style>
+          <a:lnRef idx="0"/>
+          <a:fillRef idx="0"/>
+          <a:effectRef idx="4"/>
+          <a:fontRef idx="major"/>
+        </p:style>
+      </p:sp>
+      <p:sp>
+        <p:nvSpPr>
+          <p:cNvPr id="16" name="app-title 16">
+            <a:extLst>
+              <a:ext uri="{FF2B5EF4-FFF2-40B4-BE49-F238E27FC236}">
+                <ns2:creationId id="{FBA7E642-D611-41EC-8307-CA62384A36CB}"/>
+              </a:ext>
+            </a:extLst>
+          </p:cNvPr>
+          <p:cNvSpPr>
+            <a:spLocks noGrp="1"/>
+          </p:cNvSpPr>
+          <p:nvPr/>
+        </p:nvSpPr>
+        <p:spPr>
+          <a:xfrm>
+            <a:off x="4898600" y="2381250"/>
+            <a:ext cx="2400300" cy="323850"/>
+          </a:xfrm>
+          <a:prstGeom prst="rect">
+            <a:avLst/>
+          </a:prstGeom>
+          <a:noFill/>
+          <a:ln w="0">
+            <a:noFill/>
+            <a:prstDash val="solid"/>
+          </a:ln>
+        </p:spPr>
+        <p:txBody>
+          <a:bodyPr/>
+          <a:p>
+            <a:pPr algn="ctr">
+              <a:lnSpc>
+                <a:spcPct val="106000"/>
+              </a:lnSpc>
+              <a:buNone/>
+              <a:defRPr sz="2550" b="1">
+                <a:solidFill>
+                  <a:srgbClr val="0B5CAD"/>
+                </a:solidFill>
+                <a:latin typeface="Aptos Display"/>
+                <a:ea typeface="Aptos Display"/>
+                <a:cs typeface="Aptos Display"/>
+              </a:defRPr>
+            </a:pPr>
+            <a:r>
+              <a:rPr sz="2550" b="1">
+                <a:solidFill>
+                  <a:srgbClr val="0B5CAD"/>
+                </a:solidFill>
+                <a:latin typeface="Aptos Display"/>
+                <a:ea typeface="Aptos Display"/>
+                <a:cs typeface="Aptos Display"/>
+              </a:rPr>
+              <a:t xml:space="preserve">app</a:t>
+            </a:r>
+          </a:p>
+        </p:txBody>
+      </p:sp>
+      <p:sp>
+        <p:nvSpPr>
+          <p:cNvPr id="17" name="app-body 17">
+            <a:extLst>
+              <a:ext uri="{FF2B5EF4-FFF2-40B4-BE49-F238E27FC236}">
+                <ns2:creationId id="{412E79EA-94BE-40E7-AAAF-6A210C029C35}"/>
+              </a:ext>
+            </a:extLst>
+          </p:cNvPr>
+          <p:cNvSpPr>
+            <a:spLocks noGrp="1"/>
+          </p:cNvSpPr>
+          <p:nvPr/>
+        </p:nvSpPr>
+        <p:spPr>
+          <a:xfrm>
+            <a:off x="4898600" y="2800350"/>
+            <a:ext cx="2400300" cy="1009650"/>
+          </a:xfrm>
+          <a:prstGeom prst="rect">
+            <a:avLst/>
+          </a:prstGeom>
+          <a:noFill/>
+          <a:ln w="0">
+            <a:noFill/>
+            <a:prstDash val="solid"/>
+          </a:ln>
+        </p:spPr>
+        <p:txBody>
+          <a:bodyPr/>
+          <a:p>
+            <a:pPr algn="ctr">
+              <a:lnSpc>
+                <a:spcPct val="106000"/>
+              </a:lnSpc>
+              <a:buNone/>
+              <a:defRPr sz="1425" b="0">
+                <a:solidFill>
+                  <a:srgbClr val="111827"/>
+                </a:solidFill>
+                <a:latin typeface="Aptos"/>
+                <a:ea typeface="Aptos"/>
+                <a:cs typeface="Aptos"/>
+              </a:defRPr>
+            </a:pPr>
+            <a:r>
+              <a:rPr sz="1425" b="0">
+                <a:solidFill>
+                  <a:srgbClr val="111827"/>
+                </a:solidFill>
+                <a:latin typeface="Aptos"/>
+                <a:ea typeface="Aptos"/>
+                <a:cs typeface="Aptos"/>
+              </a:rPr>
+              <a:t xml:space="preserve">python:3.11</a:t>
+            </a:r>
+          </a:p>
+          <a:p>
+            <a:pPr algn="ctr">
+              <a:lnSpc>
+                <a:spcPct val="106000"/>
+              </a:lnSpc>
+              <a:buNone/>
+              <a:defRPr sz="1425" b="0">
+                <a:solidFill>
+                  <a:srgbClr val="111827"/>
+                </a:solidFill>
+                <a:latin typeface="Aptos"/>
+                <a:ea typeface="Aptos"/>
+                <a:cs typeface="Aptos"/>
+              </a:defRPr>
+            </a:pPr>
+            <a:r>
+              <a:rPr sz="1425" b="0">
+                <a:solidFill>
+                  <a:srgbClr val="111827"/>
+                </a:solidFill>
+                <a:latin typeface="Aptos"/>
+                <a:ea typeface="Aptos"/>
+                <a:cs typeface="Aptos"/>
+              </a:rPr>
+              <a:t xml:space="preserve">expose 5000</a:t>
+            </a:r>
+          </a:p>
+          <a:p>
+            <a:pPr algn="ctr">
+              <a:lnSpc>
+                <a:spcPct val="106000"/>
+              </a:lnSpc>
+              <a:buNone/>
+              <a:defRPr sz="1425" b="0">
+                <a:solidFill>
+                  <a:srgbClr val="111827"/>
+                </a:solidFill>
+                <a:latin typeface="Aptos"/>
+                <a:ea typeface="Aptos"/>
+                <a:cs typeface="Aptos"/>
+              </a:defRPr>
+            </a:pPr>
+            <a:r>
+              <a:rPr sz="1425" b="0">
+                <a:solidFill>
+                  <a:srgbClr val="111827"/>
+                </a:solidFill>
+                <a:latin typeface="Aptos"/>
+                <a:ea typeface="Aptos"/>
+                <a:cs typeface="Aptos"/>
+              </a:rPr>
+              <a:t xml:space="preserve">DB_HOST=db</a:t>
+            </a:r>
+          </a:p>
+        </p:txBody>
+      </p:sp>
+      <p:sp>
+        <p:nvSpPr>
+          <p:cNvPr id="18" name="arrow 18">
+            <a:extLst>
+              <a:ext uri="{FF2B5EF4-FFF2-40B4-BE49-F238E27FC236}">
+                <ns2:creationId id="{3DEE1030-DDDB-4356-AFC2-A265DB9238EB}"/>
+              </a:ext>
+            </a:extLst>
+          </p:cNvPr>
+          <p:cNvSpPr>
+            <a:spLocks noGrp="1"/>
+          </p:cNvSpPr>
+          <p:nvPr/>
+        </p:nvSpPr>
+        <p:spPr>
+          <a:xfrm>
+            <a:off x="7543800" y="2914650"/>
+            <a:ext cx="914400" cy="361950"/>
+          </a:xfrm>
+          <a:prstGeom prst="rightArrow">
+            <a:avLst/>
+          </a:prstGeom>
+          <a:solidFill>
+            <a:srgbClr val="00A97F"/>
+          </a:solidFill>
+          <a:ln w="0">
+            <a:solidFill>
+              <a:srgbClr val="00A97F"/>
+            </a:solidFill>
+            <a:prstDash val="solid"/>
+          </a:ln>
+        </p:spPr>
+      </p:sp>
+      <p:sp>
+        <p:nvSpPr>
           <p:cNvPr id="7" name="">
             <a:extLst>
               <a:ext uri="{FF2B5EF4-FFF2-40B4-BE49-F238E27FC236}">
@@ -18369,7 +18627,7 @@
         </p:nvSpPr>
         <p:spPr>
           <a:xfrm>
-            <a:off x="6096000" y="2190750"/>
+            <a:off x="8580000" y="2190750"/>
             <a:ext cx="2857500" cy="1809750"/>
           </a:xfrm>
           <a:prstGeom prst="roundRect">
@@ -18410,7 +18668,7 @@
         </p:nvSpPr>
         <p:spPr>
           <a:xfrm>
-            <a:off x="6324600" y="2381250"/>
+            <a:off x="8808600" y="2381250"/>
             <a:ext cx="2400300" cy="323850"/>
           </a:xfrm>
           <a:prstGeom prst="rect">
@@ -18423,10 +18681,7 @@
           </a:ln>
         </p:spPr>
         <p:txBody>
-          <a:bodyPr lIns="0" tIns="0" rIns="0" bIns="0" anchor="t">
-            <a:normAutofit fontScale="78616"/>
-          </a:bodyPr>
-          <a:lstStyle/>
+          <a:bodyPr/>
           <a:p>
             <a:pPr algn="ctr">
               <a:lnSpc>
@@ -18451,7 +18706,7 @@
                 <a:ea typeface="Aptos Display"/>
                 <a:cs typeface="Aptos Display"/>
               </a:rPr>
-              <a:t>db</a:t>
+              <a:t xml:space="preserve">db</a:t>
             </a:r>
           </a:p>
         </p:txBody>
@@ -18472,7 +18727,7 @@
         </p:nvSpPr>
         <p:spPr>
           <a:xfrm>
-            <a:off x="6324600" y="2800350"/>
+            <a:off x="8808600" y="2800350"/>
             <a:ext cx="2400300" cy="1009650"/>
           </a:xfrm>
           <a:prstGeom prst="rect">
@@ -18485,10 +18740,7 @@
           </a:ln>
         </p:spPr>
         <p:txBody>
-          <a:bodyPr lIns="0" tIns="0" rIns="0" bIns="0" anchor="t">
-            <a:normAutofit fontScale="100000"/>
-          </a:bodyPr>
-          <a:lstStyle/>
+          <a:bodyPr/>
           <a:p>
             <a:pPr algn="ctr">
               <a:lnSpc>
@@ -18513,7 +18765,7 @@
                 <a:ea typeface="Aptos"/>
                 <a:cs typeface="Aptos"/>
               </a:rPr>
-              <a:t>mysql:8.0</a:t>
+              <a:t xml:space="preserve">mysql:8.0</a:t>
             </a:r>
           </a:p>
           <a:p>
@@ -18540,7 +18792,7 @@
                 <a:ea typeface="Aptos"/>
                 <a:cs typeface="Aptos"/>
               </a:rPr>
-              <a:t>3306:3306</a:t>
+              <a:t xml:space="preserve">3306:3306</a:t>
             </a:r>
           </a:p>
           <a:p>
@@ -18567,7 +18819,7 @@
                 <a:ea typeface="Aptos"/>
                 <a:cs typeface="Aptos"/>
               </a:rPr>
-              <a:t>db-data:/var/lib/mysql</a:t>
+              <a:t xml:space="preserve">db-data:/var/lib/mysql</a:t>
             </a:r>
           </a:p>
         </p:txBody>
@@ -18642,10 +18894,7 @@
           </a:ln>
         </p:spPr>
         <p:txBody>
-          <a:bodyPr lIns="0" tIns="0" rIns="0" bIns="0" anchor="t">
-            <a:normAutofit fontScale="75887"/>
-          </a:bodyPr>
-          <a:lstStyle/>
+          <a:bodyPr/>
           <a:p>
             <a:pPr algn="ctr">
               <a:lnSpc>
@@ -18670,7 +18919,7 @@
                 <a:ea typeface="Aptos"/>
                 <a:cs typeface="Aptos"/>
               </a:rPr>
-              <a:t>這段由老師帶著做，完整 HTML 與 compose.yml 都放在講義。</a:t>
+              <a:t xml:space="preserve">這段由老師帶著做，重點是 Nginx 用 app、Flask 用 db 兩段 service name。</a:t>
             </a:r>
           </a:p>
         </p:txBody>
@@ -18950,10 +19199,7 @@
           </a:ln>
         </p:spPr>
         <p:txBody>
-          <a:bodyPr lIns="0" tIns="0" rIns="0" bIns="0" anchor="t">
-            <a:normAutofit fontScale="100000"/>
-          </a:bodyPr>
-          <a:lstStyle/>
+          <a:bodyPr/>
           <a:p>
             <a:pPr algn="l">
               <a:lnSpc>
@@ -18978,7 +19224,7 @@
                 <a:ea typeface="Aptos Display"/>
                 <a:cs typeface="Aptos Display"/>
               </a:rPr>
-              <a:t>Nginx + MySQL：講義內有完整檔案</a:t>
+              <a:t xml:space="preserve">Nginx + Flask + MySQL：三個 service</a:t>
             </a:r>
           </a:p>
         </p:txBody>
@@ -19146,10 +19392,7 @@
           </a:ln>
         </p:spPr>
         <p:txBody>
-          <a:bodyPr lIns="0" tIns="0" rIns="0" bIns="0" anchor="t">
-            <a:normAutofit fontScale="98355"/>
-          </a:bodyPr>
-          <a:lstStyle/>
+          <a:bodyPr/>
           <a:p>
             <a:pPr algn="l">
               <a:lnSpc>
@@ -19174,7 +19417,7 @@
                 <a:ea typeface="Consolas"/>
                 <a:cs typeface="Consolas"/>
               </a:rPr>
-              <a:t>services:</a:t>
+              <a:t xml:space="preserve">services:</a:t>
             </a:r>
           </a:p>
           <a:p>
@@ -19201,7 +19444,7 @@
                 <a:ea typeface="Consolas"/>
                 <a:cs typeface="Consolas"/>
               </a:rPr>
-              <a:t>  web:</a:t>
+              <a:t xml:space="preserve">  web:</a:t>
             </a:r>
           </a:p>
           <a:p>
@@ -19228,7 +19471,7 @@
                 <a:ea typeface="Consolas"/>
                 <a:cs typeface="Consolas"/>
               </a:rPr>
-              <a:t>    image: nginx</a:t>
+              <a:t xml:space="preserve">    image: nginx:alpine</a:t>
             </a:r>
           </a:p>
           <a:p>
@@ -19255,7 +19498,7 @@
                 <a:ea typeface="Consolas"/>
                 <a:cs typeface="Consolas"/>
               </a:rPr>
-              <a:t>    ports:</a:t>
+              <a:t xml:space="preserve">    ports: ["8080:80"]</a:t>
             </a:r>
           </a:p>
           <a:p>
@@ -19282,7 +19525,7 @@
                 <a:ea typeface="Consolas"/>
                 <a:cs typeface="Consolas"/>
               </a:rPr>
-              <a:t>      - "8080:80"</a:t>
+              <a:t xml:space="preserve">    depends_on: [app]</a:t>
             </a:r>
           </a:p>
           <a:p>
@@ -19309,7 +19552,7 @@
                 <a:ea typeface="Consolas"/>
                 <a:cs typeface="Consolas"/>
               </a:rPr>
-              <a:t>    volumes:</a:t>
+              <a:t xml:space="preserve"> </a:t>
             </a:r>
           </a:p>
           <a:p>
@@ -19336,12 +19579,7 @@
                 <a:ea typeface="Consolas"/>
                 <a:cs typeface="Consolas"/>
               </a:rPr>
-              <a:t>      - ./html:/usr/share/nginx/html:ro</a:t>
-            </a:r>
-          </a:p>
-          <a:p>
-            <a:r>
-              <a:t/>
+              <a:t xml:space="preserve">  app:</a:t>
             </a:r>
           </a:p>
           <a:p>
@@ -19368,7 +19606,7 @@
                 <a:ea typeface="Consolas"/>
                 <a:cs typeface="Consolas"/>
               </a:rPr>
-              <a:t>  db:</a:t>
+              <a:t xml:space="preserve">    image: python:3.11</a:t>
             </a:r>
           </a:p>
           <a:p>
@@ -19395,7 +19633,7 @@
                 <a:ea typeface="Consolas"/>
                 <a:cs typeface="Consolas"/>
               </a:rPr>
-              <a:t>    image: mysql:8.0</a:t>
+              <a:t xml:space="preserve">    expose: ["5000"]</a:t>
             </a:r>
           </a:p>
           <a:p>
@@ -19422,7 +19660,7 @@
                 <a:ea typeface="Consolas"/>
                 <a:cs typeface="Consolas"/>
               </a:rPr>
-              <a:t>    environment:</a:t>
+              <a:t xml:space="preserve">    environment: { DB_HOST: db }</a:t>
             </a:r>
           </a:p>
           <a:p>
@@ -19449,7 +19687,7 @@
                 <a:ea typeface="Consolas"/>
                 <a:cs typeface="Consolas"/>
               </a:rPr>
-              <a:t>      MYSQL_ROOT_PASSWORD: root1234</a:t>
+              <a:t xml:space="preserve">    depends_on: [db]</a:t>
             </a:r>
           </a:p>
           <a:p>
@@ -19476,7 +19714,7 @@
                 <a:ea typeface="Consolas"/>
                 <a:cs typeface="Consolas"/>
               </a:rPr>
-              <a:t>      MYSQL_DATABASE: demo_db</a:t>
+              <a:t xml:space="preserve"> </a:t>
             </a:r>
           </a:p>
           <a:p>
@@ -19503,7 +19741,7 @@
                 <a:ea typeface="Consolas"/>
                 <a:cs typeface="Consolas"/>
               </a:rPr>
-              <a:t>    volumes:</a:t>
+              <a:t xml:space="preserve">  db:</a:t>
             </a:r>
           </a:p>
           <a:p>
@@ -19530,12 +19768,7 @@
                 <a:ea typeface="Consolas"/>
                 <a:cs typeface="Consolas"/>
               </a:rPr>
-              <a:t>      - db-data:/var/lib/mysql</a:t>
-            </a:r>
-          </a:p>
-          <a:p>
-            <a:r>
-              <a:t/>
+              <a:t xml:space="preserve">    image: mysql:8.0</a:t>
             </a:r>
           </a:p>
           <a:p>
@@ -19562,7 +19795,7 @@
                 <a:ea typeface="Consolas"/>
                 <a:cs typeface="Consolas"/>
               </a:rPr>
-              <a:t>volumes:</a:t>
+              <a:t xml:space="preserve">    volumes: [db-data:/var/lib/mysql]</a:t>
             </a:r>
           </a:p>
           <a:p>
@@ -19589,7 +19822,34 @@
                 <a:ea typeface="Consolas"/>
                 <a:cs typeface="Consolas"/>
               </a:rPr>
-              <a:t>  db-data:</a:t>
+              <a:t xml:space="preserve"> </a:t>
+            </a:r>
+          </a:p>
+          <a:p>
+            <a:pPr algn="l">
+              <a:lnSpc>
+                <a:spcPct val="104000"/>
+              </a:lnSpc>
+              <a:buNone/>
+              <a:defRPr sz="1350" b="0">
+                <a:solidFill>
+                  <a:srgbClr val="E5E7EB"/>
+                </a:solidFill>
+                <a:latin typeface="Consolas"/>
+                <a:ea typeface="Consolas"/>
+                <a:cs typeface="Consolas"/>
+              </a:defRPr>
+            </a:pPr>
+            <a:r>
+              <a:rPr sz="1350" b="0">
+                <a:solidFill>
+                  <a:srgbClr val="E5E7EB"/>
+                </a:solidFill>
+                <a:latin typeface="Consolas"/>
+                <a:ea typeface="Consolas"/>
+                <a:cs typeface="Consolas"/>
+              </a:rPr>
+              <a:t xml:space="preserve">volumes: { db-data: }</a:t>
             </a:r>
           </a:p>
         </p:txBody>
@@ -19664,10 +19924,7 @@
           </a:ln>
         </p:spPr>
         <p:txBody>
-          <a:bodyPr lIns="0" tIns="0" rIns="0" bIns="0" anchor="t">
-            <a:normAutofit fontScale="95463"/>
-          </a:bodyPr>
-          <a:lstStyle/>
+          <a:bodyPr/>
           <a:p>
             <a:pPr algn="l">
               <a:lnSpc>
@@ -19692,7 +19949,7 @@
                 <a:ea typeface="Aptos Display"/>
                 <a:cs typeface="Aptos Display"/>
               </a:rPr>
-              <a:t>web</a:t>
+              <a:t xml:space="preserve">web</a:t>
             </a:r>
           </a:p>
         </p:txBody>
@@ -19726,10 +19983,7 @@
           </a:ln>
         </p:spPr>
         <p:txBody>
-          <a:bodyPr lIns="0" tIns="0" rIns="0" bIns="0" anchor="t">
-            <a:normAutofit fontScale="86431"/>
-          </a:bodyPr>
-          <a:lstStyle/>
+          <a:bodyPr/>
           <a:p>
             <a:pPr algn="l">
               <a:lnSpc>
@@ -19754,7 +20008,7 @@
                 <a:ea typeface="Aptos"/>
                 <a:cs typeface="Aptos"/>
               </a:rPr>
-              <a:t>負責靜態網頁，使用唯讀 Bind Mount。</a:t>
+              <a:t xml:space="preserve">Nginx 對外 8080，proxy 到 app:5000。</a:t>
             </a:r>
           </a:p>
         </p:txBody>
@@ -19829,10 +20083,7 @@
           </a:ln>
         </p:spPr>
         <p:txBody>
-          <a:bodyPr lIns="0" tIns="0" rIns="0" bIns="0" anchor="t">
-            <a:normAutofit fontScale="95463"/>
-          </a:bodyPr>
-          <a:lstStyle/>
+          <a:bodyPr/>
           <a:p>
             <a:pPr algn="l">
               <a:lnSpc>
@@ -19857,7 +20108,7 @@
                 <a:ea typeface="Aptos Display"/>
                 <a:cs typeface="Aptos Display"/>
               </a:rPr>
-              <a:t>db</a:t>
+              <a:t xml:space="preserve">app / db</a:t>
             </a:r>
           </a:p>
         </p:txBody>
@@ -19891,10 +20142,7 @@
           </a:ln>
         </p:spPr>
         <p:txBody>
-          <a:bodyPr lIns="0" tIns="0" rIns="0" bIns="0" anchor="t">
-            <a:normAutofit fontScale="74164"/>
-          </a:bodyPr>
-          <a:lstStyle/>
+          <a:bodyPr/>
           <a:p>
             <a:pPr algn="l">
               <a:lnSpc>
@@ -19919,7 +20167,7 @@
                 <a:ea typeface="Aptos"/>
                 <a:cs typeface="Aptos"/>
               </a:rPr>
-              <a:t>負責資料庫，使用 Named Volume 保存資料。</a:t>
+              <a:t xml:space="preserve">Flask 用 DB_HOST=db 連 MySQL。</a:t>
             </a:r>
           </a:p>
         </p:txBody>
@@ -20364,10 +20612,7 @@
           </a:ln>
         </p:spPr>
         <p:txBody>
-          <a:bodyPr lIns="0" tIns="0" rIns="0" bIns="0" anchor="t">
-            <a:normAutofit fontScale="100000"/>
-          </a:bodyPr>
-          <a:lstStyle/>
+          <a:bodyPr/>
           <a:p>
             <a:pPr algn="ctr">
               <a:lnSpc>
@@ -20392,7 +20637,7 @@
                 <a:ea typeface="Aptos"/>
                 <a:cs typeface="Aptos"/>
               </a:rPr>
-              <a:t>兩個服務都應該是 Up</a:t>
+              <a:t xml:space="preserve">三個服務都應該是 Up</a:t>
             </a:r>
           </a:p>
         </p:txBody>
@@ -20529,10 +20774,7 @@
           </a:ln>
         </p:spPr>
         <p:txBody>
-          <a:bodyPr lIns="0" tIns="0" rIns="0" bIns="0" anchor="t">
-            <a:normAutofit fontScale="100000"/>
-          </a:bodyPr>
-          <a:lstStyle/>
+          <a:bodyPr/>
           <a:p>
             <a:pPr algn="ctr">
               <a:lnSpc>
@@ -20557,7 +20799,7 @@
                 <a:ea typeface="Aptos"/>
                 <a:cs typeface="Aptos"/>
               </a:rPr>
-              <a:t>確認 Nginx 與 MySQL 沒有錯誤</a:t>
+              <a:t xml:space="preserve">確認 Nginx、Flask 與 MySQL 沒有錯誤</a:t>
             </a:r>
           </a:p>
         </p:txBody>
@@ -20694,10 +20936,7 @@
           </a:ln>
         </p:spPr>
         <p:txBody>
-          <a:bodyPr lIns="0" tIns="0" rIns="0" bIns="0" anchor="t">
-            <a:normAutofit fontScale="96079"/>
-          </a:bodyPr>
-          <a:lstStyle/>
+          <a:bodyPr/>
           <a:p>
             <a:pPr algn="ctr">
               <a:lnSpc>
@@ -20722,7 +20961,7 @@
                 <a:ea typeface="Aptos"/>
                 <a:cs typeface="Aptos"/>
               </a:rPr>
-              <a:t>localhost:8080 看網頁；localhost:3306 連 MySQL</a:t>
+              <a:t xml:space="preserve">localhost:8080 看 JSON；localhost:3306 連 MySQL</a:t>
             </a:r>
           </a:p>
         </p:txBody>
@@ -21252,10 +21491,7 @@
           </a:ln>
         </p:spPr>
         <p:txBody>
-          <a:bodyPr lIns="0" tIns="0" rIns="0" bIns="0" anchor="t">
-            <a:normAutofit fontScale="100000"/>
-          </a:bodyPr>
-          <a:lstStyle/>
+          <a:bodyPr/>
           <a:p>
             <a:pPr algn="l">
               <a:lnSpc>
@@ -21280,7 +21516,7 @@
                 <a:ea typeface="Aptos Display"/>
                 <a:cs typeface="Aptos Display"/>
               </a:rPr>
-              <a:t>進 demo-mysql 確認資料庫可用</a:t>
+              <a:t xml:space="preserve">進 demo-mysql 確認 Flask 寫入資料</a:t>
             </a:r>
           </a:p>
         </p:txBody>
@@ -21448,10 +21684,7 @@
           </a:ln>
         </p:spPr>
         <p:txBody>
-          <a:bodyPr lIns="0" tIns="0" rIns="0" bIns="0" anchor="t">
-            <a:normAutofit fontScale="100000"/>
-          </a:bodyPr>
-          <a:lstStyle/>
+          <a:bodyPr/>
           <a:p>
             <a:pPr algn="l">
               <a:lnSpc>
@@ -21476,12 +21709,7 @@
                 <a:ea typeface="Consolas"/>
                 <a:cs typeface="Consolas"/>
               </a:rPr>
-              <a:t>docker exec -it demo-mysql mysql -u demo_user -p</a:t>
-            </a:r>
-          </a:p>
-          <a:p>
-            <a:r>
-              <a:t/>
+              <a:t xml:space="preserve">docker exec -it demo-mysql mysql -u demo_user -p</a:t>
             </a:r>
           </a:p>
           <a:p>
@@ -21508,7 +21736,7 @@
                 <a:ea typeface="Consolas"/>
                 <a:cs typeface="Consolas"/>
               </a:rPr>
-              <a:t>SHOW DATABASES;</a:t>
+              <a:t xml:space="preserve">SHOW DATABASES;</a:t>
             </a:r>
           </a:p>
           <a:p>
@@ -21535,7 +21763,7 @@
                 <a:ea typeface="Consolas"/>
                 <a:cs typeface="Consolas"/>
               </a:rPr>
-              <a:t>USE demo_db;</a:t>
+              <a:t xml:space="preserve">USE demo_db;</a:t>
             </a:r>
           </a:p>
           <a:p>
@@ -21562,7 +21790,7 @@
                 <a:ea typeface="Consolas"/>
                 <a:cs typeface="Consolas"/>
               </a:rPr>
-              <a:t>CREATE TABLE test (id INT PRIMARY KEY, message VARCHAR(100));</a:t>
+              <a:t xml:space="preserve">SELECT * FROM visits;</a:t>
             </a:r>
           </a:p>
           <a:p>
@@ -21589,61 +21817,7 @@
                 <a:ea typeface="Consolas"/>
                 <a:cs typeface="Consolas"/>
               </a:rPr>
-              <a:t>INSERT INTO test VALUES (1, 'Docker Compose works!');</a:t>
-            </a:r>
-          </a:p>
-          <a:p>
-            <a:pPr algn="l">
-              <a:lnSpc>
-                <a:spcPct val="104000"/>
-              </a:lnSpc>
-              <a:buNone/>
-              <a:defRPr sz="1350" b="0">
-                <a:solidFill>
-                  <a:srgbClr val="E5E7EB"/>
-                </a:solidFill>
-                <a:latin typeface="Consolas"/>
-                <a:ea typeface="Consolas"/>
-                <a:cs typeface="Consolas"/>
-              </a:defRPr>
-            </a:pPr>
-            <a:r>
-              <a:rPr sz="1350" b="0">
-                <a:solidFill>
-                  <a:srgbClr val="E5E7EB"/>
-                </a:solidFill>
-                <a:latin typeface="Consolas"/>
-                <a:ea typeface="Consolas"/>
-                <a:cs typeface="Consolas"/>
-              </a:rPr>
-              <a:t>SELECT * FROM test;</a:t>
-            </a:r>
-          </a:p>
-          <a:p>
-            <a:pPr algn="l">
-              <a:lnSpc>
-                <a:spcPct val="104000"/>
-              </a:lnSpc>
-              <a:buNone/>
-              <a:defRPr sz="1350" b="0">
-                <a:solidFill>
-                  <a:srgbClr val="E5E7EB"/>
-                </a:solidFill>
-                <a:latin typeface="Consolas"/>
-                <a:ea typeface="Consolas"/>
-                <a:cs typeface="Consolas"/>
-              </a:defRPr>
-            </a:pPr>
-            <a:r>
-              <a:rPr sz="1350" b="0">
-                <a:solidFill>
-                  <a:srgbClr val="E5E7EB"/>
-                </a:solidFill>
-                <a:latin typeface="Consolas"/>
-                <a:ea typeface="Consolas"/>
-                <a:cs typeface="Consolas"/>
-              </a:rPr>
-              <a:t>EXIT;</a:t>
+              <a:t xml:space="preserve">EXIT;</a:t>
             </a:r>
           </a:p>
         </p:txBody>
@@ -21780,10 +21954,7 @@
           </a:ln>
         </p:spPr>
         <p:txBody>
-          <a:bodyPr lIns="0" tIns="0" rIns="0" bIns="0" anchor="t">
-            <a:normAutofit fontScale="86892"/>
-          </a:bodyPr>
-          <a:lstStyle/>
+          <a:bodyPr/>
           <a:p>
             <a:pPr algn="l">
               <a:lnSpc>
@@ -21808,7 +21979,7 @@
                 <a:ea typeface="Aptos"/>
                 <a:cs typeface="Aptos"/>
               </a:rPr>
-              <a:t>不是只看容器 Up，而是確認 MySQL 真的可以登入、建表、寫入、查詢。</a:t>
+              <a:t xml:space="preserve">不是只看容器 Up，而是確認 Flask 真的透過 db 寫入 MySQL。</a:t>
             </a:r>
           </a:p>
         </p:txBody>
@@ -25761,10 +25932,7 @@
           </a:ln>
         </p:spPr>
         <p:txBody>
-          <a:bodyPr lIns="0" tIns="0" rIns="0" bIns="0" anchor="t">
-            <a:normAutofit fontScale="95463"/>
-          </a:bodyPr>
-          <a:lstStyle/>
+          <a:bodyPr/>
           <a:p>
             <a:pPr algn="l">
               <a:lnSpc>
@@ -25789,7 +25957,7 @@
                 <a:ea typeface="Aptos Display"/>
                 <a:cs typeface="Aptos Display"/>
               </a:rPr>
-              <a:t>C1：Nginx + MySQL + Redis</a:t>
+              <a:t xml:space="preserve">C1：Nginx + Flask + MySQL</a:t>
             </a:r>
           </a:p>
         </p:txBody>
@@ -25823,10 +25991,7 @@
           </a:ln>
         </p:spPr>
         <p:txBody>
-          <a:bodyPr lIns="0" tIns="0" rIns="0" bIns="0" anchor="t">
-            <a:normAutofit fontScale="100000"/>
-          </a:bodyPr>
-          <a:lstStyle/>
+          <a:bodyPr/>
           <a:p>
             <a:pPr algn="l">
               <a:lnSpc>
@@ -25851,7 +26016,7 @@
                 <a:ea typeface="Aptos"/>
                 <a:cs typeface="Aptos"/>
               </a:rPr>
-              <a:t>參考前面解答，改出一個 docker-compose.yml 同時啟動三個服務，並用 docker compose ps 和 docker stats 觀察狀態與資源。</a:t>
+              <a:t xml:space="preserve">參考前面解答，改出 Browser -&gt; Nginx -&gt; Flask -&gt; MySQL 的三服務 Compose，並用 docker compose ps、wget 和 docker stats 觀察狀態與資源。</a:t>
             </a:r>
           </a:p>
         </p:txBody>
@@ -28009,7 +28174,7 @@
 </file>
 
 <file path=ppt/slides/slide35.xml><?xml version="1.0" encoding="utf-8"?>
-<p:sld xmlns:a="http://schemas.openxmlformats.org/drawingml/2006/main" xmlns:r="http://schemas.openxmlformats.org/officeDocument/2006/relationships" xmlns:p="http://schemas.openxmlformats.org/presentationml/2006/main">
+<p:sld xmlns:a="http://schemas.openxmlformats.org/drawingml/2006/main" xmlns:p="http://schemas.openxmlformats.org/presentationml/2006/main">
   <p:cSld name="範例程式碼：Nginx + Redis index.html">
     <p:bg>
       <p:bgPr>
@@ -28092,10 +28257,7 @@
           </a:ln>
         </p:spPr>
         <p:txBody>
-          <a:bodyPr wrap="square" rtlCol="0">
-            <a:spAutoFit/>
-          </a:bodyPr>
-          <a:lstStyle/>
+          <a:bodyPr/>
           <a:p>
             <a:r>
               <a:rPr lang="zh-TW" sz="2300" b="1">
@@ -28106,7 +28268,7 @@
                 <a:ea typeface="Aptos"/>
                 <a:cs typeface="Aptos"/>
               </a:rPr>
-              <a:t>範例程式碼：Nginx + Redis index.html</a:t>
+              <a:t xml:space="preserve">範例程式碼：Nginx + Flask app.py</a:t>
             </a:r>
           </a:p>
         </p:txBody>
@@ -28213,10 +28375,7 @@
           </a:ln>
         </p:spPr>
         <p:txBody>
-          <a:bodyPr wrap="square" rtlCol="0">
-            <a:spAutoFit/>
-          </a:bodyPr>
-          <a:lstStyle/>
+          <a:bodyPr/>
           <a:p>
             <a:r>
               <a:rPr lang="zh-TW" sz="1150">
@@ -28227,7 +28386,7 @@
                 <a:ea typeface="Consolas"/>
                 <a:cs typeface="Consolas"/>
               </a:rPr>
-              <a:t>&lt;!DOCTYPE html&gt;</a:t>
+              <a:t xml:space="preserve">from flask import Flask, jsonify</a:t>
             </a:r>
           </a:p>
           <a:p>
@@ -28240,7 +28399,7 @@
                 <a:ea typeface="Consolas"/>
                 <a:cs typeface="Consolas"/>
               </a:rPr>
-              <a:t>&lt;html&gt;</a:t>
+              <a:t xml:space="preserve">import socket</a:t>
             </a:r>
           </a:p>
           <a:p>
@@ -28253,7 +28412,7 @@
                 <a:ea typeface="Consolas"/>
                 <a:cs typeface="Consolas"/>
               </a:rPr>
-              <a:t>&lt;head&gt;</a:t>
+              <a:t xml:space="preserve"> </a:t>
             </a:r>
           </a:p>
           <a:p>
@@ -28266,7 +28425,7 @@
                 <a:ea typeface="Consolas"/>
                 <a:cs typeface="Consolas"/>
               </a:rPr>
-              <a:t>    &lt;meta charset="utf-8"&gt;</a:t>
+              <a:t xml:space="preserve">app = Flask(__name__)</a:t>
             </a:r>
           </a:p>
           <a:p>
@@ -28279,7 +28438,7 @@
                 <a:ea typeface="Consolas"/>
                 <a:cs typeface="Consolas"/>
               </a:rPr>
-              <a:t>    &lt;title&gt;Nginx + Redis Compose&lt;/title&gt;</a:t>
+              <a:t xml:space="preserve"> </a:t>
             </a:r>
           </a:p>
           <a:p>
@@ -28292,7 +28451,7 @@
                 <a:ea typeface="Consolas"/>
                 <a:cs typeface="Consolas"/>
               </a:rPr>
-              <a:t>    &lt;style&gt;</a:t>
+              <a:t xml:space="preserve">@app.get("/")</a:t>
             </a:r>
           </a:p>
           <a:p>
@@ -28305,7 +28464,7 @@
                 <a:ea typeface="Consolas"/>
                 <a:cs typeface="Consolas"/>
               </a:rPr>
-              <a:t>        body { font-family: Arial; max-width: 680px; margin: 48px auto; line-height: 1.7; }</a:t>
+              <a:t xml:space="preserve">def home():</a:t>
             </a:r>
           </a:p>
           <a:p>
@@ -28318,7 +28477,7 @@
                 <a:ea typeface="Consolas"/>
                 <a:cs typeface="Consolas"/>
               </a:rPr>
-              <a:t>        h1 { color: #0f766e; }</a:t>
+              <a:t xml:space="preserve">    return jsonify(</a:t>
             </a:r>
           </a:p>
           <a:p>
@@ -28331,7 +28490,7 @@
                 <a:ea typeface="Consolas"/>
                 <a:cs typeface="Consolas"/>
               </a:rPr>
-              <a:t>        code { background: #eef2ff; padding: 2px 6px; border-radius: 4px; }</a:t>
+              <a:t xml:space="preserve">        message="Hello from Flask behind Nginx",</a:t>
             </a:r>
           </a:p>
           <a:p>
@@ -28344,7 +28503,7 @@
                 <a:ea typeface="Consolas"/>
                 <a:cs typeface="Consolas"/>
               </a:rPr>
-              <a:t>    &lt;/style&gt;</a:t>
+              <a:t xml:space="preserve">        hostname=socket.gethostname(),</a:t>
             </a:r>
           </a:p>
           <a:p>
@@ -28357,7 +28516,7 @@
                 <a:ea typeface="Consolas"/>
                 <a:cs typeface="Consolas"/>
               </a:rPr>
-              <a:t>&lt;/head&gt;</a:t>
+              <a:t xml:space="preserve">    )</a:t>
             </a:r>
           </a:p>
           <a:p>
@@ -28370,7 +28529,7 @@
                 <a:ea typeface="Consolas"/>
                 <a:cs typeface="Consolas"/>
               </a:rPr>
-              <a:t>&lt;body&gt;</a:t>
+              <a:t xml:space="preserve"> </a:t>
             </a:r>
           </a:p>
           <a:p>
@@ -28383,7 +28542,7 @@
                 <a:ea typeface="Consolas"/>
                 <a:cs typeface="Consolas"/>
               </a:rPr>
-              <a:t>    &lt;h1&gt;Nginx + Redis 已用 Docker Compose 啟動&lt;/h1&gt;</a:t>
+              <a:t xml:space="preserve">if __name__ == "__main__":</a:t>
             </a:r>
           </a:p>
           <a:p>
@@ -28396,46 +28555,7 @@
                 <a:ea typeface="Consolas"/>
                 <a:cs typeface="Consolas"/>
               </a:rPr>
-              <a:t>    &lt;p&gt;這個頁面由 Nginx 容器提供服務。&lt;/p&gt;</a:t>
-            </a:r>
-          </a:p>
-          <a:p>
-            <a:r>
-              <a:rPr lang="zh-TW" sz="1150">
-                <a:solidFill>
-                  <a:srgbClr val="E5E7EB"/>
-                </a:solidFill>
-                <a:latin typeface="Consolas"/>
-                <a:ea typeface="Consolas"/>
-                <a:cs typeface="Consolas"/>
-              </a:rPr>
-              <a:t>    &lt;p&gt;同一份 &lt;code&gt;docker-compose.yml&lt;/code&gt; 也啟動了一個 Redis 容器。&lt;/p&gt;</a:t>
-            </a:r>
-          </a:p>
-          <a:p>
-            <a:r>
-              <a:rPr lang="zh-TW" sz="1150">
-                <a:solidFill>
-                  <a:srgbClr val="E5E7EB"/>
-                </a:solidFill>
-                <a:latin typeface="Consolas"/>
-                <a:ea typeface="Consolas"/>
-                <a:cs typeface="Consolas"/>
-              </a:rPr>
-              <a:t>&lt;/body&gt;</a:t>
-            </a:r>
-          </a:p>
-          <a:p>
-            <a:r>
-              <a:rPr lang="zh-TW" sz="1150">
-                <a:solidFill>
-                  <a:srgbClr val="E5E7EB"/>
-                </a:solidFill>
-                <a:latin typeface="Consolas"/>
-                <a:ea typeface="Consolas"/>
-                <a:cs typeface="Consolas"/>
-              </a:rPr>
-              <a:t>&lt;/html&gt;</a:t>
+              <a:t xml:space="preserve">    app.run(host="0.0.0.0", port=5000)</a:t>
             </a:r>
           </a:p>
         </p:txBody>
@@ -28527,7 +28647,7 @@
 </file>
 
 <file path=ppt/slides/slide36.xml><?xml version="1.0" encoding="utf-8"?>
-<p:sld xmlns:a="http://schemas.openxmlformats.org/drawingml/2006/main" xmlns:r="http://schemas.openxmlformats.org/officeDocument/2006/relationships" xmlns:p="http://schemas.openxmlformats.org/presentationml/2006/main">
+<p:sld xmlns:a="http://schemas.openxmlformats.org/drawingml/2006/main" xmlns:p="http://schemas.openxmlformats.org/presentationml/2006/main">
   <p:cSld name="範例程式碼：Nginx + Redis compose.yml">
     <p:bg>
       <p:bgPr>
@@ -28610,10 +28730,7 @@
           </a:ln>
         </p:spPr>
         <p:txBody>
-          <a:bodyPr wrap="square" rtlCol="0">
-            <a:spAutoFit/>
-          </a:bodyPr>
-          <a:lstStyle/>
+          <a:bodyPr/>
           <a:p>
             <a:r>
               <a:rPr lang="zh-TW" sz="2300" b="1">
@@ -28624,7 +28741,7 @@
                 <a:ea typeface="Aptos"/>
                 <a:cs typeface="Aptos"/>
               </a:rPr>
-              <a:t>範例程式碼：Nginx + Redis compose.yml</a:t>
+              <a:t xml:space="preserve">範例程式碼：Nginx + Flask compose.yml</a:t>
             </a:r>
           </a:p>
         </p:txBody>
@@ -28731,10 +28848,7 @@
           </a:ln>
         </p:spPr>
         <p:txBody>
-          <a:bodyPr wrap="square" rtlCol="0">
-            <a:spAutoFit/>
-          </a:bodyPr>
-          <a:lstStyle/>
+          <a:bodyPr/>
           <a:p>
             <a:r>
               <a:rPr lang="zh-TW" sz="1150">
@@ -28745,7 +28859,7 @@
                 <a:ea typeface="Consolas"/>
                 <a:cs typeface="Consolas"/>
               </a:rPr>
-              <a:t>services:</a:t>
+              <a:t xml:space="preserve">services:</a:t>
             </a:r>
           </a:p>
           <a:p>
@@ -28758,7 +28872,7 @@
                 <a:ea typeface="Consolas"/>
                 <a:cs typeface="Consolas"/>
               </a:rPr>
-              <a:t>  web:</a:t>
+              <a:t xml:space="preserve">  web:</a:t>
             </a:r>
           </a:p>
           <a:p>
@@ -28771,7 +28885,7 @@
                 <a:ea typeface="Consolas"/>
                 <a:cs typeface="Consolas"/>
               </a:rPr>
-              <a:t>    image: nginx:alpine</a:t>
+              <a:t xml:space="preserve">    image: nginx:alpine</a:t>
             </a:r>
           </a:p>
           <a:p>
@@ -28784,7 +28898,7 @@
                 <a:ea typeface="Consolas"/>
                 <a:cs typeface="Consolas"/>
               </a:rPr>
-              <a:t>    container_name: compose-nginx</a:t>
+              <a:t xml:space="preserve">    container_name: compose-nginx</a:t>
             </a:r>
           </a:p>
           <a:p>
@@ -28797,7 +28911,7 @@
                 <a:ea typeface="Consolas"/>
                 <a:cs typeface="Consolas"/>
               </a:rPr>
-              <a:t>    restart: unless-stopped</a:t>
+              <a:t xml:space="preserve">    restart: unless-stopped</a:t>
             </a:r>
           </a:p>
           <a:p>
@@ -28810,7 +28924,7 @@
                 <a:ea typeface="Consolas"/>
                 <a:cs typeface="Consolas"/>
               </a:rPr>
-              <a:t>    ports:</a:t>
+              <a:t xml:space="preserve">    ports:</a:t>
             </a:r>
           </a:p>
           <a:p>
@@ -28823,7 +28937,7 @@
                 <a:ea typeface="Consolas"/>
                 <a:cs typeface="Consolas"/>
               </a:rPr>
-              <a:t>      - "8080:80"</a:t>
+              <a:t xml:space="preserve">      - "8080:80"</a:t>
             </a:r>
           </a:p>
           <a:p>
@@ -28836,7 +28950,7 @@
                 <a:ea typeface="Consolas"/>
                 <a:cs typeface="Consolas"/>
               </a:rPr>
-              <a:t>    volumes:</a:t>
+              <a:t xml:space="preserve">    volumes:</a:t>
             </a:r>
           </a:p>
           <a:p>
@@ -28849,7 +28963,7 @@
                 <a:ea typeface="Consolas"/>
                 <a:cs typeface="Consolas"/>
               </a:rPr>
-              <a:t>      - ./html:/usr/share/nginx/html:ro</a:t>
+              <a:t xml:space="preserve">      - ./nginx/default.conf:/etc/nginx/conf.d/default.conf:ro</a:t>
             </a:r>
           </a:p>
           <a:p>
@@ -28862,7 +28976,7 @@
                 <a:ea typeface="Consolas"/>
                 <a:cs typeface="Consolas"/>
               </a:rPr>
-              <a:t> </a:t>
+              <a:t xml:space="preserve">    depends_on:</a:t>
             </a:r>
           </a:p>
           <a:p>
@@ -28875,7 +28989,7 @@
                 <a:ea typeface="Consolas"/>
                 <a:cs typeface="Consolas"/>
               </a:rPr>
-              <a:t>  redis:</a:t>
+              <a:t xml:space="preserve">      - app</a:t>
             </a:r>
           </a:p>
           <a:p>
@@ -28888,7 +29002,7 @@
                 <a:ea typeface="Consolas"/>
                 <a:cs typeface="Consolas"/>
               </a:rPr>
-              <a:t>    image: redis:7-alpine</a:t>
+              <a:t xml:space="preserve"> </a:t>
             </a:r>
           </a:p>
           <a:p>
@@ -28901,7 +29015,7 @@
                 <a:ea typeface="Consolas"/>
                 <a:cs typeface="Consolas"/>
               </a:rPr>
-              <a:t>    container_name: compose-redis</a:t>
+              <a:t xml:space="preserve">  app:</a:t>
             </a:r>
           </a:p>
           <a:p>
@@ -28914,7 +29028,7 @@
                 <a:ea typeface="Consolas"/>
                 <a:cs typeface="Consolas"/>
               </a:rPr>
-              <a:t>    restart: unless-stopped</a:t>
+              <a:t xml:space="preserve">    image: python:3.11</a:t>
             </a:r>
           </a:p>
           <a:p>
@@ -28927,7 +29041,7 @@
                 <a:ea typeface="Consolas"/>
                 <a:cs typeface="Consolas"/>
               </a:rPr>
-              <a:t>    ports:</a:t>
+              <a:t xml:space="preserve">    container_name: compose-flask</a:t>
             </a:r>
           </a:p>
           <a:p>
@@ -28940,7 +29054,85 @@
                 <a:ea typeface="Consolas"/>
                 <a:cs typeface="Consolas"/>
               </a:rPr>
-              <a:t>      - "6379:6379"</a:t>
+              <a:t xml:space="preserve">    working_dir: /app</a:t>
+            </a:r>
+          </a:p>
+          <a:p>
+            <a:r>
+              <a:rPr lang="zh-TW" sz="1150">
+                <a:solidFill>
+                  <a:srgbClr val="E5E7EB"/>
+                </a:solidFill>
+                <a:latin typeface="Consolas"/>
+                <a:ea typeface="Consolas"/>
+                <a:cs typeface="Consolas"/>
+              </a:rPr>
+              <a:t xml:space="preserve">    restart: unless-stopped</a:t>
+            </a:r>
+          </a:p>
+          <a:p>
+            <a:r>
+              <a:rPr lang="zh-TW" sz="1150">
+                <a:solidFill>
+                  <a:srgbClr val="E5E7EB"/>
+                </a:solidFill>
+                <a:latin typeface="Consolas"/>
+                <a:ea typeface="Consolas"/>
+                <a:cs typeface="Consolas"/>
+              </a:rPr>
+              <a:t xml:space="preserve">    volumes:</a:t>
+            </a:r>
+          </a:p>
+          <a:p>
+            <a:r>
+              <a:rPr lang="zh-TW" sz="1150">
+                <a:solidFill>
+                  <a:srgbClr val="E5E7EB"/>
+                </a:solidFill>
+                <a:latin typeface="Consolas"/>
+                <a:ea typeface="Consolas"/>
+                <a:cs typeface="Consolas"/>
+              </a:rPr>
+              <a:t xml:space="preserve">      - ./app:/app</a:t>
+            </a:r>
+          </a:p>
+          <a:p>
+            <a:r>
+              <a:rPr lang="zh-TW" sz="1150">
+                <a:solidFill>
+                  <a:srgbClr val="E5E7EB"/>
+                </a:solidFill>
+                <a:latin typeface="Consolas"/>
+                <a:ea typeface="Consolas"/>
+                <a:cs typeface="Consolas"/>
+              </a:rPr>
+              <a:t xml:space="preserve">    expose:</a:t>
+            </a:r>
+          </a:p>
+          <a:p>
+            <a:r>
+              <a:rPr lang="zh-TW" sz="1150">
+                <a:solidFill>
+                  <a:srgbClr val="E5E7EB"/>
+                </a:solidFill>
+                <a:latin typeface="Consolas"/>
+                <a:ea typeface="Consolas"/>
+                <a:cs typeface="Consolas"/>
+              </a:rPr>
+              <a:t xml:space="preserve">      - "5000"</a:t>
+            </a:r>
+          </a:p>
+          <a:p>
+            <a:r>
+              <a:rPr lang="zh-TW" sz="1150">
+                <a:solidFill>
+                  <a:srgbClr val="E5E7EB"/>
+                </a:solidFill>
+                <a:latin typeface="Consolas"/>
+                <a:ea typeface="Consolas"/>
+                <a:cs typeface="Consolas"/>
+              </a:rPr>
+              <a:t xml:space="preserve">    command: sh -c "pip install -r requirements.txt &amp;&amp; python app.py"</a:t>
             </a:r>
           </a:p>
         </p:txBody>
@@ -29032,7 +29224,7 @@
 </file>
 
 <file path=ppt/slides/slide37.xml><?xml version="1.0" encoding="utf-8"?>
-<p:sld xmlns:a="http://schemas.openxmlformats.org/drawingml/2006/main" xmlns:r="http://schemas.openxmlformats.org/officeDocument/2006/relationships" xmlns:p="http://schemas.openxmlformats.org/presentationml/2006/main">
+<p:sld xmlns:a="http://schemas.openxmlformats.org/drawingml/2006/main" xmlns:p="http://schemas.openxmlformats.org/presentationml/2006/main">
   <p:cSld name="範例程式碼：Nginx + MySQL compose.yml (1/2)">
     <p:bg>
       <p:bgPr>
@@ -29115,10 +29307,7 @@
           </a:ln>
         </p:spPr>
         <p:txBody>
-          <a:bodyPr wrap="square" rtlCol="0">
-            <a:spAutoFit/>
-          </a:bodyPr>
-          <a:lstStyle/>
+          <a:bodyPr/>
           <a:p>
             <a:r>
               <a:rPr lang="zh-TW" sz="2300" b="1">
@@ -29129,7 +29318,7 @@
                 <a:ea typeface="Aptos"/>
                 <a:cs typeface="Aptos"/>
               </a:rPr>
-              <a:t>範例程式碼：Nginx + MySQL compose.yml (1/2)</a:t>
+              <a:t xml:space="preserve">範例程式碼：Nginx + Flask + MySQL compose.yml (1/2)</a:t>
             </a:r>
           </a:p>
         </p:txBody>
@@ -29236,10 +29425,7 @@
           </a:ln>
         </p:spPr>
         <p:txBody>
-          <a:bodyPr wrap="square" rtlCol="0">
-            <a:spAutoFit/>
-          </a:bodyPr>
-          <a:lstStyle/>
+          <a:bodyPr/>
           <a:p>
             <a:r>
               <a:rPr lang="zh-TW" sz="1050">
@@ -29250,7 +29436,7 @@
                 <a:ea typeface="Consolas"/>
                 <a:cs typeface="Consolas"/>
               </a:rPr>
-              <a:t>services:</a:t>
+              <a:t xml:space="preserve">services:</a:t>
             </a:r>
           </a:p>
           <a:p>
@@ -29263,7 +29449,7 @@
                 <a:ea typeface="Consolas"/>
                 <a:cs typeface="Consolas"/>
               </a:rPr>
-              <a:t>  # Nginx 網頁伺服器</a:t>
+              <a:t xml:space="preserve">  web:</a:t>
             </a:r>
           </a:p>
           <a:p>
@@ -29276,7 +29462,7 @@
                 <a:ea typeface="Consolas"/>
                 <a:cs typeface="Consolas"/>
               </a:rPr>
-              <a:t>  web:</a:t>
+              <a:t xml:space="preserve">    image: nginx:alpine</a:t>
             </a:r>
           </a:p>
           <a:p>
@@ -29289,7 +29475,7 @@
                 <a:ea typeface="Consolas"/>
                 <a:cs typeface="Consolas"/>
               </a:rPr>
-              <a:t>    image: nginx</a:t>
+              <a:t xml:space="preserve">    container_name: demo-nginx</a:t>
             </a:r>
           </a:p>
           <a:p>
@@ -29302,7 +29488,7 @@
                 <a:ea typeface="Consolas"/>
                 <a:cs typeface="Consolas"/>
               </a:rPr>
-              <a:t>    container_name: demo-web</a:t>
+              <a:t xml:space="preserve">    restart: unless-stopped</a:t>
             </a:r>
           </a:p>
           <a:p>
@@ -29315,7 +29501,7 @@
                 <a:ea typeface="Consolas"/>
                 <a:cs typeface="Consolas"/>
               </a:rPr>
-              <a:t>    restart: unless-stopped</a:t>
+              <a:t xml:space="preserve">    ports:</a:t>
             </a:r>
           </a:p>
           <a:p>
@@ -29328,7 +29514,7 @@
                 <a:ea typeface="Consolas"/>
                 <a:cs typeface="Consolas"/>
               </a:rPr>
-              <a:t>    ports:</a:t>
+              <a:t xml:space="preserve">      - "8080:80"</a:t>
             </a:r>
           </a:p>
           <a:p>
@@ -29341,7 +29527,7 @@
                 <a:ea typeface="Consolas"/>
                 <a:cs typeface="Consolas"/>
               </a:rPr>
-              <a:t>      - "8080:80"</a:t>
+              <a:t xml:space="preserve">    volumes:</a:t>
             </a:r>
           </a:p>
           <a:p>
@@ -29354,7 +29540,7 @@
                 <a:ea typeface="Consolas"/>
                 <a:cs typeface="Consolas"/>
               </a:rPr>
-              <a:t>    volumes:</a:t>
+              <a:t xml:space="preserve">      - ./nginx/default.conf:/etc/nginx/conf.d/default.conf:ro</a:t>
             </a:r>
           </a:p>
           <a:p>
@@ -29367,7 +29553,7 @@
                 <a:ea typeface="Consolas"/>
                 <a:cs typeface="Consolas"/>
               </a:rPr>
-              <a:t>      - ./html:/usr/share/nginx/html:ro</a:t>
+              <a:t xml:space="preserve">    depends_on:</a:t>
             </a:r>
           </a:p>
           <a:p>
@@ -29380,7 +29566,7 @@
                 <a:ea typeface="Consolas"/>
                 <a:cs typeface="Consolas"/>
               </a:rPr>
-              <a:t> </a:t>
+              <a:t xml:space="preserve">      - app</a:t>
             </a:r>
           </a:p>
           <a:p>
@@ -29393,7 +29579,7 @@
                 <a:ea typeface="Consolas"/>
                 <a:cs typeface="Consolas"/>
               </a:rPr>
-              <a:t>  # MySQL 資料庫</a:t>
+              <a:t xml:space="preserve"> </a:t>
             </a:r>
           </a:p>
           <a:p>
@@ -29406,7 +29592,7 @@
                 <a:ea typeface="Consolas"/>
                 <a:cs typeface="Consolas"/>
               </a:rPr>
-              <a:t>  db:</a:t>
+              <a:t xml:space="preserve">  app:</a:t>
             </a:r>
           </a:p>
           <a:p>
@@ -29419,7 +29605,7 @@
                 <a:ea typeface="Consolas"/>
                 <a:cs typeface="Consolas"/>
               </a:rPr>
-              <a:t>    image: mysql:8.0</a:t>
+              <a:t xml:space="preserve">    image: python:3.11</a:t>
             </a:r>
           </a:p>
           <a:p>
@@ -29432,7 +29618,7 @@
                 <a:ea typeface="Consolas"/>
                 <a:cs typeface="Consolas"/>
               </a:rPr>
-              <a:t>    container_name: demo-mysql</a:t>
+              <a:t xml:space="preserve">    container_name: demo-flask</a:t>
             </a:r>
           </a:p>
           <a:p>
@@ -29445,7 +29631,7 @@
                 <a:ea typeface="Consolas"/>
                 <a:cs typeface="Consolas"/>
               </a:rPr>
-              <a:t>    restart: unless-stopped</a:t>
+              <a:t xml:space="preserve">    working_dir: /app</a:t>
             </a:r>
           </a:p>
           <a:p>
@@ -29458,7 +29644,7 @@
                 <a:ea typeface="Consolas"/>
                 <a:cs typeface="Consolas"/>
               </a:rPr>
-              <a:t>    environment:</a:t>
+              <a:t xml:space="preserve">    restart: unless-stopped</a:t>
             </a:r>
           </a:p>
           <a:p>
@@ -29471,7 +29657,7 @@
                 <a:ea typeface="Consolas"/>
                 <a:cs typeface="Consolas"/>
               </a:rPr>
-              <a:t>      MYSQL_ROOT_PASSWORD: root1234</a:t>
+              <a:t xml:space="preserve">    volumes:</a:t>
             </a:r>
           </a:p>
           <a:p>
@@ -29484,46 +29670,7 @@
                 <a:ea typeface="Consolas"/>
                 <a:cs typeface="Consolas"/>
               </a:rPr>
-              <a:t>      MYSQL_DATABASE: demo_db</a:t>
-            </a:r>
-          </a:p>
-          <a:p>
-            <a:r>
-              <a:rPr lang="zh-TW" sz="1050">
-                <a:solidFill>
-                  <a:srgbClr val="E5E7EB"/>
-                </a:solidFill>
-                <a:latin typeface="Consolas"/>
-                <a:ea typeface="Consolas"/>
-                <a:cs typeface="Consolas"/>
-              </a:rPr>
-              <a:t>      MYSQL_USER: demo_user</a:t>
-            </a:r>
-          </a:p>
-          <a:p>
-            <a:r>
-              <a:rPr lang="zh-TW" sz="1050">
-                <a:solidFill>
-                  <a:srgbClr val="E5E7EB"/>
-                </a:solidFill>
-                <a:latin typeface="Consolas"/>
-                <a:ea typeface="Consolas"/>
-                <a:cs typeface="Consolas"/>
-              </a:rPr>
-              <a:t>      MYSQL_PASSWORD: demo_pass</a:t>
-            </a:r>
-          </a:p>
-          <a:p>
-            <a:r>
-              <a:rPr lang="zh-TW" sz="1050">
-                <a:solidFill>
-                  <a:srgbClr val="E5E7EB"/>
-                </a:solidFill>
-                <a:latin typeface="Consolas"/>
-                <a:ea typeface="Consolas"/>
-                <a:cs typeface="Consolas"/>
-              </a:rPr>
-              <a:t>    ports:</a:t>
+              <a:t xml:space="preserve">      - ./app:/app</a:t>
             </a:r>
           </a:p>
         </p:txBody>
@@ -29615,7 +29762,7 @@
 </file>
 
 <file path=ppt/slides/slide38.xml><?xml version="1.0" encoding="utf-8"?>
-<p:sld xmlns:a="http://schemas.openxmlformats.org/drawingml/2006/main" xmlns:r="http://schemas.openxmlformats.org/officeDocument/2006/relationships" xmlns:p="http://schemas.openxmlformats.org/presentationml/2006/main">
+<p:sld xmlns:a="http://schemas.openxmlformats.org/drawingml/2006/main" xmlns:p="http://schemas.openxmlformats.org/presentationml/2006/main">
   <p:cSld name="範例程式碼：Nginx + MySQL compose.yml (2/2)">
     <p:bg>
       <p:bgPr>
@@ -29698,10 +29845,7 @@
           </a:ln>
         </p:spPr>
         <p:txBody>
-          <a:bodyPr wrap="square" rtlCol="0">
-            <a:spAutoFit/>
-          </a:bodyPr>
-          <a:lstStyle/>
+          <a:bodyPr/>
           <a:p>
             <a:r>
               <a:rPr lang="zh-TW" sz="2300" b="1">
@@ -29712,7 +29856,7 @@
                 <a:ea typeface="Aptos"/>
                 <a:cs typeface="Aptos"/>
               </a:rPr>
-              <a:t>範例程式碼：Nginx + MySQL compose.yml (2/2)</a:t>
+              <a:t xml:space="preserve">範例程式碼：Nginx + Flask + MySQL compose.yml (2/2)</a:t>
             </a:r>
           </a:p>
         </p:txBody>
@@ -29819,10 +29963,7 @@
           </a:ln>
         </p:spPr>
         <p:txBody>
-          <a:bodyPr wrap="square" rtlCol="0">
-            <a:spAutoFit/>
-          </a:bodyPr>
-          <a:lstStyle/>
+          <a:bodyPr/>
           <a:p>
             <a:r>
               <a:rPr lang="zh-TW" sz="1150">
@@ -29833,7 +29974,7 @@
                 <a:ea typeface="Consolas"/>
                 <a:cs typeface="Consolas"/>
               </a:rPr>
-              <a:t>      - "3306:3306"</a:t>
+              <a:t xml:space="preserve">    environment:</a:t>
             </a:r>
           </a:p>
           <a:p>
@@ -29846,7 +29987,7 @@
                 <a:ea typeface="Consolas"/>
                 <a:cs typeface="Consolas"/>
               </a:rPr>
-              <a:t>    volumes:</a:t>
+              <a:t xml:space="preserve">      DB_HOST: db</a:t>
             </a:r>
           </a:p>
           <a:p>
@@ -29859,7 +30000,7 @@
                 <a:ea typeface="Consolas"/>
                 <a:cs typeface="Consolas"/>
               </a:rPr>
-              <a:t>      - db-data:/var/lib/mysql</a:t>
+              <a:t xml:space="preserve">      DB_NAME: demo_db</a:t>
             </a:r>
           </a:p>
           <a:p>
@@ -29872,7 +30013,7 @@
                 <a:ea typeface="Consolas"/>
                 <a:cs typeface="Consolas"/>
               </a:rPr>
-              <a:t> </a:t>
+              <a:t xml:space="preserve">      DB_USER: demo_user</a:t>
             </a:r>
           </a:p>
           <a:p>
@@ -29885,7 +30026,7 @@
                 <a:ea typeface="Consolas"/>
                 <a:cs typeface="Consolas"/>
               </a:rPr>
-              <a:t>volumes:</a:t>
+              <a:t xml:space="preserve">      DB_PASSWORD: demo_pass</a:t>
             </a:r>
           </a:p>
           <a:p>
@@ -29898,7 +30039,215 @@
                 <a:ea typeface="Consolas"/>
                 <a:cs typeface="Consolas"/>
               </a:rPr>
-              <a:t>  db-data:</a:t>
+              <a:t xml:space="preserve">    expose:</a:t>
+            </a:r>
+          </a:p>
+          <a:p>
+            <a:r>
+              <a:rPr lang="zh-TW" sz="1150">
+                <a:solidFill>
+                  <a:srgbClr val="E5E7EB"/>
+                </a:solidFill>
+                <a:latin typeface="Consolas"/>
+                <a:ea typeface="Consolas"/>
+                <a:cs typeface="Consolas"/>
+              </a:rPr>
+              <a:t xml:space="preserve">      - "5000"</a:t>
+            </a:r>
+          </a:p>
+          <a:p>
+            <a:r>
+              <a:rPr lang="zh-TW" sz="1150">
+                <a:solidFill>
+                  <a:srgbClr val="E5E7EB"/>
+                </a:solidFill>
+                <a:latin typeface="Consolas"/>
+                <a:ea typeface="Consolas"/>
+                <a:cs typeface="Consolas"/>
+              </a:rPr>
+              <a:t xml:space="preserve">    command: sh -c "pip install -r requirements.txt &amp;&amp; python app.py"</a:t>
+            </a:r>
+          </a:p>
+          <a:p>
+            <a:r>
+              <a:rPr lang="zh-TW" sz="1150">
+                <a:solidFill>
+                  <a:srgbClr val="E5E7EB"/>
+                </a:solidFill>
+                <a:latin typeface="Consolas"/>
+                <a:ea typeface="Consolas"/>
+                <a:cs typeface="Consolas"/>
+              </a:rPr>
+              <a:t xml:space="preserve"> </a:t>
+            </a:r>
+          </a:p>
+          <a:p>
+            <a:r>
+              <a:rPr lang="zh-TW" sz="1150">
+                <a:solidFill>
+                  <a:srgbClr val="E5E7EB"/>
+                </a:solidFill>
+                <a:latin typeface="Consolas"/>
+                <a:ea typeface="Consolas"/>
+                <a:cs typeface="Consolas"/>
+              </a:rPr>
+              <a:t xml:space="preserve">  db:</a:t>
+            </a:r>
+          </a:p>
+          <a:p>
+            <a:r>
+              <a:rPr lang="zh-TW" sz="1150">
+                <a:solidFill>
+                  <a:srgbClr val="E5E7EB"/>
+                </a:solidFill>
+                <a:latin typeface="Consolas"/>
+                <a:ea typeface="Consolas"/>
+                <a:cs typeface="Consolas"/>
+              </a:rPr>
+              <a:t xml:space="preserve">    image: mysql:8.0</a:t>
+            </a:r>
+          </a:p>
+          <a:p>
+            <a:r>
+              <a:rPr lang="zh-TW" sz="1150">
+                <a:solidFill>
+                  <a:srgbClr val="E5E7EB"/>
+                </a:solidFill>
+                <a:latin typeface="Consolas"/>
+                <a:ea typeface="Consolas"/>
+                <a:cs typeface="Consolas"/>
+              </a:rPr>
+              <a:t xml:space="preserve">    container_name: demo-mysql</a:t>
+            </a:r>
+          </a:p>
+          <a:p>
+            <a:r>
+              <a:rPr lang="zh-TW" sz="1150">
+                <a:solidFill>
+                  <a:srgbClr val="E5E7EB"/>
+                </a:solidFill>
+                <a:latin typeface="Consolas"/>
+                <a:ea typeface="Consolas"/>
+                <a:cs typeface="Consolas"/>
+              </a:rPr>
+              <a:t xml:space="preserve">    environment:</a:t>
+            </a:r>
+          </a:p>
+          <a:p>
+            <a:r>
+              <a:rPr lang="zh-TW" sz="1150">
+                <a:solidFill>
+                  <a:srgbClr val="E5E7EB"/>
+                </a:solidFill>
+                <a:latin typeface="Consolas"/>
+                <a:ea typeface="Consolas"/>
+                <a:cs typeface="Consolas"/>
+              </a:rPr>
+              <a:t xml:space="preserve">      MYSQL_ROOT_PASSWORD: root1234</a:t>
+            </a:r>
+          </a:p>
+          <a:p>
+            <a:r>
+              <a:rPr lang="zh-TW" sz="1150">
+                <a:solidFill>
+                  <a:srgbClr val="E5E7EB"/>
+                </a:solidFill>
+                <a:latin typeface="Consolas"/>
+                <a:ea typeface="Consolas"/>
+                <a:cs typeface="Consolas"/>
+              </a:rPr>
+              <a:t xml:space="preserve">      MYSQL_DATABASE: demo_db</a:t>
+            </a:r>
+          </a:p>
+          <a:p>
+            <a:r>
+              <a:rPr lang="zh-TW" sz="1150">
+                <a:solidFill>
+                  <a:srgbClr val="E5E7EB"/>
+                </a:solidFill>
+                <a:latin typeface="Consolas"/>
+                <a:ea typeface="Consolas"/>
+                <a:cs typeface="Consolas"/>
+              </a:rPr>
+              <a:t xml:space="preserve">      MYSQL_USER: demo_user</a:t>
+            </a:r>
+          </a:p>
+          <a:p>
+            <a:r>
+              <a:rPr lang="zh-TW" sz="1150">
+                <a:solidFill>
+                  <a:srgbClr val="E5E7EB"/>
+                </a:solidFill>
+                <a:latin typeface="Consolas"/>
+                <a:ea typeface="Consolas"/>
+                <a:cs typeface="Consolas"/>
+              </a:rPr>
+              <a:t xml:space="preserve">      MYSQL_PASSWORD: demo_pass</a:t>
+            </a:r>
+          </a:p>
+          <a:p>
+            <a:r>
+              <a:rPr lang="zh-TW" sz="1150">
+                <a:solidFill>
+                  <a:srgbClr val="E5E7EB"/>
+                </a:solidFill>
+                <a:latin typeface="Consolas"/>
+                <a:ea typeface="Consolas"/>
+                <a:cs typeface="Consolas"/>
+              </a:rPr>
+              <a:t xml:space="preserve">    volumes:</a:t>
+            </a:r>
+          </a:p>
+          <a:p>
+            <a:r>
+              <a:rPr lang="zh-TW" sz="1150">
+                <a:solidFill>
+                  <a:srgbClr val="E5E7EB"/>
+                </a:solidFill>
+                <a:latin typeface="Consolas"/>
+                <a:ea typeface="Consolas"/>
+                <a:cs typeface="Consolas"/>
+              </a:rPr>
+              <a:t xml:space="preserve">      - db-data:/var/lib/mysql</a:t>
+            </a:r>
+          </a:p>
+          <a:p>
+            <a:r>
+              <a:rPr lang="zh-TW" sz="1150">
+                <a:solidFill>
+                  <a:srgbClr val="E5E7EB"/>
+                </a:solidFill>
+                <a:latin typeface="Consolas"/>
+                <a:ea typeface="Consolas"/>
+                <a:cs typeface="Consolas"/>
+              </a:rPr>
+              <a:t xml:space="preserve"> </a:t>
+            </a:r>
+          </a:p>
+          <a:p>
+            <a:r>
+              <a:rPr lang="zh-TW" sz="1150">
+                <a:solidFill>
+                  <a:srgbClr val="E5E7EB"/>
+                </a:solidFill>
+                <a:latin typeface="Consolas"/>
+                <a:ea typeface="Consolas"/>
+                <a:cs typeface="Consolas"/>
+              </a:rPr>
+              <a:t xml:space="preserve">volumes:</a:t>
+            </a:r>
+          </a:p>
+          <a:p>
+            <a:r>
+              <a:rPr lang="zh-TW" sz="1150">
+                <a:solidFill>
+                  <a:srgbClr val="E5E7EB"/>
+                </a:solidFill>
+                <a:latin typeface="Consolas"/>
+                <a:ea typeface="Consolas"/>
+                <a:cs typeface="Consolas"/>
+              </a:rPr>
+              <a:t xml:space="preserve">  db-data:</a:t>
             </a:r>
           </a:p>
         </p:txBody>

--- a/slides/docker-session3-mysql-compose.pptx
+++ b/slides/docker-session3-mysql-compose.pptx
@@ -28502,7 +28502,7 @@
           </a:p>
           <a:p>
             <a:r>
-              <a:rPr sz="1100" dirty="0">
+              <a:rPr lang="zh-TW" altLang="en-US" sz="1100" dirty="0">
                 <a:solidFill>
                   <a:srgbClr val="E5E7EB"/>
                 </a:solidFill>
@@ -28513,7 +28513,7 @@
               <a:t>    </a:t>
             </a:r>
             <a:r>
-              <a:rPr sz="1100" dirty="0" err="1">
+              <a:rPr sz="1100" dirty="0">
                 <a:solidFill>
                   <a:srgbClr val="E5E7EB"/>
                 </a:solidFill>
@@ -28521,50 +28521,7 @@
                 <a:ea typeface="Consolas"/>
                 <a:cs typeface="Consolas"/>
               </a:rPr>
-              <a:t>container_name</a:t>
-            </a:r>
-            <a:r>
-              <a:rPr sz="1100" dirty="0">
-                <a:solidFill>
-                  <a:srgbClr val="E5E7EB"/>
-                </a:solidFill>
-                <a:latin typeface="Consolas"/>
-                <a:ea typeface="Consolas"/>
-                <a:cs typeface="Consolas"/>
-              </a:rPr>
-              <a:t>: my-</a:t>
-            </a:r>
-            <a:r>
-              <a:rPr sz="1100" dirty="0" err="1">
-                <a:solidFill>
-                  <a:srgbClr val="E5E7EB"/>
-                </a:solidFill>
-                <a:latin typeface="Consolas"/>
-                <a:ea typeface="Consolas"/>
-                <a:cs typeface="Consolas"/>
-              </a:rPr>
-              <a:t>mysql</a:t>
-            </a:r>
-            <a:endParaRPr sz="1100" dirty="0">
-              <a:solidFill>
-                <a:srgbClr val="E5E7EB"/>
-              </a:solidFill>
-              <a:latin typeface="Consolas"/>
-              <a:ea typeface="Consolas"/>
-              <a:cs typeface="Consolas"/>
-            </a:endParaRPr>
-          </a:p>
-          <a:p>
-            <a:r>
-              <a:rPr sz="1100" dirty="0">
-                <a:solidFill>
-                  <a:srgbClr val="E5E7EB"/>
-                </a:solidFill>
-                <a:latin typeface="Consolas"/>
-                <a:ea typeface="Consolas"/>
-                <a:cs typeface="Consolas"/>
-              </a:rPr>
-              <a:t>    restart: unless-stopped</a:t>
+              <a:t>restart: unless-stopped</a:t>
             </a:r>
           </a:p>
           <a:p>

--- a/slides/docker-session3-mysql-compose.pptx
+++ b/slides/docker-session3-mysql-compose.pptx
@@ -11344,7 +11344,7 @@
               </a:defRPr>
             </a:pPr>
             <a:r>
-              <a:rPr sz="1275" b="0">
+              <a:rPr sz="1275" b="0" dirty="0">
                 <a:solidFill>
                   <a:srgbClr val="E5E7EB"/>
                 </a:solidFill>
@@ -11352,7 +11352,139 @@
                 <a:ea typeface="Consolas"/>
                 <a:cs typeface="Consolas"/>
               </a:rPr>
-              <a:t>docker run -d --name my-mysql -e MYSQL_ROOT_PASSWORD=my-secret-pw -e MYSQL_DATABASE=testdb -e MYSQL_USER=testuser -e MYSQL_PASSWORD=testpass -p 3306:3306 -v mysql-data:/var/lib/mysql mysql:8.0</a:t>
+              <a:t>docker run -d --name my-</a:t>
+            </a:r>
+            <a:r>
+              <a:rPr sz="1275" b="0" dirty="0" err="1">
+                <a:solidFill>
+                  <a:srgbClr val="E5E7EB"/>
+                </a:solidFill>
+                <a:latin typeface="Consolas"/>
+                <a:ea typeface="Consolas"/>
+                <a:cs typeface="Consolas"/>
+              </a:rPr>
+              <a:t>mysql</a:t>
+            </a:r>
+            <a:r>
+              <a:rPr sz="1275" b="0" dirty="0">
+                <a:solidFill>
+                  <a:srgbClr val="E5E7EB"/>
+                </a:solidFill>
+                <a:latin typeface="Consolas"/>
+                <a:ea typeface="Consolas"/>
+                <a:cs typeface="Consolas"/>
+              </a:rPr>
+              <a:t> -e MYSQL_ROOT_PASSWORD=my-secret-pw -e MYSQL_DATABASE=</a:t>
+            </a:r>
+            <a:r>
+              <a:rPr sz="1275" b="0" dirty="0" err="1">
+                <a:solidFill>
+                  <a:srgbClr val="E5E7EB"/>
+                </a:solidFill>
+                <a:latin typeface="Consolas"/>
+                <a:ea typeface="Consolas"/>
+                <a:cs typeface="Consolas"/>
+              </a:rPr>
+              <a:t>testdb</a:t>
+            </a:r>
+            <a:r>
+              <a:rPr sz="1275" b="0" dirty="0">
+                <a:solidFill>
+                  <a:srgbClr val="E5E7EB"/>
+                </a:solidFill>
+                <a:latin typeface="Consolas"/>
+                <a:ea typeface="Consolas"/>
+                <a:cs typeface="Consolas"/>
+              </a:rPr>
+              <a:t> -e MYSQL_USER=</a:t>
+            </a:r>
+            <a:r>
+              <a:rPr sz="1275" b="0" dirty="0" err="1">
+                <a:solidFill>
+                  <a:srgbClr val="E5E7EB"/>
+                </a:solidFill>
+                <a:latin typeface="Consolas"/>
+                <a:ea typeface="Consolas"/>
+                <a:cs typeface="Consolas"/>
+              </a:rPr>
+              <a:t>testuser</a:t>
+            </a:r>
+            <a:r>
+              <a:rPr sz="1275" b="0" dirty="0">
+                <a:solidFill>
+                  <a:srgbClr val="E5E7EB"/>
+                </a:solidFill>
+                <a:latin typeface="Consolas"/>
+                <a:ea typeface="Consolas"/>
+                <a:cs typeface="Consolas"/>
+              </a:rPr>
+              <a:t> -e MYSQL_PASSWORD=</a:t>
+            </a:r>
+            <a:r>
+              <a:rPr sz="1275" b="0" dirty="0" err="1">
+                <a:solidFill>
+                  <a:srgbClr val="E5E7EB"/>
+                </a:solidFill>
+                <a:latin typeface="Consolas"/>
+                <a:ea typeface="Consolas"/>
+                <a:cs typeface="Consolas"/>
+              </a:rPr>
+              <a:t>testpass</a:t>
+            </a:r>
+            <a:r>
+              <a:rPr sz="1275" b="0" dirty="0">
+                <a:solidFill>
+                  <a:srgbClr val="E5E7EB"/>
+                </a:solidFill>
+                <a:latin typeface="Consolas"/>
+                <a:ea typeface="Consolas"/>
+                <a:cs typeface="Consolas"/>
+              </a:rPr>
+              <a:t> -p 3306:3306 -v </a:t>
+            </a:r>
+            <a:r>
+              <a:rPr sz="1275" b="0" dirty="0" err="1">
+                <a:solidFill>
+                  <a:srgbClr val="E5E7EB"/>
+                </a:solidFill>
+                <a:latin typeface="Consolas"/>
+                <a:ea typeface="Consolas"/>
+                <a:cs typeface="Consolas"/>
+              </a:rPr>
+              <a:t>mysql</a:t>
+            </a:r>
+            <a:r>
+              <a:rPr sz="1275" b="0" dirty="0">
+                <a:solidFill>
+                  <a:srgbClr val="E5E7EB"/>
+                </a:solidFill>
+                <a:latin typeface="Consolas"/>
+                <a:ea typeface="Consolas"/>
+                <a:cs typeface="Consolas"/>
+              </a:rPr>
+              <a:t>-data:/var/lib/</a:t>
+            </a:r>
+            <a:r>
+              <a:rPr sz="1275" b="0" dirty="0" err="1">
+                <a:solidFill>
+                  <a:srgbClr val="E5E7EB"/>
+                </a:solidFill>
+                <a:latin typeface="Consolas"/>
+                <a:ea typeface="Consolas"/>
+                <a:cs typeface="Consolas"/>
+              </a:rPr>
+              <a:t>mysql</a:t>
+            </a:r>
+            <a:r>
+              <a:rPr sz="1275" b="0" dirty="0">
+                <a:solidFill>
+                  <a:srgbClr val="E5E7EB"/>
+                </a:solidFill>
+                <a:latin typeface="Consolas"/>
+                <a:ea typeface="Consolas"/>
+                <a:cs typeface="Consolas"/>
+              </a:rPr>
+              <a:t> mysql:8.0</a:t>
             </a:r>
           </a:p>
         </p:txBody>
@@ -28796,6 +28928,70 @@
               </a:rPr>
               <a:t>-data:</a:t>
             </a:r>
+            <a:endParaRPr lang="en-US" sz="1100" dirty="0">
+              <a:solidFill>
+                <a:srgbClr val="E5E7EB"/>
+              </a:solidFill>
+              <a:latin typeface="Consolas"/>
+              <a:ea typeface="Consolas"/>
+              <a:cs typeface="Consolas"/>
+            </a:endParaRPr>
+          </a:p>
+          <a:p>
+            <a:r>
+              <a:rPr lang="zh-TW" altLang="en-US" sz="1100" dirty="0">
+                <a:solidFill>
+                  <a:srgbClr val="E5E7EB"/>
+                </a:solidFill>
+                <a:latin typeface="Consolas"/>
+                <a:ea typeface="Consolas"/>
+                <a:cs typeface="Consolas"/>
+              </a:rPr>
+              <a:t>      </a:t>
+            </a:r>
+            <a:r>
+              <a:rPr lang="en-US" altLang="zh-TW" sz="1100" dirty="0">
+                <a:solidFill>
+                  <a:srgbClr val="E5E7EB"/>
+                </a:solidFill>
+                <a:latin typeface="Consolas"/>
+                <a:ea typeface="Consolas"/>
+                <a:cs typeface="Consolas"/>
+              </a:rPr>
+              <a:t>external: true(</a:t>
+            </a:r>
+            <a:r>
+              <a:rPr lang="zh-TW" altLang="en-US" sz="1100" dirty="0">
+                <a:solidFill>
+                  <a:srgbClr val="E5E7EB"/>
+                </a:solidFill>
+                <a:latin typeface="Consolas"/>
+                <a:ea typeface="Consolas"/>
+                <a:cs typeface="Consolas"/>
+              </a:rPr>
+              <a:t>選填</a:t>
+            </a:r>
+            <a:r>
+              <a:rPr lang="en-US" altLang="zh-TW" sz="1100" dirty="0">
+                <a:solidFill>
+                  <a:srgbClr val="E5E7EB"/>
+                </a:solidFill>
+                <a:latin typeface="Consolas"/>
+                <a:ea typeface="Consolas"/>
+                <a:cs typeface="Consolas"/>
+              </a:rPr>
+              <a:t>)</a:t>
+            </a:r>
+          </a:p>
+          <a:p>
+            <a:endParaRPr lang="zh-TW" altLang="en-US" sz="1100" dirty="0">
+              <a:solidFill>
+                <a:srgbClr val="E5E7EB"/>
+              </a:solidFill>
+              <a:latin typeface="Consolas"/>
+              <a:ea typeface="Consolas"/>
+              <a:cs typeface="Consolas"/>
+            </a:endParaRPr>
           </a:p>
         </p:txBody>
       </p:sp>
